--- a/Docs/Presentacion Proyecto.pptx
+++ b/Docs/Presentacion Proyecto.pptx
@@ -5,28 +5,35 @@
     <p:sldMasterId id="2147483654" r:id="rId1"/>
   </p:sldMasterIdLst>
   <p:notesMasterIdLst>
-    <p:notesMasterId r:id="rId15"/>
+    <p:notesMasterId r:id="rId16"/>
   </p:notesMasterIdLst>
   <p:handoutMasterIdLst>
-    <p:handoutMasterId r:id="rId16"/>
+    <p:handoutMasterId r:id="rId17"/>
   </p:handoutMasterIdLst>
   <p:sldIdLst>
-    <p:sldId id="567" r:id="rId2"/>
-    <p:sldId id="572" r:id="rId3"/>
-    <p:sldId id="583" r:id="rId4"/>
-    <p:sldId id="574" r:id="rId5"/>
-    <p:sldId id="575" r:id="rId6"/>
-    <p:sldId id="576" r:id="rId7"/>
-    <p:sldId id="577" r:id="rId8"/>
-    <p:sldId id="578" r:id="rId9"/>
-    <p:sldId id="579" r:id="rId10"/>
-    <p:sldId id="580" r:id="rId11"/>
-    <p:sldId id="581" r:id="rId12"/>
-    <p:sldId id="582" r:id="rId13"/>
-    <p:sldId id="573" r:id="rId14"/>
+    <p:sldId id="584" r:id="rId2"/>
+    <p:sldId id="567" r:id="rId3"/>
+    <p:sldId id="572" r:id="rId4"/>
+    <p:sldId id="583" r:id="rId5"/>
+    <p:sldId id="574" r:id="rId6"/>
+    <p:sldId id="575" r:id="rId7"/>
+    <p:sldId id="576" r:id="rId8"/>
+    <p:sldId id="577" r:id="rId9"/>
+    <p:sldId id="578" r:id="rId10"/>
+    <p:sldId id="579" r:id="rId11"/>
+    <p:sldId id="580" r:id="rId12"/>
+    <p:sldId id="581" r:id="rId13"/>
+    <p:sldId id="582" r:id="rId14"/>
+    <p:sldId id="573" r:id="rId15"/>
   </p:sldIdLst>
   <p:sldSz cx="12192000" cy="6858000"/>
   <p:notesSz cx="6858000" cy="9144000"/>
+  <p:embeddedFontLst>
+    <p:embeddedFont>
+      <p:font typeface="Roboto" panose="02000000000000000000" pitchFamily="2" charset="0"/>
+      <p:regular r:id="rId18"/>
+    </p:embeddedFont>
+  </p:embeddedFontLst>
   <p:defaultTextStyle>
     <a:defPPr marR="0" lvl="0" algn="l" rtl="0">
       <a:lnSpc>
@@ -369,7 +376,7 @@
           <a:p>
             <a:fld id="{C7416E3F-A1A2-40A0-B9A7-462EA52B02D6}" type="datetimeFigureOut">
               <a:rPr lang="es-CO" smtClean="0"/>
-              <a:t>7/09/2026</a:t>
+              <a:t>8/09/2026</a:t>
             </a:fld>
             <a:endParaRPr lang="es-CO"/>
           </a:p>
@@ -450,7 +457,7 @@
           <a:p>
             <a:fld id="{34B303DB-4ED4-4990-835B-0D261D76AFD6}" type="slidenum">
               <a:rPr lang="es-CO" smtClean="0"/>
-              <a:t>‹#›</a:t>
+              <a:t>‹Nº›</a:t>
             </a:fld>
             <a:endParaRPr lang="es-CO"/>
           </a:p>
@@ -1416,7 +1423,7 @@
                 <a:cs typeface="Arial"/>
                 <a:sym typeface="Arial"/>
               </a:rPr>
-              <a:t>‹#›</a:t>
+              <a:t>‹Nº›</a:t>
             </a:fld>
             <a:endParaRPr sz="1200" b="0" i="0" u="none" strike="noStrike" cap="none">
               <a:solidFill>
@@ -1884,7 +1891,7 @@
             <a:fld id="{B6F15528-21DE-4FAA-801E-634DDDAF4B2B}" type="slidenum">
               <a:rPr lang="en-US" smtClean="0"/>
               <a:pPr/>
-              <a:t>‹#›</a:t>
+              <a:t>‹Nº›</a:t>
             </a:fld>
             <a:endParaRPr lang="en-US"/>
           </a:p>
@@ -2049,7 +2056,7 @@
             <a:fld id="{B6F15528-21DE-4FAA-801E-634DDDAF4B2B}" type="slidenum">
               <a:rPr lang="en-US" smtClean="0"/>
               <a:pPr/>
-              <a:t>‹#›</a:t>
+              <a:t>‹Nº›</a:t>
             </a:fld>
             <a:endParaRPr lang="en-US"/>
           </a:p>
@@ -2224,7 +2231,7 @@
             <a:fld id="{B6F15528-21DE-4FAA-801E-634DDDAF4B2B}" type="slidenum">
               <a:rPr lang="en-US" smtClean="0"/>
               <a:pPr/>
-              <a:t>‹#›</a:t>
+              <a:t>‹Nº›</a:t>
             </a:fld>
             <a:endParaRPr lang="en-US"/>
           </a:p>
@@ -2624,7 +2631,7 @@
             <a:fld id="{B6F15528-21DE-4FAA-801E-634DDDAF4B2B}" type="slidenum">
               <a:rPr lang="en-US" smtClean="0"/>
               <a:pPr/>
-              <a:t>‹#›</a:t>
+              <a:t>‹Nº›</a:t>
             </a:fld>
             <a:endParaRPr lang="en-US" b="1"/>
           </a:p>
@@ -2805,7 +2812,7 @@
             <a:fld id="{B6F15528-21DE-4FAA-801E-634DDDAF4B2B}" type="slidenum">
               <a:rPr lang="en-US" smtClean="0"/>
               <a:pPr/>
-              <a:t>‹#›</a:t>
+              <a:t>‹Nº›</a:t>
             </a:fld>
             <a:endParaRPr lang="en-US"/>
           </a:p>
@@ -3047,7 +3054,7 @@
             <a:fld id="{B6F15528-21DE-4FAA-801E-634DDDAF4B2B}" type="slidenum">
               <a:rPr lang="en-US" smtClean="0"/>
               <a:pPr/>
-              <a:t>‹#›</a:t>
+              <a:t>‹Nº›</a:t>
             </a:fld>
             <a:endParaRPr lang="en-US"/>
           </a:p>
@@ -3329,7 +3336,7 @@
             <a:fld id="{B6F15528-21DE-4FAA-801E-634DDDAF4B2B}" type="slidenum">
               <a:rPr lang="en-US" smtClean="0"/>
               <a:pPr/>
-              <a:t>‹#›</a:t>
+              <a:t>‹Nº›</a:t>
             </a:fld>
             <a:endParaRPr lang="en-US"/>
           </a:p>
@@ -3745,7 +3752,7 @@
             <a:fld id="{B6F15528-21DE-4FAA-801E-634DDDAF4B2B}" type="slidenum">
               <a:rPr lang="en-US" smtClean="0"/>
               <a:pPr/>
-              <a:t>‹#›</a:t>
+              <a:t>‹Nº›</a:t>
             </a:fld>
             <a:endParaRPr lang="en-US"/>
           </a:p>
@@ -3859,7 +3866,7 @@
             <a:fld id="{B6F15528-21DE-4FAA-801E-634DDDAF4B2B}" type="slidenum">
               <a:rPr lang="en-US" smtClean="0"/>
               <a:pPr/>
-              <a:t>‹#›</a:t>
+              <a:t>‹Nº›</a:t>
             </a:fld>
             <a:endParaRPr lang="en-US"/>
           </a:p>
@@ -4161,7 +4168,7 @@
             <a:fld id="{B6F15528-21DE-4FAA-801E-634DDDAF4B2B}" type="slidenum">
               <a:rPr lang="en-US" smtClean="0"/>
               <a:pPr/>
-              <a:t>‹#›</a:t>
+              <a:t>‹Nº›</a:t>
             </a:fld>
             <a:endParaRPr lang="en-US"/>
           </a:p>
@@ -4410,7 +4417,7 @@
             <a:fld id="{B6F15528-21DE-4FAA-801E-634DDDAF4B2B}" type="slidenum">
               <a:rPr lang="en-US" smtClean="0"/>
               <a:pPr/>
-              <a:t>‹#›</a:t>
+              <a:t>‹Nº›</a:t>
             </a:fld>
             <a:endParaRPr lang="en-US"/>
           </a:p>
@@ -4654,7 +4661,7 @@
             <a:fld id="{B6F15528-21DE-4FAA-801E-634DDDAF4B2B}" type="slidenum">
               <a:rPr lang="en-US" smtClean="0"/>
               <a:pPr/>
-              <a:t>‹#›</a:t>
+              <a:t>‹Nº›</a:t>
             </a:fld>
             <a:endParaRPr lang="en-US"/>
           </a:p>
@@ -4957,7 +4964,13 @@
   <p:cSld>
     <p:spTree>
       <p:nvGrpSpPr>
-        <p:cNvPr id="1" name=""/>
+        <p:cNvPr id="1" name="">
+          <a:extLst>
+            <a:ext uri="{FF2B5EF4-FFF2-40B4-BE49-F238E27FC236}">
+              <a16:creationId xmlns:a16="http://schemas.microsoft.com/office/drawing/2014/main" id="{D947921A-C70B-A4FB-F020-54E1DE649F13}"/>
+            </a:ext>
+          </a:extLst>
+        </p:cNvPr>
         <p:cNvGrpSpPr/>
         <p:nvPr/>
       </p:nvGrpSpPr>
@@ -4971,10 +4984,10 @@
       </p:grpSpPr>
       <p:sp>
         <p:nvSpPr>
-          <p:cNvPr id="2" name="Título 1">
+          <p:cNvPr id="17" name="Título 16">
             <a:extLst>
               <a:ext uri="{FF2B5EF4-FFF2-40B4-BE49-F238E27FC236}">
-                <a16:creationId xmlns:a16="http://schemas.microsoft.com/office/drawing/2014/main" id="{8EBE6714-41D5-990D-C32E-DD99BC1FEB48}"/>
+                <a16:creationId xmlns:a16="http://schemas.microsoft.com/office/drawing/2014/main" id="{2B32DAC6-3C76-66E8-1460-D4AF65160F39}"/>
               </a:ext>
             </a:extLst>
           </p:cNvPr>
@@ -4987,507 +5000,35 @@
         </p:nvSpPr>
         <p:spPr/>
         <p:txBody>
-          <a:bodyPr wrap="square"/>
-          <a:lstStyle/>
-          <a:p>
-            <a:pPr algn="l"/>
-            <a:r>
-              <a:rPr lang="en-US" sz="3000" b="1">
-                <a:solidFill>
-                  <a:srgbClr val="0B7238"/>
-                </a:solidFill>
-                <a:latin typeface="Arial"/>
-              </a:rPr>
-              <a:t>TUCANGO | PROYECTO</a:t>
-            </a:r>
-          </a:p>
-        </p:txBody>
-      </p:sp>
-      <p:sp>
-        <p:nvSpPr>
-          <p:cNvPr id="3" name="Marcador de número de diapositiva 2">
-            <a:extLst>
-              <a:ext uri="{FF2B5EF4-FFF2-40B4-BE49-F238E27FC236}">
-                <a16:creationId xmlns:a16="http://schemas.microsoft.com/office/drawing/2014/main" id="{1D2DDE2C-7753-C136-8F93-91455CCE4CFC}"/>
-              </a:ext>
-            </a:extLst>
-          </p:cNvPr>
-          <p:cNvSpPr>
-            <a:spLocks noGrp="1"/>
-          </p:cNvSpPr>
-          <p:nvPr>
-            <p:ph type="sldNum" sz="quarter" idx="12"/>
-          </p:nvPr>
-        </p:nvSpPr>
-        <p:spPr/>
-        <p:txBody>
           <a:bodyPr/>
           <a:lstStyle/>
           <a:p>
-            <a:pPr algn="r"/>
-            <a:r>
-              <a:rPr lang="en-US" sz="1100" b="1">
-                <a:solidFill>
-                  <a:srgbClr val="5F6B65"/>
-                </a:solidFill>
-                <a:latin typeface="Arial"/>
-              </a:rPr>
-              <a:t>1</a:t>
-            </a:r>
-          </a:p>
-        </p:txBody>
-      </p:sp>
-      <p:sp>
-        <p:nvSpPr>
-          <p:cNvPr id="4" name="TextBox 3"/>
-          <p:cNvSpPr txBox="1"/>
-          <p:nvPr/>
-        </p:nvSpPr>
-        <p:spPr>
-          <a:xfrm>
-            <a:off x="594360" y="1353312"/>
-            <a:ext cx="6949440" cy="256032"/>
-          </a:xfrm>
-          <a:prstGeom prst="rect">
-            <a:avLst/>
-          </a:prstGeom>
-          <a:noFill/>
-        </p:spPr>
-        <p:txBody>
-          <a:bodyPr wrap="square" lIns="27432" tIns="27432" rIns="27432" bIns="27432" anchor="t"/>
-          <a:lstStyle/>
-          <a:p>
-            <a:pPr algn="l">
-              <a:lnSpc>
-                <a:spcPct val="100000"/>
-              </a:lnSpc>
-            </a:pPr>
-            <a:r>
-              <a:rPr sz="1400" b="1" i="0">
-                <a:solidFill>
-                  <a:srgbClr val="0B7238"/>
-                </a:solidFill>
-                <a:latin typeface="Arial"/>
-              </a:rPr>
-              <a:t>INGENIERÍA DE SISTEMAS · UNIVERSIDAD DE LA AMAZONIA</a:t>
-            </a:r>
-          </a:p>
-        </p:txBody>
-      </p:sp>
-      <p:cxnSp>
-        <p:nvCxnSpPr>
-          <p:cNvPr id="5" name="Connector 4"/>
-          <p:cNvCxnSpPr/>
-          <p:nvPr/>
-        </p:nvCxnSpPr>
-        <p:spPr>
-          <a:xfrm>
-            <a:off x="603504" y="1810512"/>
-            <a:ext cx="0" cy="2423160"/>
-          </a:xfrm>
-          <a:prstGeom prst="line">
-            <a:avLst/>
-          </a:prstGeom>
-          <a:ln w="63500">
-            <a:solidFill>
-              <a:srgbClr val="E6B820"/>
-            </a:solidFill>
-          </a:ln>
-        </p:spPr>
-        <p:style>
-          <a:lnRef idx="2">
-            <a:schemeClr val="accent1"/>
-          </a:lnRef>
-          <a:fillRef idx="0">
-            <a:schemeClr val="accent1"/>
-          </a:fillRef>
-          <a:effectRef idx="1">
-            <a:schemeClr val="accent1"/>
-          </a:effectRef>
-          <a:fontRef idx="minor">
-            <a:schemeClr val="tx1"/>
-          </a:fontRef>
-        </p:style>
-      </p:cxnSp>
-      <p:sp>
-        <p:nvSpPr>
-          <p:cNvPr id="6" name="TextBox 5"/>
-          <p:cNvSpPr txBox="1"/>
-          <p:nvPr/>
-        </p:nvSpPr>
-        <p:spPr>
-          <a:xfrm>
-            <a:off x="868680" y="1755648"/>
-            <a:ext cx="6766560" cy="1417320"/>
-          </a:xfrm>
-          <a:prstGeom prst="rect">
-            <a:avLst/>
-          </a:prstGeom>
-          <a:noFill/>
-        </p:spPr>
-        <p:txBody>
-          <a:bodyPr wrap="square" lIns="27432" tIns="27432" rIns="27432" bIns="27432" anchor="t"/>
-          <a:lstStyle/>
-          <a:p>
-            <a:pPr algn="l">
-              <a:lnSpc>
-                <a:spcPct val="100000"/>
-              </a:lnSpc>
-            </a:pPr>
-            <a:r>
-              <a:rPr sz="3700" b="1" i="0">
-                <a:solidFill>
-                  <a:srgbClr val="182E26"/>
-                </a:solidFill>
-                <a:latin typeface="Arial"/>
-              </a:rPr>
-              <a:t>Movilidad estudiantil</a:t>
-            </a:r>
-            <a:br/>
-            <a:r>
-              <a:rPr sz="3700" b="1" i="0">
-                <a:solidFill>
-                  <a:srgbClr val="182E26"/>
-                </a:solidFill>
-                <a:latin typeface="Arial"/>
-              </a:rPr>
-              <a:t>segura en el campus</a:t>
-            </a:r>
-          </a:p>
-        </p:txBody>
-      </p:sp>
-      <p:sp>
-        <p:nvSpPr>
-          <p:cNvPr id="7" name="TextBox 6"/>
-          <p:cNvSpPr txBox="1"/>
-          <p:nvPr/>
-        </p:nvSpPr>
-        <p:spPr>
-          <a:xfrm>
-            <a:off x="877824" y="3310128"/>
-            <a:ext cx="6400800" cy="713232"/>
-          </a:xfrm>
-          <a:prstGeom prst="rect">
-            <a:avLst/>
-          </a:prstGeom>
-          <a:noFill/>
-        </p:spPr>
-        <p:txBody>
-          <a:bodyPr wrap="square" lIns="27432" tIns="27432" rIns="27432" bIns="27432" anchor="t"/>
-          <a:lstStyle/>
-          <a:p>
-            <a:pPr algn="l">
-              <a:lnSpc>
-                <a:spcPct val="100000"/>
-              </a:lnSpc>
-            </a:pPr>
-            <a:r>
-              <a:rPr sz="2100" b="0" i="0">
-                <a:solidFill>
-                  <a:srgbClr val="5F6B65"/>
-                </a:solidFill>
-                <a:latin typeface="Arial"/>
-              </a:rPr>
-              <a:t>Sistema de confianza y trazabilidad para transporte en motocicleta</a:t>
-            </a:r>
-          </a:p>
-        </p:txBody>
-      </p:sp>
-      <p:sp>
-        <p:nvSpPr>
-          <p:cNvPr id="8" name="TextBox 7"/>
-          <p:cNvSpPr txBox="1"/>
-          <p:nvPr/>
-        </p:nvSpPr>
-        <p:spPr>
-          <a:xfrm>
-            <a:off x="8407400" y="1107440"/>
-            <a:ext cx="2834640" cy="320040"/>
-          </a:xfrm>
-          <a:prstGeom prst="rect">
-            <a:avLst/>
-          </a:prstGeom>
-          <a:noFill/>
-        </p:spPr>
-        <p:txBody>
-          <a:bodyPr wrap="square" lIns="27432" tIns="27432" rIns="27432" bIns="27432" anchor="t"/>
-          <a:lstStyle/>
-          <a:p>
-            <a:pPr algn="l">
-              <a:lnSpc>
-                <a:spcPct val="100000"/>
-              </a:lnSpc>
-            </a:pPr>
-            <a:r>
-              <a:rPr sz="1700" b="1" i="0">
-                <a:solidFill>
-                  <a:srgbClr val="0B7238"/>
-                </a:solidFill>
-                <a:latin typeface="Arial"/>
-              </a:rPr>
-              <a:t>VERIFICACIÓN</a:t>
-            </a:r>
-          </a:p>
-        </p:txBody>
-      </p:sp>
-      <p:cxnSp>
-        <p:nvCxnSpPr>
-          <p:cNvPr id="9" name="Connector 8"/>
-          <p:cNvCxnSpPr/>
-          <p:nvPr/>
-        </p:nvCxnSpPr>
-        <p:spPr>
-          <a:xfrm>
-            <a:off x="8425688" y="1537208"/>
-            <a:ext cx="2423160" cy="0"/>
-          </a:xfrm>
-          <a:prstGeom prst="line">
-            <a:avLst/>
-          </a:prstGeom>
-          <a:ln w="25400">
-            <a:solidFill>
-              <a:srgbClr val="E6B820"/>
-            </a:solidFill>
-          </a:ln>
-        </p:spPr>
-        <p:style>
-          <a:lnRef idx="2">
-            <a:schemeClr val="accent1"/>
-          </a:lnRef>
-          <a:fillRef idx="0">
-            <a:schemeClr val="accent1"/>
-          </a:fillRef>
-          <a:effectRef idx="1">
-            <a:schemeClr val="accent1"/>
-          </a:effectRef>
-          <a:fontRef idx="minor">
-            <a:schemeClr val="tx1"/>
-          </a:fontRef>
-        </p:style>
-      </p:cxnSp>
-      <p:sp>
-        <p:nvSpPr>
-          <p:cNvPr id="10" name="TextBox 9"/>
-          <p:cNvSpPr txBox="1"/>
-          <p:nvPr/>
-        </p:nvSpPr>
-        <p:spPr>
-          <a:xfrm>
-            <a:off x="8407400" y="1930400"/>
-            <a:ext cx="2834640" cy="320040"/>
-          </a:xfrm>
-          <a:prstGeom prst="rect">
-            <a:avLst/>
-          </a:prstGeom>
-          <a:noFill/>
-        </p:spPr>
-        <p:txBody>
-          <a:bodyPr wrap="square" lIns="27432" tIns="27432" rIns="27432" bIns="27432" anchor="t"/>
-          <a:lstStyle/>
-          <a:p>
-            <a:pPr algn="l">
-              <a:lnSpc>
-                <a:spcPct val="100000"/>
-              </a:lnSpc>
-            </a:pPr>
-            <a:r>
-              <a:rPr sz="1700" b="1" i="0">
-                <a:solidFill>
-                  <a:srgbClr val="0B7238"/>
-                </a:solidFill>
-                <a:latin typeface="Arial"/>
-              </a:rPr>
-              <a:t>TRAZABILIDAD</a:t>
-            </a:r>
-          </a:p>
-        </p:txBody>
-      </p:sp>
-      <p:cxnSp>
-        <p:nvCxnSpPr>
-          <p:cNvPr id="11" name="Connector 10"/>
-          <p:cNvCxnSpPr/>
-          <p:nvPr/>
-        </p:nvCxnSpPr>
-        <p:spPr>
-          <a:xfrm>
-            <a:off x="8425688" y="2360168"/>
-            <a:ext cx="2423160" cy="0"/>
-          </a:xfrm>
-          <a:prstGeom prst="line">
-            <a:avLst/>
-          </a:prstGeom>
-          <a:ln w="25400">
-            <a:solidFill>
-              <a:srgbClr val="E6B820"/>
-            </a:solidFill>
-          </a:ln>
-        </p:spPr>
-        <p:style>
-          <a:lnRef idx="2">
-            <a:schemeClr val="accent1"/>
-          </a:lnRef>
-          <a:fillRef idx="0">
-            <a:schemeClr val="accent1"/>
-          </a:fillRef>
-          <a:effectRef idx="1">
-            <a:schemeClr val="accent1"/>
-          </a:effectRef>
-          <a:fontRef idx="minor">
-            <a:schemeClr val="tx1"/>
-          </a:fontRef>
-        </p:style>
-      </p:cxnSp>
-      <p:sp>
-        <p:nvSpPr>
-          <p:cNvPr id="12" name="TextBox 11"/>
-          <p:cNvSpPr txBox="1"/>
-          <p:nvPr/>
-        </p:nvSpPr>
-        <p:spPr>
-          <a:xfrm>
-            <a:off x="8407400" y="2753360"/>
-            <a:ext cx="2834640" cy="320040"/>
-          </a:xfrm>
-          <a:prstGeom prst="rect">
-            <a:avLst/>
-          </a:prstGeom>
-          <a:noFill/>
-        </p:spPr>
-        <p:txBody>
-          <a:bodyPr wrap="square" lIns="27432" tIns="27432" rIns="27432" bIns="27432" anchor="t"/>
-          <a:lstStyle/>
-          <a:p>
-            <a:pPr algn="l">
-              <a:lnSpc>
-                <a:spcPct val="100000"/>
-              </a:lnSpc>
-            </a:pPr>
-            <a:r>
-              <a:rPr sz="1700" b="1" i="0">
-                <a:solidFill>
-                  <a:srgbClr val="0B7238"/>
-                </a:solidFill>
-                <a:latin typeface="Arial"/>
-              </a:rPr>
-              <a:t>REPUTACIÓN</a:t>
-            </a:r>
-          </a:p>
-        </p:txBody>
-      </p:sp>
-      <p:sp>
-        <p:nvSpPr>
-          <p:cNvPr id="13" name="TextBox 12"/>
-          <p:cNvSpPr txBox="1"/>
-          <p:nvPr/>
-        </p:nvSpPr>
-        <p:spPr>
-          <a:xfrm>
-            <a:off x="868680" y="5010912"/>
-            <a:ext cx="9875520" cy="411480"/>
-          </a:xfrm>
-          <a:prstGeom prst="rect">
-            <a:avLst/>
-          </a:prstGeom>
-          <a:noFill/>
-        </p:spPr>
-        <p:txBody>
-          <a:bodyPr wrap="square" lIns="27432" tIns="27432" rIns="27432" bIns="27432" anchor="t"/>
-          <a:lstStyle/>
-          <a:p>
-            <a:pPr algn="l">
-              <a:lnSpc>
-                <a:spcPct val="100000"/>
-              </a:lnSpc>
-            </a:pPr>
-            <a:r>
-              <a:rPr sz="1400" b="0" i="0">
-                <a:solidFill>
-                  <a:srgbClr val="182E26"/>
-                </a:solidFill>
-                <a:latin typeface="Arial"/>
-              </a:rPr>
-              <a:t>Equipo: Jhonatan A. Saavedra · Gian M. Castañeda · Andrés D. Pinilla · Juan G. Ferrer</a:t>
-            </a:r>
-          </a:p>
-        </p:txBody>
-      </p:sp>
-      <p:sp>
-        <p:nvSpPr>
-          <p:cNvPr id="14" name="TextBox 13"/>
-          <p:cNvSpPr txBox="1"/>
-          <p:nvPr/>
-        </p:nvSpPr>
-        <p:spPr>
-          <a:xfrm>
-            <a:off x="868680" y="5577840"/>
-            <a:ext cx="4937760" cy="320040"/>
-          </a:xfrm>
-          <a:prstGeom prst="rect">
-            <a:avLst/>
-          </a:prstGeom>
-          <a:noFill/>
-        </p:spPr>
-        <p:txBody>
-          <a:bodyPr wrap="square" lIns="27432" tIns="27432" rIns="27432" bIns="27432" anchor="t"/>
-          <a:lstStyle/>
-          <a:p>
-            <a:pPr algn="l">
-              <a:lnSpc>
-                <a:spcPct val="100000"/>
-              </a:lnSpc>
-            </a:pPr>
-            <a:r>
-              <a:rPr sz="1400" b="1" i="0">
-                <a:solidFill>
-                  <a:srgbClr val="0B7238"/>
-                </a:solidFill>
-                <a:latin typeface="Arial"/>
-              </a:rPr>
-              <a:t>github.com/Stellel-One/TucanGo</a:t>
-            </a:r>
-          </a:p>
-        </p:txBody>
-      </p:sp>
-      <p:pic>
-        <p:nvPicPr>
-          <p:cNvPr id="15" name="Picture 14">
-            <a:extLst>
-              <a:ext uri="{FF2B5EF4-FFF2-40B4-BE49-F238E27FC236}">
-                <a16:creationId xmlns:a16="http://schemas.microsoft.com/office/drawing/2014/main" id="{2BFB7696-0BC7-64AE-4F83-6FBBEE47521E}"/>
-              </a:ext>
-            </a:extLst>
-          </p:cNvPr>
-          <p:cNvPicPr>
-            <a:picLocks noChangeAspect="1"/>
-          </p:cNvPicPr>
-          <p:nvPr/>
-        </p:nvPicPr>
-        <p:blipFill>
-          <a:blip r:embed="rId2"/>
-          <a:stretch>
-            <a:fillRect/>
-          </a:stretch>
-        </p:blipFill>
-        <p:spPr>
-          <a:xfrm>
-            <a:off x="8366760" y="3200400"/>
-            <a:ext cx="2834640" cy="2702560"/>
-          </a:xfrm>
-          <a:prstGeom prst="rect">
-            <a:avLst/>
-          </a:prstGeom>
-        </p:spPr>
-      </p:pic>
+            <a:endParaRPr lang="en-US"/>
+          </a:p>
+        </p:txBody>
+      </p:sp>
     </p:spTree>
     <p:extLst>
       <p:ext uri="{BB962C8B-B14F-4D97-AF65-F5344CB8AC3E}">
-        <p14:creationId xmlns:p14="http://schemas.microsoft.com/office/powerpoint/2010/main" val="4255261934"/>
+        <p14:creationId xmlns:p14="http://schemas.microsoft.com/office/powerpoint/2010/main" val="607747552"/>
       </p:ext>
     </p:extLst>
   </p:cSld>
   <p:clrMapOvr>
     <a:masterClrMapping/>
   </p:clrMapOvr>
+  <mc:AlternateContent xmlns:mc="http://schemas.openxmlformats.org/markup-compatibility/2006">
+    <mc:Choice xmlns:p14="http://schemas.microsoft.com/office/powerpoint/2010/main" Requires="p14">
+      <p:transition spd="slow" p14:dur="1500">
+        <p:random/>
+      </p:transition>
+    </mc:Choice>
+    <mc:Fallback>
+      <p:transition spd="slow">
+        <p:random/>
+      </p:transition>
+    </mc:Fallback>
+  </mc:AlternateContent>
 </p:sld>
 </file>
 
@@ -5537,7 +5078,7 @@
                 </a:solidFill>
                 <a:latin typeface="Arial"/>
               </a:rPr>
-              <a:t>Cuatro roles complementarios cubren el ciclo del proyecto</a:t>
+              <a:t>Stack simple para construir, probar y evolucionar</a:t>
             </a:r>
           </a:p>
         </p:txBody>
@@ -5571,7 +5112,7 @@
                 </a:solidFill>
                 <a:latin typeface="Arial"/>
               </a:rPr>
-              <a:t>9</a:t>
+              <a:t>8</a:t>
             </a:r>
           </a:p>
         </p:txBody>
@@ -5584,8 +5125,8 @@
         </p:nvSpPr>
         <p:spPr>
           <a:xfrm>
-            <a:off x="1481328" y="1298448"/>
-            <a:ext cx="4892040" cy="256032"/>
+            <a:off x="566928" y="1298448"/>
+            <a:ext cx="1325880" cy="320040"/>
           </a:xfrm>
           <a:prstGeom prst="rect">
             <a:avLst/>
@@ -5608,7 +5149,7 @@
                 </a:solidFill>
                 <a:latin typeface="Arial"/>
               </a:rPr>
-              <a:t>INTEGRANTE</a:t>
+              <a:t>LENGUAJE</a:t>
             </a:r>
           </a:p>
         </p:txBody>
@@ -5621,8 +5162,8 @@
         </p:nvSpPr>
         <p:spPr>
           <a:xfrm>
-            <a:off x="7360920" y="1298448"/>
-            <a:ext cx="3383280" cy="256032"/>
+            <a:off x="1901952" y="1298448"/>
+            <a:ext cx="3749039" cy="320040"/>
           </a:xfrm>
           <a:prstGeom prst="rect">
             <a:avLst/>
@@ -5639,14 +5180,65 @@
               </a:lnSpc>
             </a:pPr>
             <a:r>
-              <a:rPr sz="1400" b="1" i="0">
-                <a:solidFill>
-                  <a:srgbClr val="0B7238"/>
-                </a:solidFill>
-                <a:latin typeface="Arial"/>
-              </a:rPr>
-              <a:t>ROL PRINCIPAL</a:t>
-            </a:r>
+              <a:rPr b="1" i="0" dirty="0">
+                <a:solidFill>
+                  <a:srgbClr val="182E26"/>
+                </a:solidFill>
+                <a:latin typeface="Arial"/>
+              </a:rPr>
+              <a:t>Java · </a:t>
+            </a:r>
+            <a:r>
+              <a:rPr b="1" i="0" dirty="0" err="1">
+                <a:solidFill>
+                  <a:srgbClr val="182E26"/>
+                </a:solidFill>
+                <a:latin typeface="Arial"/>
+              </a:rPr>
+              <a:t>Programación</a:t>
+            </a:r>
+            <a:r>
+              <a:rPr b="1" i="0" dirty="0">
+                <a:solidFill>
+                  <a:srgbClr val="182E26"/>
+                </a:solidFill>
+                <a:latin typeface="Arial"/>
+              </a:rPr>
+              <a:t> </a:t>
+            </a:r>
+            <a:r>
+              <a:rPr b="1" i="0" dirty="0" err="1">
+                <a:solidFill>
+                  <a:srgbClr val="182E26"/>
+                </a:solidFill>
+                <a:latin typeface="Arial"/>
+              </a:rPr>
+              <a:t>Orientada</a:t>
+            </a:r>
+            <a:r>
+              <a:rPr b="1" i="0" dirty="0">
+                <a:solidFill>
+                  <a:srgbClr val="182E26"/>
+                </a:solidFill>
+                <a:latin typeface="Arial"/>
+              </a:rPr>
+              <a:t> a </a:t>
+            </a:r>
+            <a:r>
+              <a:rPr b="1" i="0" dirty="0" err="1">
+                <a:solidFill>
+                  <a:srgbClr val="182E26"/>
+                </a:solidFill>
+                <a:latin typeface="Arial"/>
+              </a:rPr>
+              <a:t>Objetos</a:t>
+            </a:r>
+            <a:endParaRPr b="1" i="0" dirty="0">
+              <a:solidFill>
+                <a:srgbClr val="182E26"/>
+              </a:solidFill>
+              <a:latin typeface="Arial"/>
+            </a:endParaRPr>
           </a:p>
         </p:txBody>
       </p:sp>
@@ -5658,15 +5250,15 @@
         </p:nvCxnSpPr>
         <p:spPr>
           <a:xfrm>
-            <a:off x="566928" y="1664208"/>
-            <a:ext cx="10241279" cy="0"/>
+            <a:off x="566928" y="1746504"/>
+            <a:ext cx="5074920" cy="0"/>
           </a:xfrm>
           <a:prstGeom prst="line">
             <a:avLst/>
           </a:prstGeom>
-          <a:ln w="25400">
+          <a:ln w="12700">
             <a:solidFill>
-              <a:srgbClr val="0B7238"/>
+              <a:srgbClr val="EEF5F0"/>
             </a:solidFill>
           </a:ln>
         </p:spPr>
@@ -5693,8 +5285,8 @@
         </p:nvSpPr>
         <p:spPr>
           <a:xfrm>
-            <a:off x="566928" y="1847088"/>
-            <a:ext cx="548640" cy="411480"/>
+            <a:off x="566928" y="1883664"/>
+            <a:ext cx="1325880" cy="320040"/>
           </a:xfrm>
           <a:prstGeom prst="rect">
             <a:avLst/>
@@ -5711,13 +5303,13 @@
               </a:lnSpc>
             </a:pPr>
             <a:r>
-              <a:rPr sz="2200" b="1" i="0">
-                <a:solidFill>
-                  <a:srgbClr val="E6B820"/>
-                </a:solidFill>
-                <a:latin typeface="Arial"/>
-              </a:rPr>
-              <a:t>01</a:t>
+              <a:rPr sz="1400" b="1" i="0">
+                <a:solidFill>
+                  <a:srgbClr val="0B7238"/>
+                </a:solidFill>
+                <a:latin typeface="Arial"/>
+              </a:rPr>
+              <a:t>JDK</a:t>
             </a:r>
           </a:p>
         </p:txBody>
@@ -5730,8 +5322,8 @@
         </p:nvSpPr>
         <p:spPr>
           <a:xfrm>
-            <a:off x="1481328" y="1847088"/>
-            <a:ext cx="5303520" cy="411480"/>
+            <a:off x="1901952" y="1883664"/>
+            <a:ext cx="3749039" cy="320040"/>
           </a:xfrm>
           <a:prstGeom prst="rect">
             <a:avLst/>
@@ -5748,64 +5340,27 @@
               </a:lnSpc>
             </a:pPr>
             <a:r>
-              <a:rPr sz="1800" b="1" i="0">
+              <a:rPr sz="1600" b="1" i="0">
                 <a:solidFill>
                   <a:srgbClr val="182E26"/>
                 </a:solidFill>
                 <a:latin typeface="Arial"/>
               </a:rPr>
-              <a:t>Jhonatan Alexander Saavedra Culma</a:t>
-            </a:r>
-          </a:p>
-        </p:txBody>
-      </p:sp>
-      <p:sp>
-        <p:nvSpPr>
-          <p:cNvPr id="9" name="TextBox 8"/>
-          <p:cNvSpPr txBox="1"/>
-          <p:nvPr/>
-        </p:nvSpPr>
-        <p:spPr>
-          <a:xfrm>
-            <a:off x="7360920" y="1847088"/>
-            <a:ext cx="3383280" cy="548640"/>
-          </a:xfrm>
-          <a:prstGeom prst="rect">
-            <a:avLst/>
-          </a:prstGeom>
-          <a:noFill/>
-        </p:spPr>
-        <p:txBody>
-          <a:bodyPr wrap="square" lIns="27432" tIns="27432" rIns="27432" bIns="27432" anchor="t"/>
-          <a:lstStyle/>
-          <a:p>
-            <a:pPr algn="l">
-              <a:lnSpc>
-                <a:spcPct val="100000"/>
-              </a:lnSpc>
-            </a:pPr>
-            <a:r>
-              <a:rPr sz="1600" b="0" i="0">
-                <a:solidFill>
-                  <a:srgbClr val="5F6B65"/>
-                </a:solidFill>
-                <a:latin typeface="Arial"/>
-              </a:rPr>
-              <a:t>Líder · Modelado UML</a:t>
+              <a:t>21 · Microsoft OpenJDK</a:t>
             </a:r>
           </a:p>
         </p:txBody>
       </p:sp>
       <p:cxnSp>
         <p:nvCxnSpPr>
-          <p:cNvPr id="10" name="Connector 9"/>
+          <p:cNvPr id="9" name="Connector 8"/>
           <p:cNvCxnSpPr/>
           <p:nvPr/>
         </p:nvCxnSpPr>
         <p:spPr>
           <a:xfrm>
-            <a:off x="566928" y="2542032"/>
-            <a:ext cx="10241279" cy="0"/>
+            <a:off x="566928" y="2331720"/>
+            <a:ext cx="5074920" cy="0"/>
           </a:xfrm>
           <a:prstGeom prst="line">
             <a:avLst/>
@@ -5833,14 +5388,14 @@
       </p:cxnSp>
       <p:sp>
         <p:nvSpPr>
-          <p:cNvPr id="11" name="TextBox 10"/>
+          <p:cNvPr id="10" name="TextBox 9"/>
           <p:cNvSpPr txBox="1"/>
           <p:nvPr/>
         </p:nvSpPr>
         <p:spPr>
           <a:xfrm>
-            <a:off x="566928" y="2788920"/>
-            <a:ext cx="548640" cy="411480"/>
+            <a:off x="566928" y="2468880"/>
+            <a:ext cx="1325880" cy="320040"/>
           </a:xfrm>
           <a:prstGeom prst="rect">
             <a:avLst/>
@@ -5857,27 +5412,27 @@
               </a:lnSpc>
             </a:pPr>
             <a:r>
-              <a:rPr sz="2200" b="1" i="0">
-                <a:solidFill>
-                  <a:srgbClr val="E6B820"/>
-                </a:solidFill>
-                <a:latin typeface="Arial"/>
-              </a:rPr>
-              <a:t>02</a:t>
-            </a:r>
-          </a:p>
-        </p:txBody>
-      </p:sp>
-      <p:sp>
-        <p:nvSpPr>
-          <p:cNvPr id="12" name="TextBox 11"/>
+              <a:rPr sz="1400" b="1" i="0">
+                <a:solidFill>
+                  <a:srgbClr val="0B7238"/>
+                </a:solidFill>
+                <a:latin typeface="Arial"/>
+              </a:rPr>
+              <a:t>IDE</a:t>
+            </a:r>
+          </a:p>
+        </p:txBody>
+      </p:sp>
+      <p:sp>
+        <p:nvSpPr>
+          <p:cNvPr id="11" name="TextBox 10"/>
           <p:cNvSpPr txBox="1"/>
           <p:nvPr/>
         </p:nvSpPr>
         <p:spPr>
           <a:xfrm>
-            <a:off x="1481328" y="2788920"/>
-            <a:ext cx="5303520" cy="411480"/>
+            <a:off x="1901952" y="2468880"/>
+            <a:ext cx="3749039" cy="320040"/>
           </a:xfrm>
           <a:prstGeom prst="rect">
             <a:avLst/>
@@ -5894,64 +5449,27 @@
               </a:lnSpc>
             </a:pPr>
             <a:r>
-              <a:rPr sz="1800" b="1" i="0">
+              <a:rPr sz="1600" b="0" i="0">
                 <a:solidFill>
                   <a:srgbClr val="182E26"/>
                 </a:solidFill>
                 <a:latin typeface="Arial"/>
               </a:rPr>
-              <a:t>Gian Marco Castañeda Samboni</a:t>
-            </a:r>
-          </a:p>
-        </p:txBody>
-      </p:sp>
-      <p:sp>
-        <p:nvSpPr>
-          <p:cNvPr id="13" name="TextBox 12"/>
-          <p:cNvSpPr txBox="1"/>
-          <p:nvPr/>
-        </p:nvSpPr>
-        <p:spPr>
-          <a:xfrm>
-            <a:off x="7360920" y="2788920"/>
-            <a:ext cx="3383280" cy="548640"/>
-          </a:xfrm>
-          <a:prstGeom prst="rect">
-            <a:avLst/>
-          </a:prstGeom>
-          <a:noFill/>
-        </p:spPr>
-        <p:txBody>
-          <a:bodyPr wrap="square" lIns="27432" tIns="27432" rIns="27432" bIns="27432" anchor="t"/>
-          <a:lstStyle/>
-          <a:p>
-            <a:pPr algn="l">
-              <a:lnSpc>
-                <a:spcPct val="100000"/>
-              </a:lnSpc>
-            </a:pPr>
-            <a:r>
-              <a:rPr sz="1600" b="0" i="0">
-                <a:solidFill>
-                  <a:srgbClr val="5F6B65"/>
-                </a:solidFill>
-                <a:latin typeface="Arial"/>
-              </a:rPr>
-              <a:t>Backend Java · Lógica de negocio</a:t>
+              <a:t>Apache NetBeans</a:t>
             </a:r>
           </a:p>
         </p:txBody>
       </p:sp>
       <p:cxnSp>
         <p:nvCxnSpPr>
-          <p:cNvPr id="14" name="Connector 13"/>
+          <p:cNvPr id="12" name="Connector 11"/>
           <p:cNvCxnSpPr/>
           <p:nvPr/>
         </p:nvCxnSpPr>
         <p:spPr>
           <a:xfrm>
-            <a:off x="566928" y="3483863"/>
-            <a:ext cx="10241279" cy="0"/>
+            <a:off x="566928" y="2916936"/>
+            <a:ext cx="5074920" cy="0"/>
           </a:xfrm>
           <a:prstGeom prst="line">
             <a:avLst/>
@@ -5979,14 +5497,14 @@
       </p:cxnSp>
       <p:sp>
         <p:nvSpPr>
-          <p:cNvPr id="15" name="TextBox 14"/>
+          <p:cNvPr id="13" name="TextBox 12"/>
           <p:cNvSpPr txBox="1"/>
           <p:nvPr/>
         </p:nvSpPr>
         <p:spPr>
           <a:xfrm>
-            <a:off x="566928" y="3730752"/>
-            <a:ext cx="548640" cy="411480"/>
+            <a:off x="566928" y="3054096"/>
+            <a:ext cx="1325880" cy="320040"/>
           </a:xfrm>
           <a:prstGeom prst="rect">
             <a:avLst/>
@@ -6003,27 +5521,27 @@
               </a:lnSpc>
             </a:pPr>
             <a:r>
-              <a:rPr sz="2200" b="1" i="0">
-                <a:solidFill>
-                  <a:srgbClr val="E6B820"/>
-                </a:solidFill>
-                <a:latin typeface="Arial"/>
-              </a:rPr>
-              <a:t>03</a:t>
-            </a:r>
-          </a:p>
-        </p:txBody>
-      </p:sp>
-      <p:sp>
-        <p:nvSpPr>
-          <p:cNvPr id="16" name="TextBox 15"/>
+              <a:rPr sz="1400" b="1" i="0">
+                <a:solidFill>
+                  <a:srgbClr val="0B7238"/>
+                </a:solidFill>
+                <a:latin typeface="Arial"/>
+              </a:rPr>
+              <a:t>BUILD</a:t>
+            </a:r>
+          </a:p>
+        </p:txBody>
+      </p:sp>
+      <p:sp>
+        <p:nvSpPr>
+          <p:cNvPr id="14" name="TextBox 13"/>
           <p:cNvSpPr txBox="1"/>
           <p:nvPr/>
         </p:nvSpPr>
         <p:spPr>
           <a:xfrm>
-            <a:off x="1481328" y="3730752"/>
-            <a:ext cx="5303520" cy="411480"/>
+            <a:off x="1901952" y="3054096"/>
+            <a:ext cx="3749039" cy="320040"/>
           </a:xfrm>
           <a:prstGeom prst="rect">
             <a:avLst/>
@@ -6040,64 +5558,27 @@
               </a:lnSpc>
             </a:pPr>
             <a:r>
-              <a:rPr sz="1800" b="1" i="0">
+              <a:rPr sz="1600" b="0" i="0">
                 <a:solidFill>
                   <a:srgbClr val="182E26"/>
                 </a:solidFill>
                 <a:latin typeface="Arial"/>
               </a:rPr>
-              <a:t>Andrés David Pinilla Parra</a:t>
-            </a:r>
-          </a:p>
-        </p:txBody>
-      </p:sp>
-      <p:sp>
-        <p:nvSpPr>
-          <p:cNvPr id="17" name="TextBox 16"/>
-          <p:cNvSpPr txBox="1"/>
-          <p:nvPr/>
-        </p:nvSpPr>
-        <p:spPr>
-          <a:xfrm>
-            <a:off x="7360920" y="3730752"/>
-            <a:ext cx="3383280" cy="548640"/>
-          </a:xfrm>
-          <a:prstGeom prst="rect">
-            <a:avLst/>
-          </a:prstGeom>
-          <a:noFill/>
-        </p:spPr>
-        <p:txBody>
-          <a:bodyPr wrap="square" lIns="27432" tIns="27432" rIns="27432" bIns="27432" anchor="t"/>
-          <a:lstStyle/>
-          <a:p>
-            <a:pPr algn="l">
-              <a:lnSpc>
-                <a:spcPct val="100000"/>
-              </a:lnSpc>
-            </a:pPr>
-            <a:r>
-              <a:rPr sz="1600" b="0" i="0">
-                <a:solidFill>
-                  <a:srgbClr val="5F6B65"/>
-                </a:solidFill>
-                <a:latin typeface="Arial"/>
-              </a:rPr>
-              <a:t>Persistencia · Pruebas</a:t>
+              <a:t>Apache Ant</a:t>
             </a:r>
           </a:p>
         </p:txBody>
       </p:sp>
       <p:cxnSp>
         <p:nvCxnSpPr>
-          <p:cNvPr id="18" name="Connector 17"/>
+          <p:cNvPr id="15" name="Connector 14"/>
           <p:cNvCxnSpPr/>
           <p:nvPr/>
         </p:nvCxnSpPr>
         <p:spPr>
           <a:xfrm>
-            <a:off x="566928" y="4425696"/>
-            <a:ext cx="10241279" cy="0"/>
+            <a:off x="566928" y="3502152"/>
+            <a:ext cx="5074920" cy="0"/>
           </a:xfrm>
           <a:prstGeom prst="line">
             <a:avLst/>
@@ -6125,14 +5606,14 @@
       </p:cxnSp>
       <p:sp>
         <p:nvSpPr>
-          <p:cNvPr id="19" name="TextBox 18"/>
+          <p:cNvPr id="16" name="TextBox 15"/>
           <p:cNvSpPr txBox="1"/>
           <p:nvPr/>
         </p:nvSpPr>
         <p:spPr>
           <a:xfrm>
-            <a:off x="566928" y="4672583"/>
-            <a:ext cx="548640" cy="411480"/>
+            <a:off x="566928" y="3639312"/>
+            <a:ext cx="1325880" cy="320040"/>
           </a:xfrm>
           <a:prstGeom prst="rect">
             <a:avLst/>
@@ -6149,27 +5630,27 @@
               </a:lnSpc>
             </a:pPr>
             <a:r>
-              <a:rPr sz="2200" b="1" i="0">
-                <a:solidFill>
-                  <a:srgbClr val="E6B820"/>
-                </a:solidFill>
-                <a:latin typeface="Arial"/>
-              </a:rPr>
-              <a:t>04</a:t>
-            </a:r>
-          </a:p>
-        </p:txBody>
-      </p:sp>
-      <p:sp>
-        <p:nvSpPr>
-          <p:cNvPr id="20" name="TextBox 19"/>
+              <a:rPr sz="1400" b="1" i="0">
+                <a:solidFill>
+                  <a:srgbClr val="0B7238"/>
+                </a:solidFill>
+                <a:latin typeface="Arial"/>
+              </a:rPr>
+              <a:t>VERSIÓN</a:t>
+            </a:r>
+          </a:p>
+        </p:txBody>
+      </p:sp>
+      <p:sp>
+        <p:nvSpPr>
+          <p:cNvPr id="17" name="TextBox 16"/>
           <p:cNvSpPr txBox="1"/>
           <p:nvPr/>
         </p:nvSpPr>
         <p:spPr>
           <a:xfrm>
-            <a:off x="1481328" y="4672583"/>
-            <a:ext cx="5303520" cy="411480"/>
+            <a:off x="1901952" y="3639312"/>
+            <a:ext cx="3749039" cy="320040"/>
           </a:xfrm>
           <a:prstGeom prst="rect">
             <a:avLst/>
@@ -6186,27 +5667,62 @@
               </a:lnSpc>
             </a:pPr>
             <a:r>
-              <a:rPr sz="1800" b="1" i="0">
+              <a:rPr sz="1600" b="0" i="0">
                 <a:solidFill>
                   <a:srgbClr val="182E26"/>
                 </a:solidFill>
                 <a:latin typeface="Arial"/>
               </a:rPr>
-              <a:t>Juan Guillermo Ferrer Gasca</a:t>
-            </a:r>
-          </a:p>
-        </p:txBody>
-      </p:sp>
-      <p:sp>
-        <p:nvSpPr>
-          <p:cNvPr id="21" name="TextBox 20"/>
+              <a:t>Git + GitHub</a:t>
+            </a:r>
+          </a:p>
+        </p:txBody>
+      </p:sp>
+      <p:cxnSp>
+        <p:nvCxnSpPr>
+          <p:cNvPr id="18" name="Connector 17"/>
+          <p:cNvCxnSpPr/>
+          <p:nvPr/>
+        </p:nvCxnSpPr>
+        <p:spPr>
+          <a:xfrm>
+            <a:off x="566928" y="4087368"/>
+            <a:ext cx="5074920" cy="0"/>
+          </a:xfrm>
+          <a:prstGeom prst="line">
+            <a:avLst/>
+          </a:prstGeom>
+          <a:ln w="12700">
+            <a:solidFill>
+              <a:srgbClr val="EEF5F0"/>
+            </a:solidFill>
+          </a:ln>
+        </p:spPr>
+        <p:style>
+          <a:lnRef idx="2">
+            <a:schemeClr val="accent1"/>
+          </a:lnRef>
+          <a:fillRef idx="0">
+            <a:schemeClr val="accent1"/>
+          </a:fillRef>
+          <a:effectRef idx="1">
+            <a:schemeClr val="accent1"/>
+          </a:effectRef>
+          <a:fontRef idx="minor">
+            <a:schemeClr val="tx1"/>
+          </a:fontRef>
+        </p:style>
+      </p:cxnSp>
+      <p:sp>
+        <p:nvSpPr>
+          <p:cNvPr id="19" name="TextBox 18"/>
           <p:cNvSpPr txBox="1"/>
           <p:nvPr/>
         </p:nvSpPr>
         <p:spPr>
           <a:xfrm>
-            <a:off x="7360920" y="4672583"/>
-            <a:ext cx="3383280" cy="548640"/>
+            <a:off x="566928" y="4224528"/>
+            <a:ext cx="1325880" cy="320040"/>
           </a:xfrm>
           <a:prstGeom prst="rect">
             <a:avLst/>
@@ -6223,27 +5739,27 @@
               </a:lnSpc>
             </a:pPr>
             <a:r>
-              <a:rPr sz="1600" b="0" i="0">
-                <a:solidFill>
-                  <a:srgbClr val="5F6B65"/>
-                </a:solidFill>
-                <a:latin typeface="Arial"/>
-              </a:rPr>
-              <a:t>Documentación · Arquitectura</a:t>
-            </a:r>
-          </a:p>
-        </p:txBody>
-      </p:sp>
-      <p:sp>
-        <p:nvSpPr>
-          <p:cNvPr id="22" name="TextBox 21"/>
+              <a:rPr sz="1400" b="1" i="0">
+                <a:solidFill>
+                  <a:srgbClr val="0B7238"/>
+                </a:solidFill>
+                <a:latin typeface="Arial"/>
+              </a:rPr>
+              <a:t>MODELADO</a:t>
+            </a:r>
+          </a:p>
+        </p:txBody>
+      </p:sp>
+      <p:sp>
+        <p:nvSpPr>
+          <p:cNvPr id="20" name="TextBox 19"/>
           <p:cNvSpPr txBox="1"/>
           <p:nvPr/>
         </p:nvSpPr>
         <p:spPr>
           <a:xfrm>
-            <a:off x="1481328" y="5650992"/>
-            <a:ext cx="8503920" cy="292608"/>
+            <a:off x="1901952" y="4224528"/>
+            <a:ext cx="3749039" cy="320040"/>
           </a:xfrm>
           <a:prstGeom prst="rect">
             <a:avLst/>
@@ -6254,19 +5770,552 @@
           <a:bodyPr wrap="square" lIns="27432" tIns="27432" rIns="27432" bIns="27432" anchor="t"/>
           <a:lstStyle/>
           <a:p>
-            <a:pPr algn="ctr">
+            <a:pPr algn="l">
               <a:lnSpc>
                 <a:spcPct val="100000"/>
               </a:lnSpc>
             </a:pPr>
             <a:r>
-              <a:rPr sz="1500" b="1" i="0">
+              <a:rPr sz="1600" b="0" i="0" dirty="0">
+                <a:solidFill>
+                  <a:srgbClr val="182E26"/>
+                </a:solidFill>
+                <a:latin typeface="Arial"/>
+              </a:rPr>
+              <a:t>UML</a:t>
+            </a:r>
+          </a:p>
+        </p:txBody>
+      </p:sp>
+      <p:cxnSp>
+        <p:nvCxnSpPr>
+          <p:cNvPr id="21" name="Connector 20"/>
+          <p:cNvCxnSpPr/>
+          <p:nvPr/>
+        </p:nvCxnSpPr>
+        <p:spPr>
+          <a:xfrm>
+            <a:off x="566928" y="4672584"/>
+            <a:ext cx="5074920" cy="0"/>
+          </a:xfrm>
+          <a:prstGeom prst="line">
+            <a:avLst/>
+          </a:prstGeom>
+          <a:ln w="12700">
+            <a:solidFill>
+              <a:srgbClr val="EEF5F0"/>
+            </a:solidFill>
+          </a:ln>
+        </p:spPr>
+        <p:style>
+          <a:lnRef idx="2">
+            <a:schemeClr val="accent1"/>
+          </a:lnRef>
+          <a:fillRef idx="0">
+            <a:schemeClr val="accent1"/>
+          </a:fillRef>
+          <a:effectRef idx="1">
+            <a:schemeClr val="accent1"/>
+          </a:effectRef>
+          <a:fontRef idx="minor">
+            <a:schemeClr val="tx1"/>
+          </a:fontRef>
+        </p:style>
+      </p:cxnSp>
+      <p:sp>
+        <p:nvSpPr>
+          <p:cNvPr id="22" name="TextBox 21"/>
+          <p:cNvSpPr txBox="1"/>
+          <p:nvPr/>
+        </p:nvSpPr>
+        <p:spPr>
+          <a:xfrm>
+            <a:off x="566928" y="4809744"/>
+            <a:ext cx="1325880" cy="320040"/>
+          </a:xfrm>
+          <a:prstGeom prst="rect">
+            <a:avLst/>
+          </a:prstGeom>
+          <a:noFill/>
+        </p:spPr>
+        <p:txBody>
+          <a:bodyPr wrap="square" lIns="27432" tIns="27432" rIns="27432" bIns="27432" anchor="t"/>
+          <a:lstStyle/>
+          <a:p>
+            <a:pPr algn="l">
+              <a:lnSpc>
+                <a:spcPct val="100000"/>
+              </a:lnSpc>
+            </a:pPr>
+            <a:r>
+              <a:rPr sz="1400" b="1" i="0">
                 <a:solidFill>
                   <a:srgbClr val="0B7238"/>
                 </a:solidFill>
                 <a:latin typeface="Arial"/>
               </a:rPr>
-              <a:t>Equipo multidisciplinario para modelar, implementar, probar y comunicar.</a:t>
+              <a:t>TESTING</a:t>
+            </a:r>
+          </a:p>
+        </p:txBody>
+      </p:sp>
+      <p:sp>
+        <p:nvSpPr>
+          <p:cNvPr id="23" name="TextBox 22"/>
+          <p:cNvSpPr txBox="1"/>
+          <p:nvPr/>
+        </p:nvSpPr>
+        <p:spPr>
+          <a:xfrm>
+            <a:off x="1901952" y="4809744"/>
+            <a:ext cx="3749039" cy="320040"/>
+          </a:xfrm>
+          <a:prstGeom prst="rect">
+            <a:avLst/>
+          </a:prstGeom>
+          <a:noFill/>
+        </p:spPr>
+        <p:txBody>
+          <a:bodyPr wrap="square" lIns="27432" tIns="27432" rIns="27432" bIns="27432" anchor="t"/>
+          <a:lstStyle/>
+          <a:p>
+            <a:pPr algn="l">
+              <a:lnSpc>
+                <a:spcPct val="100000"/>
+              </a:lnSpc>
+            </a:pPr>
+            <a:r>
+              <a:rPr sz="1600" b="0" i="0">
+                <a:solidFill>
+                  <a:srgbClr val="182E26"/>
+                </a:solidFill>
+                <a:latin typeface="Arial"/>
+              </a:rPr>
+              <a:t>JUnit · planificado</a:t>
+            </a:r>
+          </a:p>
+        </p:txBody>
+      </p:sp>
+      <p:cxnSp>
+        <p:nvCxnSpPr>
+          <p:cNvPr id="24" name="Connector 23"/>
+          <p:cNvCxnSpPr/>
+          <p:nvPr/>
+        </p:nvCxnSpPr>
+        <p:spPr>
+          <a:xfrm>
+            <a:off x="566928" y="5257800"/>
+            <a:ext cx="5074920" cy="0"/>
+          </a:xfrm>
+          <a:prstGeom prst="line">
+            <a:avLst/>
+          </a:prstGeom>
+          <a:ln w="12700">
+            <a:solidFill>
+              <a:srgbClr val="EEF5F0"/>
+            </a:solidFill>
+          </a:ln>
+        </p:spPr>
+        <p:style>
+          <a:lnRef idx="2">
+            <a:schemeClr val="accent1"/>
+          </a:lnRef>
+          <a:fillRef idx="0">
+            <a:schemeClr val="accent1"/>
+          </a:fillRef>
+          <a:effectRef idx="1">
+            <a:schemeClr val="accent1"/>
+          </a:effectRef>
+          <a:fontRef idx="minor">
+            <a:schemeClr val="tx1"/>
+          </a:fontRef>
+        </p:style>
+      </p:cxnSp>
+      <p:cxnSp>
+        <p:nvCxnSpPr>
+          <p:cNvPr id="25" name="Connector 24"/>
+          <p:cNvCxnSpPr/>
+          <p:nvPr/>
+        </p:nvCxnSpPr>
+        <p:spPr>
+          <a:xfrm>
+            <a:off x="5916168" y="1261872"/>
+            <a:ext cx="0" cy="4315968"/>
+          </a:xfrm>
+          <a:prstGeom prst="line">
+            <a:avLst/>
+          </a:prstGeom>
+          <a:ln w="25400">
+            <a:solidFill>
+              <a:srgbClr val="E6B820"/>
+            </a:solidFill>
+          </a:ln>
+        </p:spPr>
+        <p:style>
+          <a:lnRef idx="2">
+            <a:schemeClr val="accent1"/>
+          </a:lnRef>
+          <a:fillRef idx="0">
+            <a:schemeClr val="accent1"/>
+          </a:fillRef>
+          <a:effectRef idx="1">
+            <a:schemeClr val="accent1"/>
+          </a:effectRef>
+          <a:fontRef idx="minor">
+            <a:schemeClr val="tx1"/>
+          </a:fontRef>
+        </p:style>
+      </p:cxnSp>
+      <p:sp>
+        <p:nvSpPr>
+          <p:cNvPr id="26" name="TextBox 25"/>
+          <p:cNvSpPr txBox="1"/>
+          <p:nvPr/>
+        </p:nvSpPr>
+        <p:spPr>
+          <a:xfrm>
+            <a:off x="6236208" y="1316736"/>
+            <a:ext cx="4297680" cy="301752"/>
+          </a:xfrm>
+          <a:prstGeom prst="rect">
+            <a:avLst/>
+          </a:prstGeom>
+          <a:noFill/>
+        </p:spPr>
+        <p:txBody>
+          <a:bodyPr wrap="square" lIns="27432" tIns="27432" rIns="27432" bIns="27432" anchor="t"/>
+          <a:lstStyle/>
+          <a:p>
+            <a:pPr algn="l">
+              <a:lnSpc>
+                <a:spcPct val="100000"/>
+              </a:lnSpc>
+            </a:pPr>
+            <a:r>
+              <a:rPr sz="1600" b="1" i="0">
+                <a:solidFill>
+                  <a:srgbClr val="0B7238"/>
+                </a:solidFill>
+                <a:latin typeface="Arial"/>
+              </a:rPr>
+              <a:t>ARQUITECTURA EN CAPAS</a:t>
+            </a:r>
+          </a:p>
+        </p:txBody>
+      </p:sp>
+      <p:sp>
+        <p:nvSpPr>
+          <p:cNvPr id="27" name="Rectangle 26"/>
+          <p:cNvSpPr/>
+          <p:nvPr/>
+        </p:nvSpPr>
+        <p:spPr>
+          <a:xfrm>
+            <a:off x="6236208" y="1847088"/>
+            <a:ext cx="4315968" cy="621792"/>
+          </a:xfrm>
+          <a:prstGeom prst="rect">
+            <a:avLst/>
+          </a:prstGeom>
+          <a:solidFill>
+            <a:srgbClr val="FFFFFF"/>
+          </a:solidFill>
+          <a:ln w="16510">
+            <a:solidFill>
+              <a:srgbClr val="9AA59F"/>
+            </a:solidFill>
+          </a:ln>
+        </p:spPr>
+        <p:style>
+          <a:lnRef idx="1">
+            <a:schemeClr val="accent1"/>
+          </a:lnRef>
+          <a:fillRef idx="3">
+            <a:schemeClr val="accent1"/>
+          </a:fillRef>
+          <a:effectRef idx="2">
+            <a:schemeClr val="accent1"/>
+          </a:effectRef>
+          <a:fontRef idx="minor">
+            <a:schemeClr val="lt1"/>
+          </a:fontRef>
+        </p:style>
+        <p:txBody>
+          <a:bodyPr wrap="square" lIns="109728" tIns="73152" rIns="109728" bIns="73152" rtlCol="0" anchor="ctr"/>
+          <a:lstStyle/>
+          <a:p>
+            <a:pPr algn="l"/>
+            <a:r>
+              <a:rPr sz="1500" b="1">
+                <a:solidFill>
+                  <a:srgbClr val="0B7238"/>
+                </a:solidFill>
+                <a:latin typeface="Arial"/>
+              </a:rPr>
+              <a:t>VISTA</a:t>
+            </a:r>
+          </a:p>
+          <a:p>
+            <a:pPr algn="l">
+              <a:spcBef>
+                <a:spcPts val="300"/>
+              </a:spcBef>
+            </a:pPr>
+            <a:r>
+              <a:rPr sz="1400">
+                <a:solidFill>
+                  <a:srgbClr val="182E26"/>
+                </a:solidFill>
+                <a:latin typeface="Arial"/>
+              </a:rPr>
+              <a:t>Interfaz de consola / menú</a:t>
+            </a:r>
+          </a:p>
+        </p:txBody>
+      </p:sp>
+      <p:sp>
+        <p:nvSpPr>
+          <p:cNvPr id="28" name="Rectangle 27"/>
+          <p:cNvSpPr/>
+          <p:nvPr/>
+        </p:nvSpPr>
+        <p:spPr>
+          <a:xfrm>
+            <a:off x="6236208" y="2688336"/>
+            <a:ext cx="4315968" cy="621792"/>
+          </a:xfrm>
+          <a:prstGeom prst="rect">
+            <a:avLst/>
+          </a:prstGeom>
+          <a:solidFill>
+            <a:srgbClr val="FFFFFF"/>
+          </a:solidFill>
+          <a:ln w="16510">
+            <a:solidFill>
+              <a:srgbClr val="9AA59F"/>
+            </a:solidFill>
+          </a:ln>
+        </p:spPr>
+        <p:style>
+          <a:lnRef idx="1">
+            <a:schemeClr val="accent1"/>
+          </a:lnRef>
+          <a:fillRef idx="3">
+            <a:schemeClr val="accent1"/>
+          </a:fillRef>
+          <a:effectRef idx="2">
+            <a:schemeClr val="accent1"/>
+          </a:effectRef>
+          <a:fontRef idx="minor">
+            <a:schemeClr val="lt1"/>
+          </a:fontRef>
+        </p:style>
+        <p:txBody>
+          <a:bodyPr wrap="square" lIns="109728" tIns="73152" rIns="109728" bIns="73152" rtlCol="0" anchor="ctr"/>
+          <a:lstStyle/>
+          <a:p>
+            <a:pPr algn="l"/>
+            <a:r>
+              <a:rPr sz="1500" b="1">
+                <a:solidFill>
+                  <a:srgbClr val="0B7238"/>
+                </a:solidFill>
+                <a:latin typeface="Arial"/>
+              </a:rPr>
+              <a:t>SERVICIO</a:t>
+            </a:r>
+          </a:p>
+          <a:p>
+            <a:pPr algn="l">
+              <a:spcBef>
+                <a:spcPts val="300"/>
+              </a:spcBef>
+            </a:pPr>
+            <a:r>
+              <a:rPr sz="1400">
+                <a:solidFill>
+                  <a:srgbClr val="182E26"/>
+                </a:solidFill>
+                <a:latin typeface="Arial"/>
+              </a:rPr>
+              <a:t>Gestión de viajes y validaciones</a:t>
+            </a:r>
+          </a:p>
+        </p:txBody>
+      </p:sp>
+      <p:sp>
+        <p:nvSpPr>
+          <p:cNvPr id="29" name="Rectangle 28"/>
+          <p:cNvSpPr/>
+          <p:nvPr/>
+        </p:nvSpPr>
+        <p:spPr>
+          <a:xfrm>
+            <a:off x="6236208" y="3529584"/>
+            <a:ext cx="4315968" cy="621792"/>
+          </a:xfrm>
+          <a:prstGeom prst="rect">
+            <a:avLst/>
+          </a:prstGeom>
+          <a:solidFill>
+            <a:srgbClr val="FFFFFF"/>
+          </a:solidFill>
+          <a:ln w="16510">
+            <a:solidFill>
+              <a:srgbClr val="9AA59F"/>
+            </a:solidFill>
+          </a:ln>
+        </p:spPr>
+        <p:style>
+          <a:lnRef idx="1">
+            <a:schemeClr val="accent1"/>
+          </a:lnRef>
+          <a:fillRef idx="3">
+            <a:schemeClr val="accent1"/>
+          </a:fillRef>
+          <a:effectRef idx="2">
+            <a:schemeClr val="accent1"/>
+          </a:effectRef>
+          <a:fontRef idx="minor">
+            <a:schemeClr val="lt1"/>
+          </a:fontRef>
+        </p:style>
+        <p:txBody>
+          <a:bodyPr wrap="square" lIns="109728" tIns="73152" rIns="109728" bIns="73152" rtlCol="0" anchor="ctr"/>
+          <a:lstStyle/>
+          <a:p>
+            <a:pPr algn="l"/>
+            <a:r>
+              <a:rPr sz="1500" b="1">
+                <a:solidFill>
+                  <a:srgbClr val="0B7238"/>
+                </a:solidFill>
+                <a:latin typeface="Arial"/>
+              </a:rPr>
+              <a:t>PERSISTENCIA</a:t>
+            </a:r>
+          </a:p>
+          <a:p>
+            <a:pPr algn="l">
+              <a:spcBef>
+                <a:spcPts val="300"/>
+              </a:spcBef>
+            </a:pPr>
+            <a:r>
+              <a:rPr sz="1400">
+                <a:solidFill>
+                  <a:srgbClr val="182E26"/>
+                </a:solidFill>
+                <a:latin typeface="Arial"/>
+              </a:rPr>
+              <a:t>Archivos o base de datos</a:t>
+            </a:r>
+          </a:p>
+        </p:txBody>
+      </p:sp>
+      <p:sp>
+        <p:nvSpPr>
+          <p:cNvPr id="30" name="Rectangle 29"/>
+          <p:cNvSpPr/>
+          <p:nvPr/>
+        </p:nvSpPr>
+        <p:spPr>
+          <a:xfrm>
+            <a:off x="6236208" y="4370832"/>
+            <a:ext cx="4315968" cy="621792"/>
+          </a:xfrm>
+          <a:prstGeom prst="rect">
+            <a:avLst/>
+          </a:prstGeom>
+          <a:solidFill>
+            <a:srgbClr val="FFFFFF"/>
+          </a:solidFill>
+          <a:ln w="16510">
+            <a:solidFill>
+              <a:srgbClr val="0B7238"/>
+            </a:solidFill>
+          </a:ln>
+        </p:spPr>
+        <p:style>
+          <a:lnRef idx="1">
+            <a:schemeClr val="accent1"/>
+          </a:lnRef>
+          <a:fillRef idx="3">
+            <a:schemeClr val="accent1"/>
+          </a:fillRef>
+          <a:effectRef idx="2">
+            <a:schemeClr val="accent1"/>
+          </a:effectRef>
+          <a:fontRef idx="minor">
+            <a:schemeClr val="lt1"/>
+          </a:fontRef>
+        </p:style>
+        <p:txBody>
+          <a:bodyPr wrap="square" lIns="109728" tIns="73152" rIns="109728" bIns="73152" rtlCol="0" anchor="ctr"/>
+          <a:lstStyle/>
+          <a:p>
+            <a:pPr algn="l"/>
+            <a:r>
+              <a:rPr sz="1500" b="1">
+                <a:solidFill>
+                  <a:srgbClr val="0B7238"/>
+                </a:solidFill>
+                <a:latin typeface="Arial"/>
+              </a:rPr>
+              <a:t>MODELO</a:t>
+            </a:r>
+          </a:p>
+          <a:p>
+            <a:pPr algn="l">
+              <a:spcBef>
+                <a:spcPts val="300"/>
+              </a:spcBef>
+            </a:pPr>
+            <a:r>
+              <a:rPr sz="1400">
+                <a:solidFill>
+                  <a:srgbClr val="182E26"/>
+                </a:solidFill>
+                <a:latin typeface="Arial"/>
+              </a:rPr>
+              <a:t>Cinco entidades del dominio</a:t>
+            </a:r>
+          </a:p>
+        </p:txBody>
+      </p:sp>
+      <p:sp>
+        <p:nvSpPr>
+          <p:cNvPr id="31" name="TextBox 30"/>
+          <p:cNvSpPr txBox="1"/>
+          <p:nvPr/>
+        </p:nvSpPr>
+        <p:spPr>
+          <a:xfrm>
+            <a:off x="6236208" y="5349240"/>
+            <a:ext cx="4315968" cy="438912"/>
+          </a:xfrm>
+          <a:prstGeom prst="rect">
+            <a:avLst/>
+          </a:prstGeom>
+          <a:noFill/>
+        </p:spPr>
+        <p:txBody>
+          <a:bodyPr wrap="square" lIns="27432" tIns="27432" rIns="27432" bIns="27432" anchor="t"/>
+          <a:lstStyle/>
+          <a:p>
+            <a:pPr algn="l">
+              <a:lnSpc>
+                <a:spcPct val="100000"/>
+              </a:lnSpc>
+            </a:pPr>
+            <a:r>
+              <a:rPr sz="1400" b="0" i="0">
+                <a:solidFill>
+                  <a:srgbClr val="5F6B65"/>
+                </a:solidFill>
+                <a:latin typeface="Arial"/>
+              </a:rPr>
+              <a:t>La estructura separa responsabilidades y permite crecer por etapas.</a:t>
             </a:r>
           </a:p>
         </p:txBody>
@@ -6276,6 +6325,18 @@
   <p:clrMapOvr>
     <a:masterClrMapping/>
   </p:clrMapOvr>
+  <mc:AlternateContent xmlns:mc="http://schemas.openxmlformats.org/markup-compatibility/2006">
+    <mc:Choice xmlns:p14="http://schemas.microsoft.com/office/powerpoint/2010/main" Requires="p14">
+      <p:transition spd="slow" p14:dur="1400">
+        <p14:doors dir="vert"/>
+      </p:transition>
+    </mc:Choice>
+    <mc:Fallback>
+      <p:transition spd="slow">
+        <p:fade/>
+      </p:transition>
+    </mc:Fallback>
+  </mc:AlternateContent>
 </p:sld>
 </file>
 
@@ -6325,7 +6386,7 @@
                 </a:solidFill>
                 <a:latin typeface="Arial"/>
               </a:rPr>
-              <a:t>El proyecto avanza del dominio a una entrega integrable</a:t>
+              <a:t>Cuatro roles complementarios cubren el ciclo del proyecto</a:t>
             </a:r>
           </a:p>
         </p:txBody>
@@ -6359,28 +6420,102 @@
                 </a:solidFill>
                 <a:latin typeface="Arial"/>
               </a:rPr>
-              <a:t>10</a:t>
+              <a:t>9</a:t>
+            </a:r>
+          </a:p>
+        </p:txBody>
+      </p:sp>
+      <p:sp>
+        <p:nvSpPr>
+          <p:cNvPr id="4" name="TextBox 3"/>
+          <p:cNvSpPr txBox="1"/>
+          <p:nvPr/>
+        </p:nvSpPr>
+        <p:spPr>
+          <a:xfrm>
+            <a:off x="1481328" y="1298448"/>
+            <a:ext cx="4892040" cy="256032"/>
+          </a:xfrm>
+          <a:prstGeom prst="rect">
+            <a:avLst/>
+          </a:prstGeom>
+          <a:noFill/>
+        </p:spPr>
+        <p:txBody>
+          <a:bodyPr wrap="square" lIns="27432" tIns="27432" rIns="27432" bIns="27432" anchor="t"/>
+          <a:lstStyle/>
+          <a:p>
+            <a:pPr algn="l">
+              <a:lnSpc>
+                <a:spcPct val="100000"/>
+              </a:lnSpc>
+            </a:pPr>
+            <a:r>
+              <a:rPr sz="1400" b="1" i="0">
+                <a:solidFill>
+                  <a:srgbClr val="0B7238"/>
+                </a:solidFill>
+                <a:latin typeface="Arial"/>
+              </a:rPr>
+              <a:t>INTEGRANTE</a:t>
+            </a:r>
+          </a:p>
+        </p:txBody>
+      </p:sp>
+      <p:sp>
+        <p:nvSpPr>
+          <p:cNvPr id="5" name="TextBox 4"/>
+          <p:cNvSpPr txBox="1"/>
+          <p:nvPr/>
+        </p:nvSpPr>
+        <p:spPr>
+          <a:xfrm>
+            <a:off x="7360920" y="1298448"/>
+            <a:ext cx="3383280" cy="256032"/>
+          </a:xfrm>
+          <a:prstGeom prst="rect">
+            <a:avLst/>
+          </a:prstGeom>
+          <a:noFill/>
+        </p:spPr>
+        <p:txBody>
+          <a:bodyPr wrap="square" lIns="27432" tIns="27432" rIns="27432" bIns="27432" anchor="t"/>
+          <a:lstStyle/>
+          <a:p>
+            <a:pPr algn="l">
+              <a:lnSpc>
+                <a:spcPct val="100000"/>
+              </a:lnSpc>
+            </a:pPr>
+            <a:r>
+              <a:rPr sz="1400" b="1" i="0">
+                <a:solidFill>
+                  <a:srgbClr val="0B7238"/>
+                </a:solidFill>
+                <a:latin typeface="Arial"/>
+              </a:rPr>
+              <a:t>ROL PRINCIPAL</a:t>
             </a:r>
           </a:p>
         </p:txBody>
       </p:sp>
       <p:cxnSp>
         <p:nvCxnSpPr>
-          <p:cNvPr id="4" name="Connector 3"/>
+          <p:cNvPr id="6" name="Connector 5"/>
           <p:cNvCxnSpPr/>
           <p:nvPr/>
         </p:nvCxnSpPr>
         <p:spPr>
           <a:xfrm>
-            <a:off x="896112" y="1463040"/>
-            <a:ext cx="0" cy="4251960"/>
+            <a:off x="566928" y="1664208"/>
+            <a:ext cx="10241279" cy="0"/>
           </a:xfrm>
           <a:prstGeom prst="line">
             <a:avLst/>
           </a:prstGeom>
-          <a:ln w="19050">
+          <a:ln w="25400">
             <a:solidFill>
-              <a:srgbClr val="9AA59F"/>
+              <a:srgbClr val="0B7238"/>
             </a:solidFill>
           </a:ln>
         </p:spPr>
@@ -6401,6 +6536,723 @@
       </p:cxnSp>
       <p:sp>
         <p:nvSpPr>
+          <p:cNvPr id="7" name="TextBox 6"/>
+          <p:cNvSpPr txBox="1"/>
+          <p:nvPr/>
+        </p:nvSpPr>
+        <p:spPr>
+          <a:xfrm>
+            <a:off x="566928" y="1847088"/>
+            <a:ext cx="548640" cy="411480"/>
+          </a:xfrm>
+          <a:prstGeom prst="rect">
+            <a:avLst/>
+          </a:prstGeom>
+          <a:noFill/>
+        </p:spPr>
+        <p:txBody>
+          <a:bodyPr wrap="square" lIns="27432" tIns="27432" rIns="27432" bIns="27432" anchor="t"/>
+          <a:lstStyle/>
+          <a:p>
+            <a:pPr algn="l">
+              <a:lnSpc>
+                <a:spcPct val="100000"/>
+              </a:lnSpc>
+            </a:pPr>
+            <a:r>
+              <a:rPr sz="2200" b="1" i="0">
+                <a:solidFill>
+                  <a:srgbClr val="E6B820"/>
+                </a:solidFill>
+                <a:latin typeface="Arial"/>
+              </a:rPr>
+              <a:t>01</a:t>
+            </a:r>
+          </a:p>
+        </p:txBody>
+      </p:sp>
+      <p:sp>
+        <p:nvSpPr>
+          <p:cNvPr id="8" name="TextBox 7"/>
+          <p:cNvSpPr txBox="1"/>
+          <p:nvPr/>
+        </p:nvSpPr>
+        <p:spPr>
+          <a:xfrm>
+            <a:off x="1481328" y="1847088"/>
+            <a:ext cx="5303520" cy="411480"/>
+          </a:xfrm>
+          <a:prstGeom prst="rect">
+            <a:avLst/>
+          </a:prstGeom>
+          <a:noFill/>
+        </p:spPr>
+        <p:txBody>
+          <a:bodyPr wrap="square" lIns="27432" tIns="27432" rIns="27432" bIns="27432" anchor="t"/>
+          <a:lstStyle/>
+          <a:p>
+            <a:pPr algn="l">
+              <a:lnSpc>
+                <a:spcPct val="100000"/>
+              </a:lnSpc>
+            </a:pPr>
+            <a:r>
+              <a:rPr sz="1800" b="1" i="0">
+                <a:solidFill>
+                  <a:srgbClr val="182E26"/>
+                </a:solidFill>
+                <a:latin typeface="Arial"/>
+              </a:rPr>
+              <a:t>Jhonatan Alexander Saavedra Culma</a:t>
+            </a:r>
+          </a:p>
+        </p:txBody>
+      </p:sp>
+      <p:sp>
+        <p:nvSpPr>
+          <p:cNvPr id="9" name="TextBox 8"/>
+          <p:cNvSpPr txBox="1"/>
+          <p:nvPr/>
+        </p:nvSpPr>
+        <p:spPr>
+          <a:xfrm>
+            <a:off x="7360920" y="1847088"/>
+            <a:ext cx="3383280" cy="548640"/>
+          </a:xfrm>
+          <a:prstGeom prst="rect">
+            <a:avLst/>
+          </a:prstGeom>
+          <a:noFill/>
+        </p:spPr>
+        <p:txBody>
+          <a:bodyPr wrap="square" lIns="27432" tIns="27432" rIns="27432" bIns="27432" anchor="t"/>
+          <a:lstStyle/>
+          <a:p>
+            <a:pPr algn="l">
+              <a:lnSpc>
+                <a:spcPct val="100000"/>
+              </a:lnSpc>
+            </a:pPr>
+            <a:r>
+              <a:rPr sz="1600" b="0" i="0">
+                <a:solidFill>
+                  <a:srgbClr val="5F6B65"/>
+                </a:solidFill>
+                <a:latin typeface="Arial"/>
+              </a:rPr>
+              <a:t>Líder · Modelado UML</a:t>
+            </a:r>
+          </a:p>
+        </p:txBody>
+      </p:sp>
+      <p:cxnSp>
+        <p:nvCxnSpPr>
+          <p:cNvPr id="10" name="Connector 9"/>
+          <p:cNvCxnSpPr/>
+          <p:nvPr/>
+        </p:nvCxnSpPr>
+        <p:spPr>
+          <a:xfrm>
+            <a:off x="566928" y="2542032"/>
+            <a:ext cx="10241279" cy="0"/>
+          </a:xfrm>
+          <a:prstGeom prst="line">
+            <a:avLst/>
+          </a:prstGeom>
+          <a:ln w="12700">
+            <a:solidFill>
+              <a:srgbClr val="EEF5F0"/>
+            </a:solidFill>
+          </a:ln>
+        </p:spPr>
+        <p:style>
+          <a:lnRef idx="2">
+            <a:schemeClr val="accent1"/>
+          </a:lnRef>
+          <a:fillRef idx="0">
+            <a:schemeClr val="accent1"/>
+          </a:fillRef>
+          <a:effectRef idx="1">
+            <a:schemeClr val="accent1"/>
+          </a:effectRef>
+          <a:fontRef idx="minor">
+            <a:schemeClr val="tx1"/>
+          </a:fontRef>
+        </p:style>
+      </p:cxnSp>
+      <p:sp>
+        <p:nvSpPr>
+          <p:cNvPr id="11" name="TextBox 10"/>
+          <p:cNvSpPr txBox="1"/>
+          <p:nvPr/>
+        </p:nvSpPr>
+        <p:spPr>
+          <a:xfrm>
+            <a:off x="566928" y="2788920"/>
+            <a:ext cx="548640" cy="411480"/>
+          </a:xfrm>
+          <a:prstGeom prst="rect">
+            <a:avLst/>
+          </a:prstGeom>
+          <a:noFill/>
+        </p:spPr>
+        <p:txBody>
+          <a:bodyPr wrap="square" lIns="27432" tIns="27432" rIns="27432" bIns="27432" anchor="t"/>
+          <a:lstStyle/>
+          <a:p>
+            <a:pPr algn="l">
+              <a:lnSpc>
+                <a:spcPct val="100000"/>
+              </a:lnSpc>
+            </a:pPr>
+            <a:r>
+              <a:rPr sz="2200" b="1" i="0">
+                <a:solidFill>
+                  <a:srgbClr val="E6B820"/>
+                </a:solidFill>
+                <a:latin typeface="Arial"/>
+              </a:rPr>
+              <a:t>02</a:t>
+            </a:r>
+          </a:p>
+        </p:txBody>
+      </p:sp>
+      <p:sp>
+        <p:nvSpPr>
+          <p:cNvPr id="12" name="TextBox 11"/>
+          <p:cNvSpPr txBox="1"/>
+          <p:nvPr/>
+        </p:nvSpPr>
+        <p:spPr>
+          <a:xfrm>
+            <a:off x="1481328" y="2788920"/>
+            <a:ext cx="5303520" cy="411480"/>
+          </a:xfrm>
+          <a:prstGeom prst="rect">
+            <a:avLst/>
+          </a:prstGeom>
+          <a:noFill/>
+        </p:spPr>
+        <p:txBody>
+          <a:bodyPr wrap="square" lIns="27432" tIns="27432" rIns="27432" bIns="27432" anchor="t"/>
+          <a:lstStyle/>
+          <a:p>
+            <a:pPr algn="l">
+              <a:lnSpc>
+                <a:spcPct val="100000"/>
+              </a:lnSpc>
+            </a:pPr>
+            <a:r>
+              <a:rPr sz="1800" b="1" i="0">
+                <a:solidFill>
+                  <a:srgbClr val="182E26"/>
+                </a:solidFill>
+                <a:latin typeface="Arial"/>
+              </a:rPr>
+              <a:t>Gian Marco Castañeda Samboni</a:t>
+            </a:r>
+          </a:p>
+        </p:txBody>
+      </p:sp>
+      <p:sp>
+        <p:nvSpPr>
+          <p:cNvPr id="13" name="TextBox 12"/>
+          <p:cNvSpPr txBox="1"/>
+          <p:nvPr/>
+        </p:nvSpPr>
+        <p:spPr>
+          <a:xfrm>
+            <a:off x="7360920" y="2788920"/>
+            <a:ext cx="3383280" cy="548640"/>
+          </a:xfrm>
+          <a:prstGeom prst="rect">
+            <a:avLst/>
+          </a:prstGeom>
+          <a:noFill/>
+        </p:spPr>
+        <p:txBody>
+          <a:bodyPr wrap="square" lIns="27432" tIns="27432" rIns="27432" bIns="27432" anchor="t"/>
+          <a:lstStyle/>
+          <a:p>
+            <a:pPr algn="l">
+              <a:lnSpc>
+                <a:spcPct val="100000"/>
+              </a:lnSpc>
+            </a:pPr>
+            <a:r>
+              <a:rPr sz="1600" b="0" i="0">
+                <a:solidFill>
+                  <a:srgbClr val="5F6B65"/>
+                </a:solidFill>
+                <a:latin typeface="Arial"/>
+              </a:rPr>
+              <a:t>Backend Java · Lógica de negocio</a:t>
+            </a:r>
+          </a:p>
+        </p:txBody>
+      </p:sp>
+      <p:cxnSp>
+        <p:nvCxnSpPr>
+          <p:cNvPr id="14" name="Connector 13"/>
+          <p:cNvCxnSpPr/>
+          <p:nvPr/>
+        </p:nvCxnSpPr>
+        <p:spPr>
+          <a:xfrm>
+            <a:off x="566928" y="3483863"/>
+            <a:ext cx="10241279" cy="0"/>
+          </a:xfrm>
+          <a:prstGeom prst="line">
+            <a:avLst/>
+          </a:prstGeom>
+          <a:ln w="12700">
+            <a:solidFill>
+              <a:srgbClr val="EEF5F0"/>
+            </a:solidFill>
+          </a:ln>
+        </p:spPr>
+        <p:style>
+          <a:lnRef idx="2">
+            <a:schemeClr val="accent1"/>
+          </a:lnRef>
+          <a:fillRef idx="0">
+            <a:schemeClr val="accent1"/>
+          </a:fillRef>
+          <a:effectRef idx="1">
+            <a:schemeClr val="accent1"/>
+          </a:effectRef>
+          <a:fontRef idx="minor">
+            <a:schemeClr val="tx1"/>
+          </a:fontRef>
+        </p:style>
+      </p:cxnSp>
+      <p:sp>
+        <p:nvSpPr>
+          <p:cNvPr id="15" name="TextBox 14"/>
+          <p:cNvSpPr txBox="1"/>
+          <p:nvPr/>
+        </p:nvSpPr>
+        <p:spPr>
+          <a:xfrm>
+            <a:off x="566928" y="3730752"/>
+            <a:ext cx="548640" cy="411480"/>
+          </a:xfrm>
+          <a:prstGeom prst="rect">
+            <a:avLst/>
+          </a:prstGeom>
+          <a:noFill/>
+        </p:spPr>
+        <p:txBody>
+          <a:bodyPr wrap="square" lIns="27432" tIns="27432" rIns="27432" bIns="27432" anchor="t"/>
+          <a:lstStyle/>
+          <a:p>
+            <a:pPr algn="l">
+              <a:lnSpc>
+                <a:spcPct val="100000"/>
+              </a:lnSpc>
+            </a:pPr>
+            <a:r>
+              <a:rPr sz="2200" b="1" i="0">
+                <a:solidFill>
+                  <a:srgbClr val="E6B820"/>
+                </a:solidFill>
+                <a:latin typeface="Arial"/>
+              </a:rPr>
+              <a:t>03</a:t>
+            </a:r>
+          </a:p>
+        </p:txBody>
+      </p:sp>
+      <p:sp>
+        <p:nvSpPr>
+          <p:cNvPr id="16" name="TextBox 15"/>
+          <p:cNvSpPr txBox="1"/>
+          <p:nvPr/>
+        </p:nvSpPr>
+        <p:spPr>
+          <a:xfrm>
+            <a:off x="1481328" y="3730752"/>
+            <a:ext cx="5303520" cy="411480"/>
+          </a:xfrm>
+          <a:prstGeom prst="rect">
+            <a:avLst/>
+          </a:prstGeom>
+          <a:noFill/>
+        </p:spPr>
+        <p:txBody>
+          <a:bodyPr wrap="square" lIns="27432" tIns="27432" rIns="27432" bIns="27432" anchor="t"/>
+          <a:lstStyle/>
+          <a:p>
+            <a:pPr algn="l">
+              <a:lnSpc>
+                <a:spcPct val="100000"/>
+              </a:lnSpc>
+            </a:pPr>
+            <a:r>
+              <a:rPr sz="1800" b="1" i="0">
+                <a:solidFill>
+                  <a:srgbClr val="182E26"/>
+                </a:solidFill>
+                <a:latin typeface="Arial"/>
+              </a:rPr>
+              <a:t>Andrés David Pinilla Parra</a:t>
+            </a:r>
+          </a:p>
+        </p:txBody>
+      </p:sp>
+      <p:sp>
+        <p:nvSpPr>
+          <p:cNvPr id="17" name="TextBox 16"/>
+          <p:cNvSpPr txBox="1"/>
+          <p:nvPr/>
+        </p:nvSpPr>
+        <p:spPr>
+          <a:xfrm>
+            <a:off x="7360920" y="3730752"/>
+            <a:ext cx="3383280" cy="548640"/>
+          </a:xfrm>
+          <a:prstGeom prst="rect">
+            <a:avLst/>
+          </a:prstGeom>
+          <a:noFill/>
+        </p:spPr>
+        <p:txBody>
+          <a:bodyPr wrap="square" lIns="27432" tIns="27432" rIns="27432" bIns="27432" anchor="t"/>
+          <a:lstStyle/>
+          <a:p>
+            <a:pPr algn="l">
+              <a:lnSpc>
+                <a:spcPct val="100000"/>
+              </a:lnSpc>
+            </a:pPr>
+            <a:r>
+              <a:rPr sz="1600" b="0" i="0">
+                <a:solidFill>
+                  <a:srgbClr val="5F6B65"/>
+                </a:solidFill>
+                <a:latin typeface="Arial"/>
+              </a:rPr>
+              <a:t>Persistencia · Pruebas</a:t>
+            </a:r>
+          </a:p>
+        </p:txBody>
+      </p:sp>
+      <p:cxnSp>
+        <p:nvCxnSpPr>
+          <p:cNvPr id="18" name="Connector 17"/>
+          <p:cNvCxnSpPr/>
+          <p:nvPr/>
+        </p:nvCxnSpPr>
+        <p:spPr>
+          <a:xfrm>
+            <a:off x="566928" y="4425696"/>
+            <a:ext cx="10241279" cy="0"/>
+          </a:xfrm>
+          <a:prstGeom prst="line">
+            <a:avLst/>
+          </a:prstGeom>
+          <a:ln w="12700">
+            <a:solidFill>
+              <a:srgbClr val="EEF5F0"/>
+            </a:solidFill>
+          </a:ln>
+        </p:spPr>
+        <p:style>
+          <a:lnRef idx="2">
+            <a:schemeClr val="accent1"/>
+          </a:lnRef>
+          <a:fillRef idx="0">
+            <a:schemeClr val="accent1"/>
+          </a:fillRef>
+          <a:effectRef idx="1">
+            <a:schemeClr val="accent1"/>
+          </a:effectRef>
+          <a:fontRef idx="minor">
+            <a:schemeClr val="tx1"/>
+          </a:fontRef>
+        </p:style>
+      </p:cxnSp>
+      <p:sp>
+        <p:nvSpPr>
+          <p:cNvPr id="19" name="TextBox 18"/>
+          <p:cNvSpPr txBox="1"/>
+          <p:nvPr/>
+        </p:nvSpPr>
+        <p:spPr>
+          <a:xfrm>
+            <a:off x="566928" y="4672583"/>
+            <a:ext cx="548640" cy="411480"/>
+          </a:xfrm>
+          <a:prstGeom prst="rect">
+            <a:avLst/>
+          </a:prstGeom>
+          <a:noFill/>
+        </p:spPr>
+        <p:txBody>
+          <a:bodyPr wrap="square" lIns="27432" tIns="27432" rIns="27432" bIns="27432" anchor="t"/>
+          <a:lstStyle/>
+          <a:p>
+            <a:pPr algn="l">
+              <a:lnSpc>
+                <a:spcPct val="100000"/>
+              </a:lnSpc>
+            </a:pPr>
+            <a:r>
+              <a:rPr sz="2200" b="1" i="0">
+                <a:solidFill>
+                  <a:srgbClr val="E6B820"/>
+                </a:solidFill>
+                <a:latin typeface="Arial"/>
+              </a:rPr>
+              <a:t>04</a:t>
+            </a:r>
+          </a:p>
+        </p:txBody>
+      </p:sp>
+      <p:sp>
+        <p:nvSpPr>
+          <p:cNvPr id="20" name="TextBox 19"/>
+          <p:cNvSpPr txBox="1"/>
+          <p:nvPr/>
+        </p:nvSpPr>
+        <p:spPr>
+          <a:xfrm>
+            <a:off x="1481328" y="4672583"/>
+            <a:ext cx="5303520" cy="411480"/>
+          </a:xfrm>
+          <a:prstGeom prst="rect">
+            <a:avLst/>
+          </a:prstGeom>
+          <a:noFill/>
+        </p:spPr>
+        <p:txBody>
+          <a:bodyPr wrap="square" lIns="27432" tIns="27432" rIns="27432" bIns="27432" anchor="t"/>
+          <a:lstStyle/>
+          <a:p>
+            <a:pPr algn="l">
+              <a:lnSpc>
+                <a:spcPct val="100000"/>
+              </a:lnSpc>
+            </a:pPr>
+            <a:r>
+              <a:rPr sz="1800" b="1" i="0">
+                <a:solidFill>
+                  <a:srgbClr val="182E26"/>
+                </a:solidFill>
+                <a:latin typeface="Arial"/>
+              </a:rPr>
+              <a:t>Juan Guillermo Ferrer Gasca</a:t>
+            </a:r>
+          </a:p>
+        </p:txBody>
+      </p:sp>
+      <p:sp>
+        <p:nvSpPr>
+          <p:cNvPr id="21" name="TextBox 20"/>
+          <p:cNvSpPr txBox="1"/>
+          <p:nvPr/>
+        </p:nvSpPr>
+        <p:spPr>
+          <a:xfrm>
+            <a:off x="7360920" y="4672583"/>
+            <a:ext cx="3383280" cy="548640"/>
+          </a:xfrm>
+          <a:prstGeom prst="rect">
+            <a:avLst/>
+          </a:prstGeom>
+          <a:noFill/>
+        </p:spPr>
+        <p:txBody>
+          <a:bodyPr wrap="square" lIns="27432" tIns="27432" rIns="27432" bIns="27432" anchor="t"/>
+          <a:lstStyle/>
+          <a:p>
+            <a:pPr algn="l">
+              <a:lnSpc>
+                <a:spcPct val="100000"/>
+              </a:lnSpc>
+            </a:pPr>
+            <a:r>
+              <a:rPr sz="1600" b="0" i="0">
+                <a:solidFill>
+                  <a:srgbClr val="5F6B65"/>
+                </a:solidFill>
+                <a:latin typeface="Arial"/>
+              </a:rPr>
+              <a:t>Documentación · Arquitectura</a:t>
+            </a:r>
+          </a:p>
+        </p:txBody>
+      </p:sp>
+      <p:sp>
+        <p:nvSpPr>
+          <p:cNvPr id="22" name="TextBox 21"/>
+          <p:cNvSpPr txBox="1"/>
+          <p:nvPr/>
+        </p:nvSpPr>
+        <p:spPr>
+          <a:xfrm>
+            <a:off x="1481328" y="5650992"/>
+            <a:ext cx="8503920" cy="292608"/>
+          </a:xfrm>
+          <a:prstGeom prst="rect">
+            <a:avLst/>
+          </a:prstGeom>
+          <a:noFill/>
+        </p:spPr>
+        <p:txBody>
+          <a:bodyPr wrap="square" lIns="27432" tIns="27432" rIns="27432" bIns="27432" anchor="t"/>
+          <a:lstStyle/>
+          <a:p>
+            <a:pPr algn="ctr">
+              <a:lnSpc>
+                <a:spcPct val="100000"/>
+              </a:lnSpc>
+            </a:pPr>
+            <a:r>
+              <a:rPr sz="1500" b="1" i="0">
+                <a:solidFill>
+                  <a:srgbClr val="0B7238"/>
+                </a:solidFill>
+                <a:latin typeface="Arial"/>
+              </a:rPr>
+              <a:t>Equipo multidisciplinario para modelar, implementar, probar y comunicar.</a:t>
+            </a:r>
+          </a:p>
+        </p:txBody>
+      </p:sp>
+    </p:spTree>
+  </p:cSld>
+  <p:clrMapOvr>
+    <a:masterClrMapping/>
+  </p:clrMapOvr>
+  <p:transition spd="slow">
+    <p:comb/>
+  </p:transition>
+</p:sld>
+</file>
+
+<file path=ppt/slides/slide12.xml><?xml version="1.0" encoding="utf-8"?>
+<p:sld xmlns:a="http://schemas.openxmlformats.org/drawingml/2006/main" xmlns:r="http://schemas.openxmlformats.org/officeDocument/2006/relationships" xmlns:p="http://schemas.openxmlformats.org/presentationml/2006/main">
+  <p:cSld>
+    <p:spTree>
+      <p:nvGrpSpPr>
+        <p:cNvPr id="1" name=""/>
+        <p:cNvGrpSpPr/>
+        <p:nvPr/>
+      </p:nvGrpSpPr>
+      <p:grpSpPr>
+        <a:xfrm>
+          <a:off x="0" y="0"/>
+          <a:ext cx="0" cy="0"/>
+          <a:chOff x="0" y="0"/>
+          <a:chExt cx="0" cy="0"/>
+        </a:xfrm>
+      </p:grpSpPr>
+      <p:sp>
+        <p:nvSpPr>
+          <p:cNvPr id="2" name="Título 1">
+            <a:extLst>
+              <a:ext uri="{FF2B5EF4-FFF2-40B4-BE49-F238E27FC236}">
+                <a16:creationId xmlns:a16="http://schemas.microsoft.com/office/drawing/2014/main" id="{22C8B87F-7704-4D91-086C-AFF2F7CCB367}"/>
+              </a:ext>
+            </a:extLst>
+          </p:cNvPr>
+          <p:cNvSpPr>
+            <a:spLocks noGrp="1"/>
+          </p:cNvSpPr>
+          <p:nvPr>
+            <p:ph type="title"/>
+          </p:nvPr>
+        </p:nvSpPr>
+        <p:spPr/>
+        <p:txBody>
+          <a:bodyPr wrap="square"/>
+          <a:lstStyle/>
+          <a:p>
+            <a:pPr algn="l"/>
+            <a:r>
+              <a:rPr sz="3000" b="1">
+                <a:solidFill>
+                  <a:srgbClr val="0B7238"/>
+                </a:solidFill>
+                <a:latin typeface="Arial"/>
+              </a:rPr>
+              <a:t>El proyecto avanza del dominio a una entrega integrable</a:t>
+            </a:r>
+          </a:p>
+        </p:txBody>
+      </p:sp>
+      <p:sp>
+        <p:nvSpPr>
+          <p:cNvPr id="3" name="Marcador de número de diapositiva 2">
+            <a:extLst>
+              <a:ext uri="{FF2B5EF4-FFF2-40B4-BE49-F238E27FC236}">
+                <a16:creationId xmlns:a16="http://schemas.microsoft.com/office/drawing/2014/main" id="{4B22C4F8-0926-9EB5-227B-31BF71FBB64E}"/>
+              </a:ext>
+            </a:extLst>
+          </p:cNvPr>
+          <p:cNvSpPr>
+            <a:spLocks noGrp="1"/>
+          </p:cNvSpPr>
+          <p:nvPr>
+            <p:ph type="sldNum" sz="quarter" idx="12"/>
+          </p:nvPr>
+        </p:nvSpPr>
+        <p:spPr/>
+        <p:txBody>
+          <a:bodyPr/>
+          <a:lstStyle/>
+          <a:p>
+            <a:pPr algn="r"/>
+            <a:r>
+              <a:rPr sz="1100" b="1">
+                <a:solidFill>
+                  <a:srgbClr val="5F6B65"/>
+                </a:solidFill>
+                <a:latin typeface="Arial"/>
+              </a:rPr>
+              <a:t>10</a:t>
+            </a:r>
+          </a:p>
+        </p:txBody>
+      </p:sp>
+      <p:cxnSp>
+        <p:nvCxnSpPr>
+          <p:cNvPr id="4" name="Connector 3"/>
+          <p:cNvCxnSpPr/>
+          <p:nvPr/>
+        </p:nvCxnSpPr>
+        <p:spPr>
+          <a:xfrm>
+            <a:off x="896112" y="1463040"/>
+            <a:ext cx="0" cy="4251960"/>
+          </a:xfrm>
+          <a:prstGeom prst="line">
+            <a:avLst/>
+          </a:prstGeom>
+          <a:ln w="19050">
+            <a:solidFill>
+              <a:srgbClr val="9AA59F"/>
+            </a:solidFill>
+          </a:ln>
+        </p:spPr>
+        <p:style>
+          <a:lnRef idx="2">
+            <a:schemeClr val="accent1"/>
+          </a:lnRef>
+          <a:fillRef idx="0">
+            <a:schemeClr val="accent1"/>
+          </a:fillRef>
+          <a:effectRef idx="1">
+            <a:schemeClr val="accent1"/>
+          </a:effectRef>
+          <a:fontRef idx="minor">
+            <a:schemeClr val="tx1"/>
+          </a:fontRef>
+        </p:style>
+      </p:cxnSp>
+      <p:sp>
+        <p:nvSpPr>
           <p:cNvPr id="5" name="Oval 4"/>
           <p:cNvSpPr/>
           <p:nvPr/>
@@ -7762,10 +8614,13 @@
   <p:clrMapOvr>
     <a:masterClrMapping/>
   </p:clrMapOvr>
+  <p:transition spd="slow">
+    <p:randomBar dir="vert"/>
+  </p:transition>
 </p:sld>
 </file>
 
-<file path=ppt/slides/slide12.xml><?xml version="1.0" encoding="utf-8"?>
+<file path=ppt/slides/slide13.xml><?xml version="1.0" encoding="utf-8"?>
 <p:sld xmlns:a="http://schemas.openxmlformats.org/drawingml/2006/main" xmlns:r="http://schemas.openxmlformats.org/officeDocument/2006/relationships" xmlns:p="http://schemas.openxmlformats.org/presentationml/2006/main">
   <p:cSld>
     <p:spTree>
@@ -8317,10 +9172,22 @@
   <p:clrMapOvr>
     <a:masterClrMapping/>
   </p:clrMapOvr>
+  <mc:AlternateContent xmlns:mc="http://schemas.openxmlformats.org/markup-compatibility/2006">
+    <mc:Choice xmlns:p14="http://schemas.microsoft.com/office/powerpoint/2010/main" Requires="p14">
+      <p:transition spd="slow" p14:dur="1600">
+        <p:blinds dir="vert"/>
+      </p:transition>
+    </mc:Choice>
+    <mc:Fallback>
+      <p:transition spd="slow">
+        <p:blinds dir="vert"/>
+      </p:transition>
+    </mc:Fallback>
+  </mc:AlternateContent>
 </p:sld>
 </file>
 
-<file path=ppt/slides/slide13.xml><?xml version="1.0" encoding="utf-8"?>
+<file path=ppt/slides/slide14.xml><?xml version="1.0" encoding="utf-8"?>
 <p:sld xmlns:a="http://schemas.openxmlformats.org/drawingml/2006/main" xmlns:r="http://schemas.openxmlformats.org/officeDocument/2006/relationships" xmlns:p="http://schemas.openxmlformats.org/presentationml/2006/main">
   <p:cSld>
     <p:spTree>
@@ -8677,6 +9544,18 @@
   <p:clrMapOvr>
     <a:masterClrMapping/>
   </p:clrMapOvr>
+  <mc:AlternateContent xmlns:mc="http://schemas.openxmlformats.org/markup-compatibility/2006">
+    <mc:Choice xmlns:p15="http://schemas.microsoft.com/office/powerpoint/2012/main" Requires="p15">
+      <p:transition xmlns:p14="http://schemas.microsoft.com/office/powerpoint/2010/main" spd="slow" p14:dur="1250">
+        <p15:prstTrans prst="peelOff"/>
+      </p:transition>
+    </mc:Choice>
+    <mc:Fallback>
+      <p:transition spd="slow">
+        <p:fade/>
+      </p:transition>
+    </mc:Fallback>
+  </mc:AlternateContent>
 </p:sld>
 </file>
 
@@ -8702,7 +9581,7 @@
           <p:cNvPr id="2" name="Título 1">
             <a:extLst>
               <a:ext uri="{FF2B5EF4-FFF2-40B4-BE49-F238E27FC236}">
-                <a16:creationId xmlns:a16="http://schemas.microsoft.com/office/drawing/2014/main" id="{22C8B87F-7704-4D91-086C-AFF2F7CCB367}"/>
+                <a16:creationId xmlns:a16="http://schemas.microsoft.com/office/drawing/2014/main" id="{8EBE6714-41D5-990D-C32E-DD99BC1FEB48}"/>
               </a:ext>
             </a:extLst>
           </p:cNvPr>
@@ -8726,7 +9605,7 @@
                 </a:solidFill>
                 <a:latin typeface="Arial"/>
               </a:rPr>
-              <a:t>El problema no es la movilidad; es la falta de confianza</a:t>
+              <a:t>TUCANGO | PROYECTO</a:t>
             </a:r>
           </a:p>
         </p:txBody>
@@ -8736,7 +9615,7 @@
           <p:cNvPr id="3" name="Marcador de número de diapositiva 2">
             <a:extLst>
               <a:ext uri="{FF2B5EF4-FFF2-40B4-BE49-F238E27FC236}">
-                <a16:creationId xmlns:a16="http://schemas.microsoft.com/office/drawing/2014/main" id="{4B22C4F8-0926-9EB5-227B-31BF71FBB64E}"/>
+                <a16:creationId xmlns:a16="http://schemas.microsoft.com/office/drawing/2014/main" id="{1D2DDE2C-7753-C136-8F93-91455CCE4CFC}"/>
               </a:ext>
             </a:extLst>
           </p:cNvPr>
@@ -8760,7 +9639,7 @@
                 </a:solidFill>
                 <a:latin typeface="Arial"/>
               </a:rPr>
-              <a:t>2</a:t>
+              <a:t>1</a:t>
             </a:r>
           </a:p>
         </p:txBody>
@@ -8773,8 +9652,8 @@
         </p:nvSpPr>
         <p:spPr>
           <a:xfrm>
-            <a:off x="502920" y="1261872"/>
-            <a:ext cx="10744200" cy="603504"/>
+            <a:off x="594360" y="1353312"/>
+            <a:ext cx="6949440" cy="256032"/>
           </a:xfrm>
           <a:prstGeom prst="rect">
             <a:avLst/>
@@ -8791,13 +9670,13 @@
               </a:lnSpc>
             </a:pPr>
             <a:r>
-              <a:rPr sz="2100" b="1" i="0">
-                <a:solidFill>
-                  <a:srgbClr val="182E26"/>
-                </a:solidFill>
-                <a:latin typeface="Arial"/>
-              </a:rPr>
-              <a:t>El mototaxi es una opción principal para la comunidad estudiantil, pero opera sin controles ni garantías verificables.</a:t>
+              <a:rPr sz="1400" b="1" i="0">
+                <a:solidFill>
+                  <a:srgbClr val="0B7238"/>
+                </a:solidFill>
+                <a:latin typeface="Arial"/>
+              </a:rPr>
+              <a:t>INGENIERÍA DE SISTEMAS · UNIVERSIDAD DE LA AMAZONIA</a:t>
             </a:r>
           </a:p>
         </p:txBody>
@@ -8810,13 +9689,13 @@
         </p:nvCxnSpPr>
         <p:spPr>
           <a:xfrm>
-            <a:off x="4709160" y="2029968"/>
-            <a:ext cx="0" cy="3520440"/>
+            <a:off x="603504" y="1810512"/>
+            <a:ext cx="0" cy="2423160"/>
           </a:xfrm>
           <a:prstGeom prst="line">
             <a:avLst/>
           </a:prstGeom>
-          <a:ln w="38100">
+          <a:ln w="63500">
             <a:solidFill>
               <a:srgbClr val="E6B820"/>
             </a:solidFill>
@@ -8845,6 +9724,616 @@
         </p:nvSpPr>
         <p:spPr>
           <a:xfrm>
+            <a:off x="868680" y="1755648"/>
+            <a:ext cx="6766560" cy="1417320"/>
+          </a:xfrm>
+          <a:prstGeom prst="rect">
+            <a:avLst/>
+          </a:prstGeom>
+          <a:noFill/>
+        </p:spPr>
+        <p:txBody>
+          <a:bodyPr wrap="square" lIns="27432" tIns="27432" rIns="27432" bIns="27432" anchor="t"/>
+          <a:lstStyle/>
+          <a:p>
+            <a:pPr algn="l">
+              <a:lnSpc>
+                <a:spcPct val="100000"/>
+              </a:lnSpc>
+            </a:pPr>
+            <a:r>
+              <a:rPr sz="3700" b="1" i="0" dirty="0" err="1">
+                <a:solidFill>
+                  <a:srgbClr val="182E26"/>
+                </a:solidFill>
+                <a:latin typeface="Arial"/>
+              </a:rPr>
+              <a:t>Movilidad</a:t>
+            </a:r>
+            <a:r>
+              <a:rPr sz="3700" b="1" i="0" dirty="0">
+                <a:solidFill>
+                  <a:srgbClr val="182E26"/>
+                </a:solidFill>
+                <a:latin typeface="Arial"/>
+              </a:rPr>
+              <a:t> </a:t>
+            </a:r>
+            <a:r>
+              <a:rPr sz="3700" b="1" i="0" dirty="0" err="1">
+                <a:solidFill>
+                  <a:srgbClr val="182E26"/>
+                </a:solidFill>
+                <a:latin typeface="Arial"/>
+              </a:rPr>
+              <a:t>estudiantil</a:t>
+            </a:r>
+            <a:br>
+              <a:rPr dirty="0"/>
+            </a:br>
+            <a:r>
+              <a:rPr sz="3700" b="1" i="0" dirty="0" err="1">
+                <a:solidFill>
+                  <a:srgbClr val="182E26"/>
+                </a:solidFill>
+                <a:latin typeface="Arial"/>
+              </a:rPr>
+              <a:t>segura</a:t>
+            </a:r>
+            <a:r>
+              <a:rPr sz="3700" b="1" i="0" dirty="0">
+                <a:solidFill>
+                  <a:srgbClr val="182E26"/>
+                </a:solidFill>
+                <a:latin typeface="Arial"/>
+              </a:rPr>
+              <a:t> </a:t>
+            </a:r>
+            <a:r>
+              <a:rPr lang="en-US" sz="3700" b="1" dirty="0">
+                <a:solidFill>
+                  <a:srgbClr val="182E26"/>
+                </a:solidFill>
+              </a:rPr>
+              <a:t>y </a:t>
+            </a:r>
+            <a:r>
+              <a:rPr lang="en-US" sz="3700" b="1" dirty="0" err="1">
+                <a:solidFill>
+                  <a:srgbClr val="182E26"/>
+                </a:solidFill>
+              </a:rPr>
+              <a:t>eficaz</a:t>
+            </a:r>
+            <a:r>
+              <a:rPr lang="en-US" sz="3700" b="1" dirty="0">
+                <a:solidFill>
+                  <a:srgbClr val="182E26"/>
+                </a:solidFill>
+              </a:rPr>
+              <a:t> </a:t>
+            </a:r>
+            <a:endParaRPr sz="3700" b="1" i="0" dirty="0">
+              <a:solidFill>
+                <a:srgbClr val="182E26"/>
+              </a:solidFill>
+              <a:latin typeface="Arial"/>
+            </a:endParaRPr>
+          </a:p>
+        </p:txBody>
+      </p:sp>
+      <p:sp>
+        <p:nvSpPr>
+          <p:cNvPr id="7" name="TextBox 6"/>
+          <p:cNvSpPr txBox="1"/>
+          <p:nvPr/>
+        </p:nvSpPr>
+        <p:spPr>
+          <a:xfrm>
+            <a:off x="877824" y="3310128"/>
+            <a:ext cx="6400800" cy="713232"/>
+          </a:xfrm>
+          <a:prstGeom prst="rect">
+            <a:avLst/>
+          </a:prstGeom>
+          <a:noFill/>
+        </p:spPr>
+        <p:txBody>
+          <a:bodyPr wrap="square" lIns="27432" tIns="27432" rIns="27432" bIns="27432" anchor="t"/>
+          <a:lstStyle/>
+          <a:p>
+            <a:pPr algn="l">
+              <a:lnSpc>
+                <a:spcPct val="100000"/>
+              </a:lnSpc>
+            </a:pPr>
+            <a:r>
+              <a:rPr sz="2100" b="0" i="0">
+                <a:solidFill>
+                  <a:srgbClr val="5F6B65"/>
+                </a:solidFill>
+                <a:latin typeface="Arial"/>
+              </a:rPr>
+              <a:t>Sistema de confianza y trazabilidad para transporte en motocicleta</a:t>
+            </a:r>
+          </a:p>
+        </p:txBody>
+      </p:sp>
+      <p:sp>
+        <p:nvSpPr>
+          <p:cNvPr id="8" name="TextBox 7"/>
+          <p:cNvSpPr txBox="1"/>
+          <p:nvPr/>
+        </p:nvSpPr>
+        <p:spPr>
+          <a:xfrm>
+            <a:off x="8407400" y="1107440"/>
+            <a:ext cx="2834640" cy="320040"/>
+          </a:xfrm>
+          <a:prstGeom prst="rect">
+            <a:avLst/>
+          </a:prstGeom>
+          <a:noFill/>
+        </p:spPr>
+        <p:txBody>
+          <a:bodyPr wrap="square" lIns="27432" tIns="27432" rIns="27432" bIns="27432" anchor="t"/>
+          <a:lstStyle/>
+          <a:p>
+            <a:pPr algn="l">
+              <a:lnSpc>
+                <a:spcPct val="100000"/>
+              </a:lnSpc>
+            </a:pPr>
+            <a:r>
+              <a:rPr sz="1700" b="1" i="0">
+                <a:solidFill>
+                  <a:srgbClr val="0B7238"/>
+                </a:solidFill>
+                <a:latin typeface="Arial"/>
+              </a:rPr>
+              <a:t>VERIFICACIÓN</a:t>
+            </a:r>
+          </a:p>
+        </p:txBody>
+      </p:sp>
+      <p:cxnSp>
+        <p:nvCxnSpPr>
+          <p:cNvPr id="9" name="Connector 8"/>
+          <p:cNvCxnSpPr/>
+          <p:nvPr/>
+        </p:nvCxnSpPr>
+        <p:spPr>
+          <a:xfrm>
+            <a:off x="8425688" y="1537208"/>
+            <a:ext cx="2423160" cy="0"/>
+          </a:xfrm>
+          <a:prstGeom prst="line">
+            <a:avLst/>
+          </a:prstGeom>
+          <a:ln w="25400">
+            <a:solidFill>
+              <a:srgbClr val="E6B820"/>
+            </a:solidFill>
+          </a:ln>
+        </p:spPr>
+        <p:style>
+          <a:lnRef idx="2">
+            <a:schemeClr val="accent1"/>
+          </a:lnRef>
+          <a:fillRef idx="0">
+            <a:schemeClr val="accent1"/>
+          </a:fillRef>
+          <a:effectRef idx="1">
+            <a:schemeClr val="accent1"/>
+          </a:effectRef>
+          <a:fontRef idx="minor">
+            <a:schemeClr val="tx1"/>
+          </a:fontRef>
+        </p:style>
+      </p:cxnSp>
+      <p:sp>
+        <p:nvSpPr>
+          <p:cNvPr id="10" name="TextBox 9"/>
+          <p:cNvSpPr txBox="1"/>
+          <p:nvPr/>
+        </p:nvSpPr>
+        <p:spPr>
+          <a:xfrm>
+            <a:off x="8407400" y="1930400"/>
+            <a:ext cx="2834640" cy="320040"/>
+          </a:xfrm>
+          <a:prstGeom prst="rect">
+            <a:avLst/>
+          </a:prstGeom>
+          <a:noFill/>
+        </p:spPr>
+        <p:txBody>
+          <a:bodyPr wrap="square" lIns="27432" tIns="27432" rIns="27432" bIns="27432" anchor="t"/>
+          <a:lstStyle/>
+          <a:p>
+            <a:pPr algn="l">
+              <a:lnSpc>
+                <a:spcPct val="100000"/>
+              </a:lnSpc>
+            </a:pPr>
+            <a:r>
+              <a:rPr sz="1700" b="1" i="0">
+                <a:solidFill>
+                  <a:srgbClr val="0B7238"/>
+                </a:solidFill>
+                <a:latin typeface="Arial"/>
+              </a:rPr>
+              <a:t>TRAZABILIDAD</a:t>
+            </a:r>
+          </a:p>
+        </p:txBody>
+      </p:sp>
+      <p:cxnSp>
+        <p:nvCxnSpPr>
+          <p:cNvPr id="11" name="Connector 10"/>
+          <p:cNvCxnSpPr/>
+          <p:nvPr/>
+        </p:nvCxnSpPr>
+        <p:spPr>
+          <a:xfrm>
+            <a:off x="8425688" y="2360168"/>
+            <a:ext cx="2423160" cy="0"/>
+          </a:xfrm>
+          <a:prstGeom prst="line">
+            <a:avLst/>
+          </a:prstGeom>
+          <a:ln w="25400">
+            <a:solidFill>
+              <a:srgbClr val="E6B820"/>
+            </a:solidFill>
+          </a:ln>
+        </p:spPr>
+        <p:style>
+          <a:lnRef idx="2">
+            <a:schemeClr val="accent1"/>
+          </a:lnRef>
+          <a:fillRef idx="0">
+            <a:schemeClr val="accent1"/>
+          </a:fillRef>
+          <a:effectRef idx="1">
+            <a:schemeClr val="accent1"/>
+          </a:effectRef>
+          <a:fontRef idx="minor">
+            <a:schemeClr val="tx1"/>
+          </a:fontRef>
+        </p:style>
+      </p:cxnSp>
+      <p:sp>
+        <p:nvSpPr>
+          <p:cNvPr id="12" name="TextBox 11"/>
+          <p:cNvSpPr txBox="1"/>
+          <p:nvPr/>
+        </p:nvSpPr>
+        <p:spPr>
+          <a:xfrm>
+            <a:off x="8407400" y="2753360"/>
+            <a:ext cx="2834640" cy="320040"/>
+          </a:xfrm>
+          <a:prstGeom prst="rect">
+            <a:avLst/>
+          </a:prstGeom>
+          <a:noFill/>
+        </p:spPr>
+        <p:txBody>
+          <a:bodyPr wrap="square" lIns="27432" tIns="27432" rIns="27432" bIns="27432" anchor="t"/>
+          <a:lstStyle/>
+          <a:p>
+            <a:pPr algn="l">
+              <a:lnSpc>
+                <a:spcPct val="100000"/>
+              </a:lnSpc>
+            </a:pPr>
+            <a:r>
+              <a:rPr sz="1700" b="1" i="0">
+                <a:solidFill>
+                  <a:srgbClr val="0B7238"/>
+                </a:solidFill>
+                <a:latin typeface="Arial"/>
+              </a:rPr>
+              <a:t>REPUTACIÓN</a:t>
+            </a:r>
+          </a:p>
+        </p:txBody>
+      </p:sp>
+      <p:sp>
+        <p:nvSpPr>
+          <p:cNvPr id="13" name="TextBox 12"/>
+          <p:cNvSpPr txBox="1"/>
+          <p:nvPr/>
+        </p:nvSpPr>
+        <p:spPr>
+          <a:xfrm>
+            <a:off x="868680" y="5010912"/>
+            <a:ext cx="9875520" cy="411480"/>
+          </a:xfrm>
+          <a:prstGeom prst="rect">
+            <a:avLst/>
+          </a:prstGeom>
+          <a:noFill/>
+        </p:spPr>
+        <p:txBody>
+          <a:bodyPr wrap="square" lIns="27432" tIns="27432" rIns="27432" bIns="27432" anchor="t"/>
+          <a:lstStyle/>
+          <a:p>
+            <a:pPr algn="l">
+              <a:lnSpc>
+                <a:spcPct val="100000"/>
+              </a:lnSpc>
+            </a:pPr>
+            <a:r>
+              <a:rPr sz="1400" b="0" i="0">
+                <a:solidFill>
+                  <a:srgbClr val="182E26"/>
+                </a:solidFill>
+                <a:latin typeface="Arial"/>
+              </a:rPr>
+              <a:t>Equipo: Jhonatan A. Saavedra · Gian M. Castañeda · Andrés D. Pinilla · Juan G. Ferrer</a:t>
+            </a:r>
+          </a:p>
+        </p:txBody>
+      </p:sp>
+      <p:sp>
+        <p:nvSpPr>
+          <p:cNvPr id="14" name="TextBox 13"/>
+          <p:cNvSpPr txBox="1"/>
+          <p:nvPr/>
+        </p:nvSpPr>
+        <p:spPr>
+          <a:xfrm>
+            <a:off x="868680" y="5577840"/>
+            <a:ext cx="4937760" cy="320040"/>
+          </a:xfrm>
+          <a:prstGeom prst="rect">
+            <a:avLst/>
+          </a:prstGeom>
+          <a:noFill/>
+        </p:spPr>
+        <p:txBody>
+          <a:bodyPr wrap="square" lIns="27432" tIns="27432" rIns="27432" bIns="27432" anchor="t"/>
+          <a:lstStyle/>
+          <a:p>
+            <a:pPr algn="l">
+              <a:lnSpc>
+                <a:spcPct val="100000"/>
+              </a:lnSpc>
+            </a:pPr>
+            <a:r>
+              <a:rPr sz="1400" b="1" i="0">
+                <a:solidFill>
+                  <a:srgbClr val="0B7238"/>
+                </a:solidFill>
+                <a:latin typeface="Arial"/>
+              </a:rPr>
+              <a:t>github.com/Stellel-One/TucanGo</a:t>
+            </a:r>
+          </a:p>
+        </p:txBody>
+      </p:sp>
+      <p:pic>
+        <p:nvPicPr>
+          <p:cNvPr id="15" name="Picture 14">
+            <a:extLst>
+              <a:ext uri="{FF2B5EF4-FFF2-40B4-BE49-F238E27FC236}">
+                <a16:creationId xmlns:a16="http://schemas.microsoft.com/office/drawing/2014/main" id="{2BFB7696-0BC7-64AE-4F83-6FBBEE47521E}"/>
+              </a:ext>
+            </a:extLst>
+          </p:cNvPr>
+          <p:cNvPicPr>
+            <a:picLocks noChangeAspect="1"/>
+          </p:cNvPicPr>
+          <p:nvPr/>
+        </p:nvPicPr>
+        <p:blipFill>
+          <a:blip r:embed="rId2"/>
+          <a:stretch>
+            <a:fillRect/>
+          </a:stretch>
+        </p:blipFill>
+        <p:spPr>
+          <a:xfrm>
+            <a:off x="8366760" y="3200400"/>
+            <a:ext cx="2834640" cy="2702560"/>
+          </a:xfrm>
+          <a:prstGeom prst="rect">
+            <a:avLst/>
+          </a:prstGeom>
+        </p:spPr>
+      </p:pic>
+    </p:spTree>
+    <p:extLst>
+      <p:ext uri="{BB962C8B-B14F-4D97-AF65-F5344CB8AC3E}">
+        <p14:creationId xmlns:p14="http://schemas.microsoft.com/office/powerpoint/2010/main" val="4255261934"/>
+      </p:ext>
+    </p:extLst>
+  </p:cSld>
+  <p:clrMapOvr>
+    <a:masterClrMapping/>
+  </p:clrMapOvr>
+  <mc:AlternateContent xmlns:mc="http://schemas.openxmlformats.org/markup-compatibility/2006">
+    <mc:Choice xmlns:p14="http://schemas.microsoft.com/office/powerpoint/2010/main" Requires="p14">
+      <p:transition spd="slow" p14:dur="1600">
+        <p14:prism isContent="1" isInverted="1"/>
+      </p:transition>
+    </mc:Choice>
+    <mc:Fallback>
+      <p:transition spd="slow">
+        <p:fade/>
+      </p:transition>
+    </mc:Fallback>
+  </mc:AlternateContent>
+</p:sld>
+</file>
+
+<file path=ppt/slides/slide3.xml><?xml version="1.0" encoding="utf-8"?>
+<p:sld xmlns:a="http://schemas.openxmlformats.org/drawingml/2006/main" xmlns:r="http://schemas.openxmlformats.org/officeDocument/2006/relationships" xmlns:p="http://schemas.openxmlformats.org/presentationml/2006/main">
+  <p:cSld>
+    <p:spTree>
+      <p:nvGrpSpPr>
+        <p:cNvPr id="1" name=""/>
+        <p:cNvGrpSpPr/>
+        <p:nvPr/>
+      </p:nvGrpSpPr>
+      <p:grpSpPr>
+        <a:xfrm>
+          <a:off x="0" y="0"/>
+          <a:ext cx="0" cy="0"/>
+          <a:chOff x="0" y="0"/>
+          <a:chExt cx="0" cy="0"/>
+        </a:xfrm>
+      </p:grpSpPr>
+      <p:sp>
+        <p:nvSpPr>
+          <p:cNvPr id="2" name="Título 1">
+            <a:extLst>
+              <a:ext uri="{FF2B5EF4-FFF2-40B4-BE49-F238E27FC236}">
+                <a16:creationId xmlns:a16="http://schemas.microsoft.com/office/drawing/2014/main" id="{22C8B87F-7704-4D91-086C-AFF2F7CCB367}"/>
+              </a:ext>
+            </a:extLst>
+          </p:cNvPr>
+          <p:cNvSpPr>
+            <a:spLocks noGrp="1"/>
+          </p:cNvSpPr>
+          <p:nvPr>
+            <p:ph type="title"/>
+          </p:nvPr>
+        </p:nvSpPr>
+        <p:spPr/>
+        <p:txBody>
+          <a:bodyPr wrap="square"/>
+          <a:lstStyle/>
+          <a:p>
+            <a:pPr algn="l"/>
+            <a:r>
+              <a:rPr lang="en-US" sz="3000" b="1">
+                <a:solidFill>
+                  <a:srgbClr val="0B7238"/>
+                </a:solidFill>
+                <a:latin typeface="Arial"/>
+              </a:rPr>
+              <a:t>El problema no es la movilidad; es la falta de confianza</a:t>
+            </a:r>
+          </a:p>
+        </p:txBody>
+      </p:sp>
+      <p:sp>
+        <p:nvSpPr>
+          <p:cNvPr id="3" name="Marcador de número de diapositiva 2">
+            <a:extLst>
+              <a:ext uri="{FF2B5EF4-FFF2-40B4-BE49-F238E27FC236}">
+                <a16:creationId xmlns:a16="http://schemas.microsoft.com/office/drawing/2014/main" id="{4B22C4F8-0926-9EB5-227B-31BF71FBB64E}"/>
+              </a:ext>
+            </a:extLst>
+          </p:cNvPr>
+          <p:cNvSpPr>
+            <a:spLocks noGrp="1"/>
+          </p:cNvSpPr>
+          <p:nvPr>
+            <p:ph type="sldNum" sz="quarter" idx="12"/>
+          </p:nvPr>
+        </p:nvSpPr>
+        <p:spPr/>
+        <p:txBody>
+          <a:bodyPr/>
+          <a:lstStyle/>
+          <a:p>
+            <a:pPr algn="r"/>
+            <a:r>
+              <a:rPr lang="en-US" sz="1100" b="1">
+                <a:solidFill>
+                  <a:srgbClr val="5F6B65"/>
+                </a:solidFill>
+                <a:latin typeface="Arial"/>
+              </a:rPr>
+              <a:t>2</a:t>
+            </a:r>
+          </a:p>
+        </p:txBody>
+      </p:sp>
+      <p:sp>
+        <p:nvSpPr>
+          <p:cNvPr id="4" name="TextBox 3"/>
+          <p:cNvSpPr txBox="1"/>
+          <p:nvPr/>
+        </p:nvSpPr>
+        <p:spPr>
+          <a:xfrm>
+            <a:off x="502920" y="1261872"/>
+            <a:ext cx="10744200" cy="603504"/>
+          </a:xfrm>
+          <a:prstGeom prst="rect">
+            <a:avLst/>
+          </a:prstGeom>
+          <a:noFill/>
+        </p:spPr>
+        <p:txBody>
+          <a:bodyPr wrap="square" lIns="27432" tIns="27432" rIns="27432" bIns="27432" anchor="t"/>
+          <a:lstStyle/>
+          <a:p>
+            <a:pPr algn="l">
+              <a:lnSpc>
+                <a:spcPct val="100000"/>
+              </a:lnSpc>
+            </a:pPr>
+            <a:r>
+              <a:rPr sz="2100" b="1" i="0">
+                <a:solidFill>
+                  <a:srgbClr val="182E26"/>
+                </a:solidFill>
+                <a:latin typeface="Arial"/>
+              </a:rPr>
+              <a:t>El mototaxi es una opción principal para la comunidad estudiantil, pero opera sin controles ni garantías verificables.</a:t>
+            </a:r>
+          </a:p>
+        </p:txBody>
+      </p:sp>
+      <p:cxnSp>
+        <p:nvCxnSpPr>
+          <p:cNvPr id="5" name="Connector 4"/>
+          <p:cNvCxnSpPr/>
+          <p:nvPr/>
+        </p:nvCxnSpPr>
+        <p:spPr>
+          <a:xfrm>
+            <a:off x="4709160" y="2029968"/>
+            <a:ext cx="0" cy="3520440"/>
+          </a:xfrm>
+          <a:prstGeom prst="line">
+            <a:avLst/>
+          </a:prstGeom>
+          <a:ln w="38100">
+            <a:solidFill>
+              <a:srgbClr val="E6B820"/>
+            </a:solidFill>
+          </a:ln>
+        </p:spPr>
+        <p:style>
+          <a:lnRef idx="2">
+            <a:schemeClr val="accent1"/>
+          </a:lnRef>
+          <a:fillRef idx="0">
+            <a:schemeClr val="accent1"/>
+          </a:fillRef>
+          <a:effectRef idx="1">
+            <a:schemeClr val="accent1"/>
+          </a:effectRef>
+          <a:fontRef idx="minor">
+            <a:schemeClr val="tx1"/>
+          </a:fontRef>
+        </p:style>
+      </p:cxnSp>
+      <p:sp>
+        <p:nvSpPr>
+          <p:cNvPr id="6" name="TextBox 5"/>
+          <p:cNvSpPr txBox="1"/>
+          <p:nvPr/>
+        </p:nvSpPr>
+        <p:spPr>
+          <a:xfrm>
             <a:off x="594360" y="2148840"/>
             <a:ext cx="3611880" cy="749808"/>
           </a:xfrm>
@@ -9321,10 +10810,22 @@
   <p:clrMapOvr>
     <a:masterClrMapping/>
   </p:clrMapOvr>
+  <mc:AlternateContent xmlns:mc="http://schemas.openxmlformats.org/markup-compatibility/2006">
+    <mc:Choice xmlns:p14="http://schemas.microsoft.com/office/powerpoint/2010/main" Requires="p14">
+      <p:transition p14:dur="100">
+        <p:cut/>
+      </p:transition>
+    </mc:Choice>
+    <mc:Fallback>
+      <p:transition>
+        <p:cut/>
+      </p:transition>
+    </mc:Fallback>
+  </mc:AlternateContent>
 </p:sld>
 </file>
 
-<file path=ppt/slides/slide3.xml><?xml version="1.0" encoding="utf-8"?>
+<file path=ppt/slides/slide4.xml><?xml version="1.0" encoding="utf-8"?>
 <p:sld xmlns:a="http://schemas.openxmlformats.org/drawingml/2006/main" xmlns:r="http://schemas.openxmlformats.org/officeDocument/2006/relationships" xmlns:p="http://schemas.openxmlformats.org/presentationml/2006/main">
   <p:cSld>
     <p:spTree>
@@ -9468,573 +10969,18 @@
   <p:clrMapOvr>
     <a:masterClrMapping/>
   </p:clrMapOvr>
-</p:sld>
-</file>
-
-<file path=ppt/slides/slide4.xml><?xml version="1.0" encoding="utf-8"?>
-<p:sld xmlns:a="http://schemas.openxmlformats.org/drawingml/2006/main" xmlns:r="http://schemas.openxmlformats.org/officeDocument/2006/relationships" xmlns:p="http://schemas.openxmlformats.org/presentationml/2006/main">
-  <p:cSld>
-    <p:spTree>
-      <p:nvGrpSpPr>
-        <p:cNvPr id="1" name=""/>
-        <p:cNvGrpSpPr/>
-        <p:nvPr/>
-      </p:nvGrpSpPr>
-      <p:grpSpPr>
-        <a:xfrm>
-          <a:off x="0" y="0"/>
-          <a:ext cx="0" cy="0"/>
-          <a:chOff x="0" y="0"/>
-          <a:chExt cx="0" cy="0"/>
-        </a:xfrm>
-      </p:grpSpPr>
-      <p:sp>
-        <p:nvSpPr>
-          <p:cNvPr id="2" name="Título 1">
-            <a:extLst>
-              <a:ext uri="{FF2B5EF4-FFF2-40B4-BE49-F238E27FC236}">
-                <a16:creationId xmlns:a16="http://schemas.microsoft.com/office/drawing/2014/main" id="{22C8B87F-7704-4D91-086C-AFF2F7CCB367}"/>
-              </a:ext>
-            </a:extLst>
-          </p:cNvPr>
-          <p:cNvSpPr>
-            <a:spLocks noGrp="1"/>
-          </p:cNvSpPr>
-          <p:nvPr>
-            <p:ph type="title"/>
-          </p:nvPr>
-        </p:nvSpPr>
-        <p:spPr/>
-        <p:txBody>
-          <a:bodyPr wrap="square"/>
-          <a:lstStyle/>
-          <a:p>
-            <a:pPr algn="l"/>
-            <a:r>
-              <a:rPr sz="3000" b="1">
-                <a:solidFill>
-                  <a:srgbClr val="0B7238"/>
-                </a:solidFill>
-                <a:latin typeface="Arial"/>
-              </a:rPr>
-              <a:t>Un sistema que formaliza la relación estudiante–motorista</a:t>
-            </a:r>
-          </a:p>
-        </p:txBody>
-      </p:sp>
-      <p:sp>
-        <p:nvSpPr>
-          <p:cNvPr id="3" name="Marcador de número de diapositiva 2">
-            <a:extLst>
-              <a:ext uri="{FF2B5EF4-FFF2-40B4-BE49-F238E27FC236}">
-                <a16:creationId xmlns:a16="http://schemas.microsoft.com/office/drawing/2014/main" id="{4B22C4F8-0926-9EB5-227B-31BF71FBB64E}"/>
-              </a:ext>
-            </a:extLst>
-          </p:cNvPr>
-          <p:cNvSpPr>
-            <a:spLocks noGrp="1"/>
-          </p:cNvSpPr>
-          <p:nvPr>
-            <p:ph type="sldNum" sz="quarter" idx="12"/>
-          </p:nvPr>
-        </p:nvSpPr>
-        <p:spPr/>
-        <p:txBody>
-          <a:bodyPr/>
-          <a:lstStyle/>
-          <a:p>
-            <a:pPr algn="r"/>
-            <a:r>
-              <a:rPr sz="1100" b="1">
-                <a:solidFill>
-                  <a:srgbClr val="5F6B65"/>
-                </a:solidFill>
-                <a:latin typeface="Arial"/>
-              </a:rPr>
-              <a:t>3</a:t>
-            </a:r>
-          </a:p>
-        </p:txBody>
-      </p:sp>
-      <p:sp>
-        <p:nvSpPr>
-          <p:cNvPr id="4" name="TextBox 3"/>
-          <p:cNvSpPr txBox="1"/>
-          <p:nvPr/>
-        </p:nvSpPr>
-        <p:spPr>
-          <a:xfrm>
-            <a:off x="548640" y="1344168"/>
-            <a:ext cx="4297680" cy="274320"/>
-          </a:xfrm>
-          <a:prstGeom prst="rect">
-            <a:avLst/>
-          </a:prstGeom>
-          <a:noFill/>
-        </p:spPr>
-        <p:txBody>
-          <a:bodyPr wrap="square" lIns="27432" tIns="27432" rIns="27432" bIns="27432" anchor="t"/>
-          <a:lstStyle/>
-          <a:p>
-            <a:pPr algn="l">
-              <a:lnSpc>
-                <a:spcPct val="100000"/>
-              </a:lnSpc>
-            </a:pPr>
-            <a:r>
-              <a:rPr sz="1400" b="1" i="0">
-                <a:solidFill>
-                  <a:srgbClr val="0B7238"/>
-                </a:solidFill>
-                <a:latin typeface="Arial"/>
-              </a:rPr>
-              <a:t>OBJETIVO GENERAL</a:t>
-            </a:r>
-          </a:p>
-        </p:txBody>
-      </p:sp>
-      <p:sp>
-        <p:nvSpPr>
-          <p:cNvPr id="5" name="TextBox 4"/>
-          <p:cNvSpPr txBox="1"/>
-          <p:nvPr/>
-        </p:nvSpPr>
-        <p:spPr>
-          <a:xfrm>
-            <a:off x="548640" y="1755648"/>
-            <a:ext cx="4069080" cy="1920240"/>
-          </a:xfrm>
-          <a:prstGeom prst="rect">
-            <a:avLst/>
-          </a:prstGeom>
-          <a:noFill/>
-        </p:spPr>
-        <p:txBody>
-          <a:bodyPr wrap="square" lIns="27432" tIns="27432" rIns="27432" bIns="27432" anchor="t"/>
-          <a:lstStyle/>
-          <a:p>
-            <a:r>
-              <a:rPr sz="2400" b="1">
-                <a:solidFill>
-                  <a:srgbClr val="182E26"/>
-                </a:solidFill>
-                <a:latin typeface="Arial"/>
-              </a:rPr>
-              <a:t>Diseñar un sistema de confianza y trazabilidad para formalizar la relación estudiante–motorista dentro del campus.</a:t>
-            </a:r>
-          </a:p>
-        </p:txBody>
-      </p:sp>
-      <p:sp>
-        <p:nvSpPr>
-          <p:cNvPr id="6" name="TextBox 5"/>
-          <p:cNvSpPr txBox="1"/>
-          <p:nvPr/>
-        </p:nvSpPr>
-        <p:spPr>
-          <a:xfrm>
-            <a:off x="548640" y="3977639"/>
-            <a:ext cx="3886200" cy="932688"/>
-          </a:xfrm>
-          <a:prstGeom prst="rect">
-            <a:avLst/>
-          </a:prstGeom>
-          <a:noFill/>
-        </p:spPr>
-        <p:txBody>
-          <a:bodyPr wrap="square" lIns="27432" tIns="27432" rIns="27432" bIns="27432" anchor="t"/>
-          <a:lstStyle/>
-          <a:p>
-            <a:pPr algn="l">
-              <a:lnSpc>
-                <a:spcPct val="100000"/>
-              </a:lnSpc>
-            </a:pPr>
-            <a:r>
-              <a:rPr sz="1800" b="0" i="0">
-                <a:solidFill>
-                  <a:srgbClr val="5F6B65"/>
-                </a:solidFill>
-                <a:latin typeface="Arial"/>
-              </a:rPr>
-              <a:t>La solución integra identidad, registro de viajes, reputación y pagos justos.</a:t>
-            </a:r>
-          </a:p>
-        </p:txBody>
-      </p:sp>
-      <p:cxnSp>
-        <p:nvCxnSpPr>
-          <p:cNvPr id="7" name="Connector 6"/>
-          <p:cNvCxnSpPr/>
-          <p:nvPr/>
-        </p:nvCxnSpPr>
-        <p:spPr>
-          <a:xfrm>
-            <a:off x="4681728" y="1325880"/>
-            <a:ext cx="0" cy="4343400"/>
-          </a:xfrm>
-          <a:prstGeom prst="line">
-            <a:avLst/>
-          </a:prstGeom>
-          <a:ln w="38100">
-            <a:solidFill>
-              <a:srgbClr val="E6B820"/>
-            </a:solidFill>
-          </a:ln>
-        </p:spPr>
-        <p:style>
-          <a:lnRef idx="2">
-            <a:schemeClr val="accent1"/>
-          </a:lnRef>
-          <a:fillRef idx="0">
-            <a:schemeClr val="accent1"/>
-          </a:fillRef>
-          <a:effectRef idx="1">
-            <a:schemeClr val="accent1"/>
-          </a:effectRef>
-          <a:fontRef idx="minor">
-            <a:schemeClr val="tx1"/>
-          </a:fontRef>
-        </p:style>
-      </p:cxnSp>
-      <p:sp>
-        <p:nvSpPr>
-          <p:cNvPr id="8" name="TextBox 7"/>
-          <p:cNvSpPr txBox="1"/>
-          <p:nvPr/>
-        </p:nvSpPr>
-        <p:spPr>
-          <a:xfrm>
-            <a:off x="5010912" y="1353312"/>
-            <a:ext cx="640080" cy="502920"/>
-          </a:xfrm>
-          <a:prstGeom prst="rect">
-            <a:avLst/>
-          </a:prstGeom>
-          <a:noFill/>
-        </p:spPr>
-        <p:txBody>
-          <a:bodyPr wrap="square" lIns="27432" tIns="27432" rIns="27432" bIns="27432" anchor="t"/>
-          <a:lstStyle/>
-          <a:p>
-            <a:pPr algn="l">
-              <a:lnSpc>
-                <a:spcPct val="100000"/>
-              </a:lnSpc>
-            </a:pPr>
-            <a:r>
-              <a:rPr sz="2700" b="1" i="0">
-                <a:solidFill>
-                  <a:srgbClr val="E6B820"/>
-                </a:solidFill>
-                <a:latin typeface="Arial"/>
-              </a:rPr>
-              <a:t>01</a:t>
-            </a:r>
-          </a:p>
-        </p:txBody>
-      </p:sp>
-      <p:sp>
-        <p:nvSpPr>
-          <p:cNvPr id="9" name="TextBox 8"/>
-          <p:cNvSpPr txBox="1"/>
-          <p:nvPr/>
-        </p:nvSpPr>
-        <p:spPr>
-          <a:xfrm>
-            <a:off x="5715000" y="1371600"/>
-            <a:ext cx="5166360" cy="320040"/>
-          </a:xfrm>
-          <a:prstGeom prst="rect">
-            <a:avLst/>
-          </a:prstGeom>
-          <a:noFill/>
-        </p:spPr>
-        <p:txBody>
-          <a:bodyPr wrap="square" lIns="27432" tIns="27432" rIns="27432" bIns="27432" anchor="t"/>
-          <a:lstStyle/>
-          <a:p>
-            <a:pPr algn="l">
-              <a:lnSpc>
-                <a:spcPct val="100000"/>
-              </a:lnSpc>
-            </a:pPr>
-            <a:r>
-              <a:rPr sz="1800" b="1" i="0">
-                <a:solidFill>
-                  <a:srgbClr val="0B7238"/>
-                </a:solidFill>
-                <a:latin typeface="Arial"/>
-              </a:rPr>
-              <a:t>Verificación de motoristas</a:t>
-            </a:r>
-          </a:p>
-        </p:txBody>
-      </p:sp>
-      <p:sp>
-        <p:nvSpPr>
-          <p:cNvPr id="10" name="TextBox 9"/>
-          <p:cNvSpPr txBox="1"/>
-          <p:nvPr/>
-        </p:nvSpPr>
-        <p:spPr>
-          <a:xfrm>
-            <a:off x="5715000" y="1773936"/>
-            <a:ext cx="4983480" cy="694944"/>
-          </a:xfrm>
-          <a:prstGeom prst="rect">
-            <a:avLst/>
-          </a:prstGeom>
-          <a:noFill/>
-        </p:spPr>
-        <p:txBody>
-          <a:bodyPr wrap="square" lIns="27432" tIns="27432" rIns="27432" bIns="27432" anchor="t"/>
-          <a:lstStyle/>
-          <a:p>
-            <a:pPr algn="l">
-              <a:lnSpc>
-                <a:spcPct val="100000"/>
-              </a:lnSpc>
-            </a:pPr>
-            <a:r>
-              <a:rPr sz="1500" b="0" i="0">
-                <a:solidFill>
-                  <a:srgbClr val="182E26"/>
-                </a:solidFill>
-                <a:latin typeface="Arial"/>
-              </a:rPr>
-              <a:t>Validar identificación, placa y SOAT vigente antes de permitir viajes.</a:t>
-            </a:r>
-          </a:p>
-        </p:txBody>
-      </p:sp>
-      <p:sp>
-        <p:nvSpPr>
-          <p:cNvPr id="11" name="TextBox 10"/>
-          <p:cNvSpPr txBox="1"/>
-          <p:nvPr/>
-        </p:nvSpPr>
-        <p:spPr>
-          <a:xfrm>
-            <a:off x="5010912" y="2816352"/>
-            <a:ext cx="640080" cy="502920"/>
-          </a:xfrm>
-          <a:prstGeom prst="rect">
-            <a:avLst/>
-          </a:prstGeom>
-          <a:noFill/>
-        </p:spPr>
-        <p:txBody>
-          <a:bodyPr wrap="square" lIns="27432" tIns="27432" rIns="27432" bIns="27432" anchor="t"/>
-          <a:lstStyle/>
-          <a:p>
-            <a:pPr algn="l">
-              <a:lnSpc>
-                <a:spcPct val="100000"/>
-              </a:lnSpc>
-            </a:pPr>
-            <a:r>
-              <a:rPr sz="2700" b="1" i="0">
-                <a:solidFill>
-                  <a:srgbClr val="E6B820"/>
-                </a:solidFill>
-                <a:latin typeface="Arial"/>
-              </a:rPr>
-              <a:t>02</a:t>
-            </a:r>
-          </a:p>
-        </p:txBody>
-      </p:sp>
-      <p:sp>
-        <p:nvSpPr>
-          <p:cNvPr id="12" name="TextBox 11"/>
-          <p:cNvSpPr txBox="1"/>
-          <p:nvPr/>
-        </p:nvSpPr>
-        <p:spPr>
-          <a:xfrm>
-            <a:off x="5715000" y="2834640"/>
-            <a:ext cx="5166360" cy="320040"/>
-          </a:xfrm>
-          <a:prstGeom prst="rect">
-            <a:avLst/>
-          </a:prstGeom>
-          <a:noFill/>
-        </p:spPr>
-        <p:txBody>
-          <a:bodyPr wrap="square" lIns="27432" tIns="27432" rIns="27432" bIns="27432" anchor="t"/>
-          <a:lstStyle/>
-          <a:p>
-            <a:pPr algn="l">
-              <a:lnSpc>
-                <a:spcPct val="100000"/>
-              </a:lnSpc>
-            </a:pPr>
-            <a:r>
-              <a:rPr sz="1800" b="1" i="0">
-                <a:solidFill>
-                  <a:srgbClr val="0B7238"/>
-                </a:solidFill>
-                <a:latin typeface="Arial"/>
-              </a:rPr>
-              <a:t>Trazabilidad completa</a:t>
-            </a:r>
-          </a:p>
-        </p:txBody>
-      </p:sp>
-      <p:sp>
-        <p:nvSpPr>
-          <p:cNvPr id="13" name="TextBox 12"/>
-          <p:cNvSpPr txBox="1"/>
-          <p:nvPr/>
-        </p:nvSpPr>
-        <p:spPr>
-          <a:xfrm>
-            <a:off x="5715000" y="3236976"/>
-            <a:ext cx="4983480" cy="694944"/>
-          </a:xfrm>
-          <a:prstGeom prst="rect">
-            <a:avLst/>
-          </a:prstGeom>
-          <a:noFill/>
-        </p:spPr>
-        <p:txBody>
-          <a:bodyPr wrap="square" lIns="27432" tIns="27432" rIns="27432" bIns="27432" anchor="t"/>
-          <a:lstStyle/>
-          <a:p>
-            <a:pPr algn="l">
-              <a:lnSpc>
-                <a:spcPct val="100000"/>
-              </a:lnSpc>
-            </a:pPr>
-            <a:r>
-              <a:rPr sz="1500" b="0" i="0">
-                <a:solidFill>
-                  <a:srgbClr val="182E26"/>
-                </a:solidFill>
-                <a:latin typeface="Arial"/>
-              </a:rPr>
-              <a:t>Registrar origen, destino, hora y confirmación de llegada.</a:t>
-            </a:r>
-          </a:p>
-        </p:txBody>
-      </p:sp>
-      <p:sp>
-        <p:nvSpPr>
-          <p:cNvPr id="14" name="TextBox 13"/>
-          <p:cNvSpPr txBox="1"/>
-          <p:nvPr/>
-        </p:nvSpPr>
-        <p:spPr>
-          <a:xfrm>
-            <a:off x="5010912" y="4279392"/>
-            <a:ext cx="640080" cy="502920"/>
-          </a:xfrm>
-          <a:prstGeom prst="rect">
-            <a:avLst/>
-          </a:prstGeom>
-          <a:noFill/>
-        </p:spPr>
-        <p:txBody>
-          <a:bodyPr wrap="square" lIns="27432" tIns="27432" rIns="27432" bIns="27432" anchor="t"/>
-          <a:lstStyle/>
-          <a:p>
-            <a:pPr algn="l">
-              <a:lnSpc>
-                <a:spcPct val="100000"/>
-              </a:lnSpc>
-            </a:pPr>
-            <a:r>
-              <a:rPr sz="2700" b="1" i="0">
-                <a:solidFill>
-                  <a:srgbClr val="E6B820"/>
-                </a:solidFill>
-                <a:latin typeface="Arial"/>
-              </a:rPr>
-              <a:t>03</a:t>
-            </a:r>
-          </a:p>
-        </p:txBody>
-      </p:sp>
-      <p:sp>
-        <p:nvSpPr>
-          <p:cNvPr id="15" name="TextBox 14"/>
-          <p:cNvSpPr txBox="1"/>
-          <p:nvPr/>
-        </p:nvSpPr>
-        <p:spPr>
-          <a:xfrm>
-            <a:off x="5715000" y="4297679"/>
-            <a:ext cx="5166360" cy="320040"/>
-          </a:xfrm>
-          <a:prstGeom prst="rect">
-            <a:avLst/>
-          </a:prstGeom>
-          <a:noFill/>
-        </p:spPr>
-        <p:txBody>
-          <a:bodyPr wrap="square" lIns="27432" tIns="27432" rIns="27432" bIns="27432" anchor="t"/>
-          <a:lstStyle/>
-          <a:p>
-            <a:pPr algn="l">
-              <a:lnSpc>
-                <a:spcPct val="100000"/>
-              </a:lnSpc>
-            </a:pPr>
-            <a:r>
-              <a:rPr sz="1800" b="1" i="0">
-                <a:solidFill>
-                  <a:srgbClr val="0B7238"/>
-                </a:solidFill>
-                <a:latin typeface="Arial"/>
-              </a:rPr>
-              <a:t>Reputación y seguridad</a:t>
-            </a:r>
-          </a:p>
-        </p:txBody>
-      </p:sp>
-      <p:sp>
-        <p:nvSpPr>
-          <p:cNvPr id="16" name="TextBox 15"/>
-          <p:cNvSpPr txBox="1"/>
-          <p:nvPr/>
-        </p:nvSpPr>
-        <p:spPr>
-          <a:xfrm>
-            <a:off x="5715000" y="4700016"/>
-            <a:ext cx="4983480" cy="694944"/>
-          </a:xfrm>
-          <a:prstGeom prst="rect">
-            <a:avLst/>
-          </a:prstGeom>
-          <a:noFill/>
-        </p:spPr>
-        <p:txBody>
-          <a:bodyPr wrap="square" lIns="27432" tIns="27432" rIns="27432" bIns="27432" anchor="t"/>
-          <a:lstStyle/>
-          <a:p>
-            <a:pPr algn="l">
-              <a:lnSpc>
-                <a:spcPct val="100000"/>
-              </a:lnSpc>
-            </a:pPr>
-            <a:r>
-              <a:rPr sz="1500" b="0" i="0">
-                <a:solidFill>
-                  <a:srgbClr val="182E26"/>
-                </a:solidFill>
-                <a:latin typeface="Arial"/>
-              </a:rPr>
-              <a:t>Calificación de 1 a 5 y comentarios vinculados a cada viaje.</a:t>
-            </a:r>
-          </a:p>
-        </p:txBody>
-      </p:sp>
-    </p:spTree>
-  </p:cSld>
-  <p:clrMapOvr>
-    <a:masterClrMapping/>
-  </p:clrMapOvr>
+  <mc:AlternateContent xmlns:mc="http://schemas.openxmlformats.org/markup-compatibility/2006">
+    <mc:Choice xmlns:p14="http://schemas.microsoft.com/office/powerpoint/2010/main" Requires="p14">
+      <p:transition spd="slow" p14:dur="3400">
+        <p14:reveal/>
+      </p:transition>
+    </mc:Choice>
+    <mc:Fallback>
+      <p:transition spd="slow">
+        <p:fade/>
+      </p:transition>
+    </mc:Fallback>
+  </mc:AlternateContent>
 </p:sld>
 </file>
 
@@ -10084,7 +11030,7 @@
                 </a:solidFill>
                 <a:latin typeface="Arial"/>
               </a:rPr>
-              <a:t>Alcance enfocado en confianza, trazabilidad y pago justo</a:t>
+              <a:t>Un sistema que formaliza la relación estudiante–motorista</a:t>
             </a:r>
           </a:p>
         </p:txBody>
@@ -10118,7 +11064,7 @@
                 </a:solidFill>
                 <a:latin typeface="Arial"/>
               </a:rPr>
-              <a:t>4</a:t>
+              <a:t>3</a:t>
             </a:r>
           </a:p>
         </p:txBody>
@@ -10131,8 +11077,8 @@
         </p:nvSpPr>
         <p:spPr>
           <a:xfrm>
-            <a:off x="566928" y="1325880"/>
-            <a:ext cx="4389120" cy="320040"/>
+            <a:off x="548640" y="1344168"/>
+            <a:ext cx="4297680" cy="274320"/>
           </a:xfrm>
           <a:prstGeom prst="rect">
             <a:avLst/>
@@ -10149,34 +11095,103 @@
               </a:lnSpc>
             </a:pPr>
             <a:r>
-              <a:rPr sz="1800" b="1" i="0">
+              <a:rPr sz="1400" b="1" i="0">
                 <a:solidFill>
                   <a:srgbClr val="0B7238"/>
                 </a:solidFill>
                 <a:latin typeface="Arial"/>
               </a:rPr>
-              <a:t>INCLUYE</a:t>
+              <a:t>OBJETIVO GENERAL</a:t>
+            </a:r>
+          </a:p>
+        </p:txBody>
+      </p:sp>
+      <p:sp>
+        <p:nvSpPr>
+          <p:cNvPr id="5" name="TextBox 4"/>
+          <p:cNvSpPr txBox="1"/>
+          <p:nvPr/>
+        </p:nvSpPr>
+        <p:spPr>
+          <a:xfrm>
+            <a:off x="548640" y="1755648"/>
+            <a:ext cx="4069080" cy="1920240"/>
+          </a:xfrm>
+          <a:prstGeom prst="rect">
+            <a:avLst/>
+          </a:prstGeom>
+          <a:noFill/>
+        </p:spPr>
+        <p:txBody>
+          <a:bodyPr wrap="square" lIns="27432" tIns="27432" rIns="27432" bIns="27432" anchor="t"/>
+          <a:lstStyle/>
+          <a:p>
+            <a:r>
+              <a:rPr sz="2400" b="1">
+                <a:solidFill>
+                  <a:srgbClr val="182E26"/>
+                </a:solidFill>
+                <a:latin typeface="Arial"/>
+              </a:rPr>
+              <a:t>Diseñar un sistema de confianza y trazabilidad para formalizar la relación estudiante–motorista dentro del campus.</a:t>
+            </a:r>
+          </a:p>
+        </p:txBody>
+      </p:sp>
+      <p:sp>
+        <p:nvSpPr>
+          <p:cNvPr id="6" name="TextBox 5"/>
+          <p:cNvSpPr txBox="1"/>
+          <p:nvPr/>
+        </p:nvSpPr>
+        <p:spPr>
+          <a:xfrm>
+            <a:off x="548640" y="3977639"/>
+            <a:ext cx="3886200" cy="932688"/>
+          </a:xfrm>
+          <a:prstGeom prst="rect">
+            <a:avLst/>
+          </a:prstGeom>
+          <a:noFill/>
+        </p:spPr>
+        <p:txBody>
+          <a:bodyPr wrap="square" lIns="27432" tIns="27432" rIns="27432" bIns="27432" anchor="t"/>
+          <a:lstStyle/>
+          <a:p>
+            <a:pPr algn="l">
+              <a:lnSpc>
+                <a:spcPct val="100000"/>
+              </a:lnSpc>
+            </a:pPr>
+            <a:r>
+              <a:rPr sz="1800" b="0" i="0">
+                <a:solidFill>
+                  <a:srgbClr val="5F6B65"/>
+                </a:solidFill>
+                <a:latin typeface="Arial"/>
+              </a:rPr>
+              <a:t>La solución integra identidad, registro de viajes, reputación y pagos justos.</a:t>
             </a:r>
           </a:p>
         </p:txBody>
       </p:sp>
       <p:cxnSp>
         <p:nvCxnSpPr>
-          <p:cNvPr id="5" name="Connector 4"/>
+          <p:cNvPr id="7" name="Connector 6"/>
           <p:cNvCxnSpPr/>
           <p:nvPr/>
         </p:nvCxnSpPr>
         <p:spPr>
           <a:xfrm>
-            <a:off x="566928" y="1746504"/>
-            <a:ext cx="5074920" cy="0"/>
+            <a:off x="4681728" y="1325880"/>
+            <a:ext cx="0" cy="4343400"/>
           </a:xfrm>
           <a:prstGeom prst="line">
             <a:avLst/>
           </a:prstGeom>
-          <a:ln w="25400">
+          <a:ln w="38100">
             <a:solidFill>
-              <a:srgbClr val="0B7238"/>
+              <a:srgbClr val="E6B820"/>
             </a:solidFill>
           </a:ln>
         </p:spPr>
@@ -10197,14 +11212,14 @@
       </p:cxnSp>
       <p:sp>
         <p:nvSpPr>
-          <p:cNvPr id="6" name="TextBox 5"/>
+          <p:cNvPr id="8" name="TextBox 7"/>
           <p:cNvSpPr txBox="1"/>
           <p:nvPr/>
         </p:nvSpPr>
         <p:spPr>
           <a:xfrm>
-            <a:off x="566928" y="1901952"/>
-            <a:ext cx="4983480" cy="3611880"/>
+            <a:off x="5010912" y="1353312"/>
+            <a:ext cx="640080" cy="502920"/>
           </a:xfrm>
           <a:prstGeom prst="rect">
             <a:avLst/>
@@ -10212,141 +11227,472 @@
           <a:noFill/>
         </p:spPr>
         <p:txBody>
-          <a:bodyPr wrap="square" lIns="18288" tIns="18288" rIns="18288" bIns="18288"/>
-          <a:lstStyle/>
-          <a:p>
-            <a:pPr>
+          <a:bodyPr wrap="square" lIns="27432" tIns="27432" rIns="27432" bIns="27432" anchor="t"/>
+          <a:lstStyle/>
+          <a:p>
+            <a:pPr algn="l">
               <a:lnSpc>
                 <a:spcPct val="100000"/>
               </a:lnSpc>
-              <a:spcAft>
-                <a:spcPts val="700"/>
-              </a:spcAft>
             </a:pPr>
             <a:r>
-              <a:rPr sz="1600">
-                <a:solidFill>
-                  <a:srgbClr val="182E26"/>
-                </a:solidFill>
-                <a:latin typeface="Arial"/>
-              </a:rPr>
-              <a:t>• Modelo de dominio con 5 entidades.</a:t>
-            </a:r>
-          </a:p>
-          <a:p>
-            <a:pPr>
+              <a:rPr sz="2700" b="1" i="0">
+                <a:solidFill>
+                  <a:srgbClr val="E6B820"/>
+                </a:solidFill>
+                <a:latin typeface="Arial"/>
+              </a:rPr>
+              <a:t>01</a:t>
+            </a:r>
+          </a:p>
+        </p:txBody>
+      </p:sp>
+      <p:sp>
+        <p:nvSpPr>
+          <p:cNvPr id="9" name="TextBox 8"/>
+          <p:cNvSpPr txBox="1"/>
+          <p:nvPr/>
+        </p:nvSpPr>
+        <p:spPr>
+          <a:xfrm>
+            <a:off x="5715000" y="1371600"/>
+            <a:ext cx="5166360" cy="320040"/>
+          </a:xfrm>
+          <a:prstGeom prst="rect">
+            <a:avLst/>
+          </a:prstGeom>
+          <a:noFill/>
+        </p:spPr>
+        <p:txBody>
+          <a:bodyPr wrap="square" lIns="27432" tIns="27432" rIns="27432" bIns="27432" anchor="t"/>
+          <a:lstStyle/>
+          <a:p>
+            <a:pPr algn="l">
               <a:lnSpc>
                 <a:spcPct val="100000"/>
               </a:lnSpc>
-              <a:spcAft>
-                <a:spcPts val="700"/>
-              </a:spcAft>
             </a:pPr>
             <a:r>
-              <a:rPr sz="1600">
-                <a:solidFill>
-                  <a:srgbClr val="182E26"/>
-                </a:solidFill>
-                <a:latin typeface="Arial"/>
-              </a:rPr>
-              <a:t>• Verificación documental: identificación, placa y SOAT.</a:t>
-            </a:r>
-          </a:p>
-          <a:p>
-            <a:pPr>
+              <a:rPr sz="1800" b="1" i="0">
+                <a:solidFill>
+                  <a:srgbClr val="0B7238"/>
+                </a:solidFill>
+                <a:latin typeface="Arial"/>
+              </a:rPr>
+              <a:t>Verificación de motoristas</a:t>
+            </a:r>
+          </a:p>
+        </p:txBody>
+      </p:sp>
+      <p:sp>
+        <p:nvSpPr>
+          <p:cNvPr id="10" name="TextBox 9"/>
+          <p:cNvSpPr txBox="1"/>
+          <p:nvPr/>
+        </p:nvSpPr>
+        <p:spPr>
+          <a:xfrm>
+            <a:off x="5715000" y="1773936"/>
+            <a:ext cx="4983480" cy="694944"/>
+          </a:xfrm>
+          <a:prstGeom prst="rect">
+            <a:avLst/>
+          </a:prstGeom>
+          <a:noFill/>
+        </p:spPr>
+        <p:txBody>
+          <a:bodyPr wrap="square" lIns="27432" tIns="27432" rIns="27432" bIns="27432" anchor="t"/>
+          <a:lstStyle/>
+          <a:p>
+            <a:pPr algn="l">
               <a:lnSpc>
                 <a:spcPct val="100000"/>
               </a:lnSpc>
-              <a:spcAft>
-                <a:spcPts val="700"/>
-              </a:spcAft>
             </a:pPr>
             <a:r>
-              <a:rPr sz="1600">
+              <a:rPr sz="1500" b="0" i="0">
                 <a:solidFill>
                   <a:srgbClr val="182E26"/>
                 </a:solidFill>
                 <a:latin typeface="Arial"/>
               </a:rPr>
-              <a:t>• Registro de solicitud, inicio, fin y llegada segura.</a:t>
-            </a:r>
-          </a:p>
-          <a:p>
-            <a:pPr>
+              <a:t>Validar identificación, placa y SOAT vigente antes de permitir viajes.</a:t>
+            </a:r>
+          </a:p>
+        </p:txBody>
+      </p:sp>
+      <p:sp>
+        <p:nvSpPr>
+          <p:cNvPr id="11" name="TextBox 10"/>
+          <p:cNvSpPr txBox="1"/>
+          <p:nvPr/>
+        </p:nvSpPr>
+        <p:spPr>
+          <a:xfrm>
+            <a:off x="5010912" y="2816352"/>
+            <a:ext cx="640080" cy="502920"/>
+          </a:xfrm>
+          <a:prstGeom prst="rect">
+            <a:avLst/>
+          </a:prstGeom>
+          <a:noFill/>
+        </p:spPr>
+        <p:txBody>
+          <a:bodyPr wrap="square" lIns="27432" tIns="27432" rIns="27432" bIns="27432" anchor="t"/>
+          <a:lstStyle/>
+          <a:p>
+            <a:pPr algn="l">
               <a:lnSpc>
                 <a:spcPct val="100000"/>
               </a:lnSpc>
-              <a:spcAft>
-                <a:spcPts val="700"/>
-              </a:spcAft>
             </a:pPr>
             <a:r>
-              <a:rPr sz="1600">
-                <a:solidFill>
-                  <a:srgbClr val="182E26"/>
-                </a:solidFill>
-                <a:latin typeface="Arial"/>
-              </a:rPr>
-              <a:t>• Calificación y reputación por viaje.</a:t>
-            </a:r>
-          </a:p>
-          <a:p>
-            <a:pPr>
+              <a:rPr sz="2700" b="1" i="0">
+                <a:solidFill>
+                  <a:srgbClr val="E6B820"/>
+                </a:solidFill>
+                <a:latin typeface="Arial"/>
+              </a:rPr>
+              <a:t>02</a:t>
+            </a:r>
+          </a:p>
+        </p:txBody>
+      </p:sp>
+      <p:sp>
+        <p:nvSpPr>
+          <p:cNvPr id="12" name="TextBox 11"/>
+          <p:cNvSpPr txBox="1"/>
+          <p:nvPr/>
+        </p:nvSpPr>
+        <p:spPr>
+          <a:xfrm>
+            <a:off x="5715000" y="2834640"/>
+            <a:ext cx="5166360" cy="320040"/>
+          </a:xfrm>
+          <a:prstGeom prst="rect">
+            <a:avLst/>
+          </a:prstGeom>
+          <a:noFill/>
+        </p:spPr>
+        <p:txBody>
+          <a:bodyPr wrap="square" lIns="27432" tIns="27432" rIns="27432" bIns="27432" anchor="t"/>
+          <a:lstStyle/>
+          <a:p>
+            <a:pPr algn="l">
               <a:lnSpc>
                 <a:spcPct val="100000"/>
               </a:lnSpc>
-              <a:spcAft>
-                <a:spcPts val="700"/>
-              </a:spcAft>
             </a:pPr>
             <a:r>
-              <a:rPr sz="1600">
-                <a:solidFill>
-                  <a:srgbClr val="182E26"/>
-                </a:solidFill>
-                <a:latin typeface="Arial"/>
-              </a:rPr>
-              <a:t>• Tarifa acordada y estado de pago.</a:t>
-            </a:r>
-          </a:p>
-          <a:p>
-            <a:pPr>
+              <a:rPr sz="1800" b="1" i="0">
+                <a:solidFill>
+                  <a:srgbClr val="0B7238"/>
+                </a:solidFill>
+                <a:latin typeface="Arial"/>
+              </a:rPr>
+              <a:t>Trazabilidad completa</a:t>
+            </a:r>
+          </a:p>
+        </p:txBody>
+      </p:sp>
+      <p:sp>
+        <p:nvSpPr>
+          <p:cNvPr id="13" name="TextBox 12"/>
+          <p:cNvSpPr txBox="1"/>
+          <p:nvPr/>
+        </p:nvSpPr>
+        <p:spPr>
+          <a:xfrm>
+            <a:off x="5715000" y="3236976"/>
+            <a:ext cx="4983480" cy="694944"/>
+          </a:xfrm>
+          <a:prstGeom prst="rect">
+            <a:avLst/>
+          </a:prstGeom>
+          <a:noFill/>
+        </p:spPr>
+        <p:txBody>
+          <a:bodyPr wrap="square" lIns="27432" tIns="27432" rIns="27432" bIns="27432" anchor="t"/>
+          <a:lstStyle/>
+          <a:p>
+            <a:pPr algn="l">
               <a:lnSpc>
                 <a:spcPct val="100000"/>
               </a:lnSpc>
-              <a:spcAft>
-                <a:spcPts val="700"/>
-              </a:spcAft>
             </a:pPr>
             <a:r>
-              <a:rPr sz="1600">
+              <a:rPr sz="1500" b="0" i="0">
                 <a:solidFill>
                   <a:srgbClr val="182E26"/>
                 </a:solidFill>
                 <a:latin typeface="Arial"/>
               </a:rPr>
-              <a:t>• Arquitectura en capas: modelo, servicio, persistencia y vista.</a:t>
+              <a:t>Registrar origen, destino, hora y confirmación de llegada.</a:t>
+            </a:r>
+          </a:p>
+        </p:txBody>
+      </p:sp>
+      <p:sp>
+        <p:nvSpPr>
+          <p:cNvPr id="14" name="TextBox 13"/>
+          <p:cNvSpPr txBox="1"/>
+          <p:nvPr/>
+        </p:nvSpPr>
+        <p:spPr>
+          <a:xfrm>
+            <a:off x="5010912" y="4279392"/>
+            <a:ext cx="640080" cy="502920"/>
+          </a:xfrm>
+          <a:prstGeom prst="rect">
+            <a:avLst/>
+          </a:prstGeom>
+          <a:noFill/>
+        </p:spPr>
+        <p:txBody>
+          <a:bodyPr wrap="square" lIns="27432" tIns="27432" rIns="27432" bIns="27432" anchor="t"/>
+          <a:lstStyle/>
+          <a:p>
+            <a:pPr algn="l">
+              <a:lnSpc>
+                <a:spcPct val="100000"/>
+              </a:lnSpc>
+            </a:pPr>
+            <a:r>
+              <a:rPr sz="2700" b="1" i="0">
+                <a:solidFill>
+                  <a:srgbClr val="E6B820"/>
+                </a:solidFill>
+                <a:latin typeface="Arial"/>
+              </a:rPr>
+              <a:t>03</a:t>
+            </a:r>
+          </a:p>
+        </p:txBody>
+      </p:sp>
+      <p:sp>
+        <p:nvSpPr>
+          <p:cNvPr id="15" name="TextBox 14"/>
+          <p:cNvSpPr txBox="1"/>
+          <p:nvPr/>
+        </p:nvSpPr>
+        <p:spPr>
+          <a:xfrm>
+            <a:off x="5715000" y="4297679"/>
+            <a:ext cx="5166360" cy="320040"/>
+          </a:xfrm>
+          <a:prstGeom prst="rect">
+            <a:avLst/>
+          </a:prstGeom>
+          <a:noFill/>
+        </p:spPr>
+        <p:txBody>
+          <a:bodyPr wrap="square" lIns="27432" tIns="27432" rIns="27432" bIns="27432" anchor="t"/>
+          <a:lstStyle/>
+          <a:p>
+            <a:pPr algn="l">
+              <a:lnSpc>
+                <a:spcPct val="100000"/>
+              </a:lnSpc>
+            </a:pPr>
+            <a:r>
+              <a:rPr sz="1800" b="1" i="0">
+                <a:solidFill>
+                  <a:srgbClr val="0B7238"/>
+                </a:solidFill>
+                <a:latin typeface="Arial"/>
+              </a:rPr>
+              <a:t>Reputación y seguridad</a:t>
+            </a:r>
+          </a:p>
+        </p:txBody>
+      </p:sp>
+      <p:sp>
+        <p:nvSpPr>
+          <p:cNvPr id="16" name="TextBox 15"/>
+          <p:cNvSpPr txBox="1"/>
+          <p:nvPr/>
+        </p:nvSpPr>
+        <p:spPr>
+          <a:xfrm>
+            <a:off x="5715000" y="4700016"/>
+            <a:ext cx="4983480" cy="694944"/>
+          </a:xfrm>
+          <a:prstGeom prst="rect">
+            <a:avLst/>
+          </a:prstGeom>
+          <a:noFill/>
+        </p:spPr>
+        <p:txBody>
+          <a:bodyPr wrap="square" lIns="27432" tIns="27432" rIns="27432" bIns="27432" anchor="t"/>
+          <a:lstStyle/>
+          <a:p>
+            <a:pPr algn="l">
+              <a:lnSpc>
+                <a:spcPct val="100000"/>
+              </a:lnSpc>
+            </a:pPr>
+            <a:r>
+              <a:rPr sz="1500" b="0" i="0">
+                <a:solidFill>
+                  <a:srgbClr val="182E26"/>
+                </a:solidFill>
+                <a:latin typeface="Arial"/>
+              </a:rPr>
+              <a:t>Calificación de 1 a 5 y comentarios vinculados a cada viaje.</a:t>
+            </a:r>
+          </a:p>
+        </p:txBody>
+      </p:sp>
+    </p:spTree>
+  </p:cSld>
+  <p:clrMapOvr>
+    <a:masterClrMapping/>
+  </p:clrMapOvr>
+  <p:transition spd="slow">
+    <p:wipe/>
+  </p:transition>
+</p:sld>
+</file>
+
+<file path=ppt/slides/slide6.xml><?xml version="1.0" encoding="utf-8"?>
+<p:sld xmlns:a="http://schemas.openxmlformats.org/drawingml/2006/main" xmlns:r="http://schemas.openxmlformats.org/officeDocument/2006/relationships" xmlns:p="http://schemas.openxmlformats.org/presentationml/2006/main">
+  <p:cSld>
+    <p:spTree>
+      <p:nvGrpSpPr>
+        <p:cNvPr id="1" name=""/>
+        <p:cNvGrpSpPr/>
+        <p:nvPr/>
+      </p:nvGrpSpPr>
+      <p:grpSpPr>
+        <a:xfrm>
+          <a:off x="0" y="0"/>
+          <a:ext cx="0" cy="0"/>
+          <a:chOff x="0" y="0"/>
+          <a:chExt cx="0" cy="0"/>
+        </a:xfrm>
+      </p:grpSpPr>
+      <p:sp>
+        <p:nvSpPr>
+          <p:cNvPr id="2" name="Título 1">
+            <a:extLst>
+              <a:ext uri="{FF2B5EF4-FFF2-40B4-BE49-F238E27FC236}">
+                <a16:creationId xmlns:a16="http://schemas.microsoft.com/office/drawing/2014/main" id="{22C8B87F-7704-4D91-086C-AFF2F7CCB367}"/>
+              </a:ext>
+            </a:extLst>
+          </p:cNvPr>
+          <p:cNvSpPr>
+            <a:spLocks noGrp="1"/>
+          </p:cNvSpPr>
+          <p:nvPr>
+            <p:ph type="title"/>
+          </p:nvPr>
+        </p:nvSpPr>
+        <p:spPr/>
+        <p:txBody>
+          <a:bodyPr wrap="square"/>
+          <a:lstStyle/>
+          <a:p>
+            <a:pPr algn="l"/>
+            <a:r>
+              <a:rPr sz="3000" b="1">
+                <a:solidFill>
+                  <a:srgbClr val="0B7238"/>
+                </a:solidFill>
+                <a:latin typeface="Arial"/>
+              </a:rPr>
+              <a:t>Alcance enfocado en confianza, trazabilidad y pago justo</a:t>
+            </a:r>
+          </a:p>
+        </p:txBody>
+      </p:sp>
+      <p:sp>
+        <p:nvSpPr>
+          <p:cNvPr id="3" name="Marcador de número de diapositiva 2">
+            <a:extLst>
+              <a:ext uri="{FF2B5EF4-FFF2-40B4-BE49-F238E27FC236}">
+                <a16:creationId xmlns:a16="http://schemas.microsoft.com/office/drawing/2014/main" id="{4B22C4F8-0926-9EB5-227B-31BF71FBB64E}"/>
+              </a:ext>
+            </a:extLst>
+          </p:cNvPr>
+          <p:cNvSpPr>
+            <a:spLocks noGrp="1"/>
+          </p:cNvSpPr>
+          <p:nvPr>
+            <p:ph type="sldNum" sz="quarter" idx="12"/>
+          </p:nvPr>
+        </p:nvSpPr>
+        <p:spPr/>
+        <p:txBody>
+          <a:bodyPr/>
+          <a:lstStyle/>
+          <a:p>
+            <a:pPr algn="r"/>
+            <a:r>
+              <a:rPr sz="1100" b="1">
+                <a:solidFill>
+                  <a:srgbClr val="5F6B65"/>
+                </a:solidFill>
+                <a:latin typeface="Arial"/>
+              </a:rPr>
+              <a:t>4</a:t>
+            </a:r>
+          </a:p>
+        </p:txBody>
+      </p:sp>
+      <p:sp>
+        <p:nvSpPr>
+          <p:cNvPr id="4" name="TextBox 3"/>
+          <p:cNvSpPr txBox="1"/>
+          <p:nvPr/>
+        </p:nvSpPr>
+        <p:spPr>
+          <a:xfrm>
+            <a:off x="566928" y="1325880"/>
+            <a:ext cx="4389120" cy="320040"/>
+          </a:xfrm>
+          <a:prstGeom prst="rect">
+            <a:avLst/>
+          </a:prstGeom>
+          <a:noFill/>
+        </p:spPr>
+        <p:txBody>
+          <a:bodyPr wrap="square" lIns="27432" tIns="27432" rIns="27432" bIns="27432" anchor="t"/>
+          <a:lstStyle/>
+          <a:p>
+            <a:pPr algn="l">
+              <a:lnSpc>
+                <a:spcPct val="100000"/>
+              </a:lnSpc>
+            </a:pPr>
+            <a:r>
+              <a:rPr sz="1800" b="1" i="0">
+                <a:solidFill>
+                  <a:srgbClr val="0B7238"/>
+                </a:solidFill>
+                <a:latin typeface="Arial"/>
+              </a:rPr>
+              <a:t>INCLUYE</a:t>
             </a:r>
           </a:p>
         </p:txBody>
       </p:sp>
       <p:cxnSp>
         <p:nvCxnSpPr>
-          <p:cNvPr id="7" name="Connector 6"/>
+          <p:cNvPr id="5" name="Connector 4"/>
           <p:cNvCxnSpPr/>
           <p:nvPr/>
         </p:nvCxnSpPr>
         <p:spPr>
           <a:xfrm>
-            <a:off x="5888736" y="1298448"/>
-            <a:ext cx="0" cy="4343400"/>
+            <a:off x="566928" y="1746504"/>
+            <a:ext cx="5074920" cy="0"/>
           </a:xfrm>
           <a:prstGeom prst="line">
             <a:avLst/>
           </a:prstGeom>
-          <a:ln w="19050">
+          <a:ln w="25400">
             <a:solidFill>
-              <a:srgbClr val="9AA59F"/>
+              <a:srgbClr val="0B7238"/>
             </a:solidFill>
           </a:ln>
         </p:spPr>
@@ -10367,14 +11713,14 @@
       </p:cxnSp>
       <p:sp>
         <p:nvSpPr>
-          <p:cNvPr id="8" name="TextBox 7"/>
+          <p:cNvPr id="6" name="TextBox 5"/>
           <p:cNvSpPr txBox="1"/>
           <p:nvPr/>
         </p:nvSpPr>
         <p:spPr>
           <a:xfrm>
-            <a:off x="6199632" y="1325880"/>
-            <a:ext cx="4297680" cy="320040"/>
+            <a:off x="566928" y="1901952"/>
+            <a:ext cx="4983480" cy="3611880"/>
           </a:xfrm>
           <a:prstGeom prst="rect">
             <a:avLst/>
@@ -10382,43 +11728,141 @@
           <a:noFill/>
         </p:spPr>
         <p:txBody>
-          <a:bodyPr wrap="square" lIns="27432" tIns="27432" rIns="27432" bIns="27432" anchor="t"/>
-          <a:lstStyle/>
-          <a:p>
-            <a:pPr algn="l">
+          <a:bodyPr wrap="square" lIns="18288" tIns="18288" rIns="18288" bIns="18288"/>
+          <a:lstStyle/>
+          <a:p>
+            <a:pPr>
               <a:lnSpc>
                 <a:spcPct val="100000"/>
               </a:lnSpc>
+              <a:spcAft>
+                <a:spcPts val="700"/>
+              </a:spcAft>
             </a:pPr>
             <a:r>
-              <a:rPr sz="1800" b="1" i="0">
-                <a:solidFill>
-                  <a:srgbClr val="B23A3A"/>
-                </a:solidFill>
-                <a:latin typeface="Arial"/>
-              </a:rPr>
-              <a:t>NO INCLUYE</a:t>
+              <a:rPr sz="1600">
+                <a:solidFill>
+                  <a:srgbClr val="182E26"/>
+                </a:solidFill>
+                <a:latin typeface="Arial"/>
+              </a:rPr>
+              <a:t>• Modelo de dominio con 5 entidades.</a:t>
+            </a:r>
+          </a:p>
+          <a:p>
+            <a:pPr>
+              <a:lnSpc>
+                <a:spcPct val="100000"/>
+              </a:lnSpc>
+              <a:spcAft>
+                <a:spcPts val="700"/>
+              </a:spcAft>
+            </a:pPr>
+            <a:r>
+              <a:rPr sz="1600">
+                <a:solidFill>
+                  <a:srgbClr val="182E26"/>
+                </a:solidFill>
+                <a:latin typeface="Arial"/>
+              </a:rPr>
+              <a:t>• Verificación documental: identificación, placa y SOAT.</a:t>
+            </a:r>
+          </a:p>
+          <a:p>
+            <a:pPr>
+              <a:lnSpc>
+                <a:spcPct val="100000"/>
+              </a:lnSpc>
+              <a:spcAft>
+                <a:spcPts val="700"/>
+              </a:spcAft>
+            </a:pPr>
+            <a:r>
+              <a:rPr sz="1600">
+                <a:solidFill>
+                  <a:srgbClr val="182E26"/>
+                </a:solidFill>
+                <a:latin typeface="Arial"/>
+              </a:rPr>
+              <a:t>• Registro de solicitud, inicio, fin y llegada segura.</a:t>
+            </a:r>
+          </a:p>
+          <a:p>
+            <a:pPr>
+              <a:lnSpc>
+                <a:spcPct val="100000"/>
+              </a:lnSpc>
+              <a:spcAft>
+                <a:spcPts val="700"/>
+              </a:spcAft>
+            </a:pPr>
+            <a:r>
+              <a:rPr sz="1600">
+                <a:solidFill>
+                  <a:srgbClr val="182E26"/>
+                </a:solidFill>
+                <a:latin typeface="Arial"/>
+              </a:rPr>
+              <a:t>• Calificación y reputación por viaje.</a:t>
+            </a:r>
+          </a:p>
+          <a:p>
+            <a:pPr>
+              <a:lnSpc>
+                <a:spcPct val="100000"/>
+              </a:lnSpc>
+              <a:spcAft>
+                <a:spcPts val="700"/>
+              </a:spcAft>
+            </a:pPr>
+            <a:r>
+              <a:rPr sz="1600">
+                <a:solidFill>
+                  <a:srgbClr val="182E26"/>
+                </a:solidFill>
+                <a:latin typeface="Arial"/>
+              </a:rPr>
+              <a:t>• Tarifa acordada y estado de pago.</a:t>
+            </a:r>
+          </a:p>
+          <a:p>
+            <a:pPr>
+              <a:lnSpc>
+                <a:spcPct val="100000"/>
+              </a:lnSpc>
+              <a:spcAft>
+                <a:spcPts val="700"/>
+              </a:spcAft>
+            </a:pPr>
+            <a:r>
+              <a:rPr sz="1600">
+                <a:solidFill>
+                  <a:srgbClr val="182E26"/>
+                </a:solidFill>
+                <a:latin typeface="Arial"/>
+              </a:rPr>
+              <a:t>• Arquitectura en capas: modelo, servicio, persistencia y vista.</a:t>
             </a:r>
           </a:p>
         </p:txBody>
       </p:sp>
       <p:cxnSp>
         <p:nvCxnSpPr>
-          <p:cNvPr id="9" name="Connector 8"/>
+          <p:cNvPr id="7" name="Connector 6"/>
           <p:cNvCxnSpPr/>
           <p:nvPr/>
         </p:nvCxnSpPr>
         <p:spPr>
           <a:xfrm>
-            <a:off x="6199632" y="1746504"/>
-            <a:ext cx="4572000" cy="0"/>
+            <a:off x="5888736" y="1298448"/>
+            <a:ext cx="0" cy="4343400"/>
           </a:xfrm>
           <a:prstGeom prst="line">
             <a:avLst/>
           </a:prstGeom>
-          <a:ln w="25400">
+          <a:ln w="19050">
             <a:solidFill>
-              <a:srgbClr val="B23A3A"/>
+              <a:srgbClr val="9AA59F"/>
             </a:solidFill>
           </a:ln>
         </p:spPr>
@@ -10439,6 +11883,78 @@
       </p:cxnSp>
       <p:sp>
         <p:nvSpPr>
+          <p:cNvPr id="8" name="TextBox 7"/>
+          <p:cNvSpPr txBox="1"/>
+          <p:nvPr/>
+        </p:nvSpPr>
+        <p:spPr>
+          <a:xfrm>
+            <a:off x="6199632" y="1325880"/>
+            <a:ext cx="4297680" cy="320040"/>
+          </a:xfrm>
+          <a:prstGeom prst="rect">
+            <a:avLst/>
+          </a:prstGeom>
+          <a:noFill/>
+        </p:spPr>
+        <p:txBody>
+          <a:bodyPr wrap="square" lIns="27432" tIns="27432" rIns="27432" bIns="27432" anchor="t"/>
+          <a:lstStyle/>
+          <a:p>
+            <a:pPr algn="l">
+              <a:lnSpc>
+                <a:spcPct val="100000"/>
+              </a:lnSpc>
+            </a:pPr>
+            <a:r>
+              <a:rPr sz="1800" b="1" i="0">
+                <a:solidFill>
+                  <a:srgbClr val="B23A3A"/>
+                </a:solidFill>
+                <a:latin typeface="Arial"/>
+              </a:rPr>
+              <a:t>NO INCLUYE</a:t>
+            </a:r>
+          </a:p>
+        </p:txBody>
+      </p:sp>
+      <p:cxnSp>
+        <p:nvCxnSpPr>
+          <p:cNvPr id="9" name="Connector 8"/>
+          <p:cNvCxnSpPr/>
+          <p:nvPr/>
+        </p:nvCxnSpPr>
+        <p:spPr>
+          <a:xfrm>
+            <a:off x="6199632" y="1746504"/>
+            <a:ext cx="4572000" cy="0"/>
+          </a:xfrm>
+          <a:prstGeom prst="line">
+            <a:avLst/>
+          </a:prstGeom>
+          <a:ln w="25400">
+            <a:solidFill>
+              <a:srgbClr val="B23A3A"/>
+            </a:solidFill>
+          </a:ln>
+        </p:spPr>
+        <p:style>
+          <a:lnRef idx="2">
+            <a:schemeClr val="accent1"/>
+          </a:lnRef>
+          <a:fillRef idx="0">
+            <a:schemeClr val="accent1"/>
+          </a:fillRef>
+          <a:effectRef idx="1">
+            <a:schemeClr val="accent1"/>
+          </a:effectRef>
+          <a:fontRef idx="minor">
+            <a:schemeClr val="tx1"/>
+          </a:fontRef>
+        </p:style>
+      </p:cxnSp>
+      <p:sp>
+        <p:nvSpPr>
           <p:cNvPr id="10" name="TextBox 9"/>
           <p:cNvSpPr txBox="1"/>
           <p:nvPr/>
@@ -10466,13 +11982,67 @@
               </a:spcAft>
             </a:pPr>
             <a:r>
-              <a:rPr sz="1600">
+              <a:rPr sz="1600" dirty="0">
                 <a:solidFill>
                   <a:srgbClr val="182E26"/>
                 </a:solidFill>
                 <a:latin typeface="Arial"/>
               </a:rPr>
-              <a:t>• Aplicación móvil nativa para iOS o Android.</a:t>
+              <a:t>• </a:t>
+            </a:r>
+            <a:r>
+              <a:rPr sz="1600" dirty="0" err="1">
+                <a:solidFill>
+                  <a:srgbClr val="182E26"/>
+                </a:solidFill>
+                <a:latin typeface="Arial"/>
+              </a:rPr>
+              <a:t>Aplicación</a:t>
+            </a:r>
+            <a:r>
+              <a:rPr sz="1600" dirty="0">
+                <a:solidFill>
+                  <a:srgbClr val="182E26"/>
+                </a:solidFill>
+                <a:latin typeface="Arial"/>
+              </a:rPr>
+              <a:t> </a:t>
+            </a:r>
+            <a:r>
+              <a:rPr sz="1600" dirty="0" err="1">
+                <a:solidFill>
+                  <a:srgbClr val="182E26"/>
+                </a:solidFill>
+                <a:latin typeface="Arial"/>
+              </a:rPr>
+              <a:t>móvil</a:t>
+            </a:r>
+            <a:r>
+              <a:rPr sz="1600" dirty="0">
+                <a:solidFill>
+                  <a:srgbClr val="182E26"/>
+                </a:solidFill>
+                <a:latin typeface="Arial"/>
+              </a:rPr>
+              <a:t> </a:t>
+            </a:r>
+            <a:r>
+              <a:rPr sz="1600" dirty="0" err="1">
+                <a:solidFill>
+                  <a:srgbClr val="182E26"/>
+                </a:solidFill>
+                <a:latin typeface="Arial"/>
+              </a:rPr>
+              <a:t>nativa</a:t>
+            </a:r>
+            <a:r>
+              <a:rPr sz="1600" dirty="0">
+                <a:solidFill>
+                  <a:srgbClr val="182E26"/>
+                </a:solidFill>
+                <a:latin typeface="Arial"/>
+              </a:rPr>
+              <a:t> para iOS o Android.</a:t>
             </a:r>
           </a:p>
           <a:p>
@@ -10485,13 +12055,67 @@
               </a:spcAft>
             </a:pPr>
             <a:r>
-              <a:rPr sz="1600">
+              <a:rPr sz="1600" dirty="0">
                 <a:solidFill>
                   <a:srgbClr val="182E26"/>
                 </a:solidFill>
                 <a:latin typeface="Arial"/>
               </a:rPr>
-              <a:t>• Pasarela de pagos electrónicos real.</a:t>
+              <a:t>• </a:t>
+            </a:r>
+            <a:r>
+              <a:rPr sz="1600" dirty="0" err="1">
+                <a:solidFill>
+                  <a:srgbClr val="182E26"/>
+                </a:solidFill>
+                <a:latin typeface="Arial"/>
+              </a:rPr>
+              <a:t>Pasarela</a:t>
+            </a:r>
+            <a:r>
+              <a:rPr sz="1600" dirty="0">
+                <a:solidFill>
+                  <a:srgbClr val="182E26"/>
+                </a:solidFill>
+                <a:latin typeface="Arial"/>
+              </a:rPr>
+              <a:t> de </a:t>
+            </a:r>
+            <a:r>
+              <a:rPr sz="1600" dirty="0" err="1">
+                <a:solidFill>
+                  <a:srgbClr val="182E26"/>
+                </a:solidFill>
+                <a:latin typeface="Arial"/>
+              </a:rPr>
+              <a:t>pagos</a:t>
+            </a:r>
+            <a:r>
+              <a:rPr sz="1600" dirty="0">
+                <a:solidFill>
+                  <a:srgbClr val="182E26"/>
+                </a:solidFill>
+                <a:latin typeface="Arial"/>
+              </a:rPr>
+              <a:t> </a:t>
+            </a:r>
+            <a:r>
+              <a:rPr sz="1600" dirty="0" err="1">
+                <a:solidFill>
+                  <a:srgbClr val="182E26"/>
+                </a:solidFill>
+                <a:latin typeface="Arial"/>
+              </a:rPr>
+              <a:t>electrónicos</a:t>
+            </a:r>
+            <a:r>
+              <a:rPr sz="1600" dirty="0">
+                <a:solidFill>
+                  <a:srgbClr val="182E26"/>
+                </a:solidFill>
+                <a:latin typeface="Arial"/>
+              </a:rPr>
+              <a:t> real.</a:t>
             </a:r>
           </a:p>
           <a:p>
@@ -10504,13 +12128,85 @@
               </a:spcAft>
             </a:pPr>
             <a:r>
-              <a:rPr sz="1600">
+              <a:rPr sz="1600" dirty="0">
                 <a:solidFill>
                   <a:srgbClr val="182E26"/>
                 </a:solidFill>
                 <a:latin typeface="Arial"/>
               </a:rPr>
-              <a:t>• Optimización de rutas o despacho automático.</a:t>
+              <a:t>• </a:t>
+            </a:r>
+            <a:r>
+              <a:rPr sz="1600" dirty="0" err="1">
+                <a:solidFill>
+                  <a:srgbClr val="182E26"/>
+                </a:solidFill>
+                <a:latin typeface="Arial"/>
+              </a:rPr>
+              <a:t>Optimización</a:t>
+            </a:r>
+            <a:r>
+              <a:rPr sz="1600" dirty="0">
+                <a:solidFill>
+                  <a:srgbClr val="182E26"/>
+                </a:solidFill>
+                <a:latin typeface="Arial"/>
+              </a:rPr>
+              <a:t> de </a:t>
+            </a:r>
+            <a:r>
+              <a:rPr sz="1600" dirty="0" err="1">
+                <a:solidFill>
+                  <a:srgbClr val="182E26"/>
+                </a:solidFill>
+                <a:latin typeface="Arial"/>
+              </a:rPr>
+              <a:t>rutas</a:t>
+            </a:r>
+            <a:r>
+              <a:rPr sz="1600" dirty="0">
+                <a:solidFill>
+                  <a:srgbClr val="182E26"/>
+                </a:solidFill>
+                <a:latin typeface="Arial"/>
+              </a:rPr>
+              <a:t> o </a:t>
+            </a:r>
+            <a:r>
+              <a:rPr sz="1600" dirty="0" err="1">
+                <a:solidFill>
+                  <a:srgbClr val="182E26"/>
+                </a:solidFill>
+                <a:latin typeface="Arial"/>
+              </a:rPr>
+              <a:t>despacho</a:t>
+            </a:r>
+            <a:r>
+              <a:rPr sz="1600" dirty="0">
+                <a:solidFill>
+                  <a:srgbClr val="182E26"/>
+                </a:solidFill>
+                <a:latin typeface="Arial"/>
+              </a:rPr>
+              <a:t> </a:t>
+            </a:r>
+            <a:r>
+              <a:rPr sz="1600" dirty="0" err="1">
+                <a:solidFill>
+                  <a:srgbClr val="182E26"/>
+                </a:solidFill>
+                <a:latin typeface="Arial"/>
+              </a:rPr>
+              <a:t>automático</a:t>
+            </a:r>
+            <a:r>
+              <a:rPr sz="1600" dirty="0">
+                <a:solidFill>
+                  <a:srgbClr val="182E26"/>
+                </a:solidFill>
+                <a:latin typeface="Arial"/>
+              </a:rPr>
+              <a:t>.</a:t>
             </a:r>
           </a:p>
         </p:txBody>
@@ -10557,10 +12253,13 @@
   <p:clrMapOvr>
     <a:masterClrMapping/>
   </p:clrMapOvr>
+  <p:transition spd="slow">
+    <p:wipe/>
+  </p:transition>
 </p:sld>
 </file>
 
-<file path=ppt/slides/slide6.xml><?xml version="1.0" encoding="utf-8"?>
+<file path=ppt/slides/slide7.xml><?xml version="1.0" encoding="utf-8"?>
 <p:sld xmlns:a="http://schemas.openxmlformats.org/drawingml/2006/main" xmlns:r="http://schemas.openxmlformats.org/officeDocument/2006/relationships" xmlns:p="http://schemas.openxmlformats.org/presentationml/2006/main">
   <p:cSld>
     <p:spTree>
@@ -10807,10 +12506,22 @@
   <p:clrMapOvr>
     <a:masterClrMapping/>
   </p:clrMapOvr>
+  <mc:AlternateContent xmlns:mc="http://schemas.openxmlformats.org/markup-compatibility/2006">
+    <mc:Choice xmlns:p14="http://schemas.microsoft.com/office/powerpoint/2010/main" Requires="p14">
+      <p:transition spd="slow" p14:dur="1500">
+        <p:split orient="vert"/>
+      </p:transition>
+    </mc:Choice>
+    <mc:Fallback>
+      <p:transition spd="slow">
+        <p:split orient="vert"/>
+      </p:transition>
+    </mc:Fallback>
+  </mc:AlternateContent>
 </p:sld>
 </file>
 
-<file path=ppt/slides/slide7.xml><?xml version="1.0" encoding="utf-8"?>
+<file path=ppt/slides/slide8.xml><?xml version="1.0" encoding="utf-8"?>
 <p:sld xmlns:a="http://schemas.openxmlformats.org/drawingml/2006/main" xmlns:r="http://schemas.openxmlformats.org/officeDocument/2006/relationships" xmlns:p="http://schemas.openxmlformats.org/presentationml/2006/main">
   <p:cSld>
     <p:spTree>
@@ -11546,1084 +13257,18 @@
   <p:clrMapOvr>
     <a:masterClrMapping/>
   </p:clrMapOvr>
-</p:sld>
-</file>
-
-<file path=ppt/slides/slide8.xml><?xml version="1.0" encoding="utf-8"?>
-<p:sld xmlns:a="http://schemas.openxmlformats.org/drawingml/2006/main" xmlns:r="http://schemas.openxmlformats.org/officeDocument/2006/relationships" xmlns:p="http://schemas.openxmlformats.org/presentationml/2006/main">
-  <p:cSld>
-    <p:spTree>
-      <p:nvGrpSpPr>
-        <p:cNvPr id="1" name=""/>
-        <p:cNvGrpSpPr/>
-        <p:nvPr/>
-      </p:nvGrpSpPr>
-      <p:grpSpPr>
-        <a:xfrm>
-          <a:off x="0" y="0"/>
-          <a:ext cx="0" cy="0"/>
-          <a:chOff x="0" y="0"/>
-          <a:chExt cx="0" cy="0"/>
-        </a:xfrm>
-      </p:grpSpPr>
-      <p:sp>
-        <p:nvSpPr>
-          <p:cNvPr id="2" name="Título 1">
-            <a:extLst>
-              <a:ext uri="{FF2B5EF4-FFF2-40B4-BE49-F238E27FC236}">
-                <a16:creationId xmlns:a16="http://schemas.microsoft.com/office/drawing/2014/main" id="{22C8B87F-7704-4D91-086C-AFF2F7CCB367}"/>
-              </a:ext>
-            </a:extLst>
-          </p:cNvPr>
-          <p:cNvSpPr>
-            <a:spLocks noGrp="1"/>
-          </p:cNvSpPr>
-          <p:nvPr>
-            <p:ph type="title"/>
-          </p:nvPr>
-        </p:nvSpPr>
-        <p:spPr/>
-        <p:txBody>
-          <a:bodyPr wrap="square"/>
-          <a:lstStyle/>
-          <a:p>
-            <a:pPr algn="l"/>
-            <a:r>
-              <a:rPr sz="3000" b="1">
-                <a:solidFill>
-                  <a:srgbClr val="0B7238"/>
-                </a:solidFill>
-                <a:latin typeface="Arial"/>
-              </a:rPr>
-              <a:t>La Universidad regula condiciones de seguridad, no legaliza el servicio</a:t>
-            </a:r>
-          </a:p>
-        </p:txBody>
-      </p:sp>
-      <p:sp>
-        <p:nvSpPr>
-          <p:cNvPr id="3" name="Marcador de número de diapositiva 2">
-            <a:extLst>
-              <a:ext uri="{FF2B5EF4-FFF2-40B4-BE49-F238E27FC236}">
-                <a16:creationId xmlns:a16="http://schemas.microsoft.com/office/drawing/2014/main" id="{4B22C4F8-0926-9EB5-227B-31BF71FBB64E}"/>
-              </a:ext>
-            </a:extLst>
-          </p:cNvPr>
-          <p:cNvSpPr>
-            <a:spLocks noGrp="1"/>
-          </p:cNvSpPr>
-          <p:nvPr>
-            <p:ph type="sldNum" sz="quarter" idx="12"/>
-          </p:nvPr>
-        </p:nvSpPr>
-        <p:spPr/>
-        <p:txBody>
-          <a:bodyPr/>
-          <a:lstStyle/>
-          <a:p>
-            <a:pPr algn="r"/>
-            <a:r>
-              <a:rPr sz="1100" b="1">
-                <a:solidFill>
-                  <a:srgbClr val="5F6B65"/>
-                </a:solidFill>
-                <a:latin typeface="Arial"/>
-              </a:rPr>
-              <a:t>7</a:t>
-            </a:r>
-          </a:p>
-        </p:txBody>
-      </p:sp>
-      <p:sp>
-        <p:nvSpPr>
-          <p:cNvPr id="4" name="TextBox 3"/>
-          <p:cNvSpPr txBox="1"/>
-          <p:nvPr/>
-        </p:nvSpPr>
-        <p:spPr>
-          <a:xfrm>
-            <a:off x="566928" y="1298448"/>
-            <a:ext cx="4800600" cy="320040"/>
-          </a:xfrm>
-          <a:prstGeom prst="rect">
-            <a:avLst/>
-          </a:prstGeom>
-          <a:noFill/>
-        </p:spPr>
-        <p:txBody>
-          <a:bodyPr wrap="square" lIns="27432" tIns="27432" rIns="27432" bIns="27432" anchor="t"/>
-          <a:lstStyle/>
-          <a:p>
-            <a:pPr algn="l">
-              <a:lnSpc>
-                <a:spcPct val="100000"/>
-              </a:lnSpc>
-            </a:pPr>
-            <a:r>
-              <a:rPr sz="1800" b="1" i="0">
-                <a:solidFill>
-                  <a:srgbClr val="0B7238"/>
-                </a:solidFill>
-                <a:latin typeface="Arial"/>
-              </a:rPr>
-              <a:t>TUCANGO SÍ HACE</a:t>
-            </a:r>
-          </a:p>
-        </p:txBody>
-      </p:sp>
-      <p:sp>
-        <p:nvSpPr>
-          <p:cNvPr id="5" name="TextBox 4"/>
-          <p:cNvSpPr txBox="1"/>
-          <p:nvPr/>
-        </p:nvSpPr>
-        <p:spPr>
-          <a:xfrm>
-            <a:off x="6199632" y="1298448"/>
-            <a:ext cx="4663440" cy="320040"/>
-          </a:xfrm>
-          <a:prstGeom prst="rect">
-            <a:avLst/>
-          </a:prstGeom>
-          <a:noFill/>
-        </p:spPr>
-        <p:txBody>
-          <a:bodyPr wrap="square" lIns="27432" tIns="27432" rIns="27432" bIns="27432" anchor="t"/>
-          <a:lstStyle/>
-          <a:p>
-            <a:pPr algn="l">
-              <a:lnSpc>
-                <a:spcPct val="100000"/>
-              </a:lnSpc>
-            </a:pPr>
-            <a:r>
-              <a:rPr sz="1800" b="1" i="0">
-                <a:solidFill>
-                  <a:srgbClr val="B23A3A"/>
-                </a:solidFill>
-                <a:latin typeface="Arial"/>
-              </a:rPr>
-              <a:t>TUCANGO NO HACE</a:t>
-            </a:r>
-          </a:p>
-        </p:txBody>
-      </p:sp>
-      <p:cxnSp>
-        <p:nvCxnSpPr>
-          <p:cNvPr id="6" name="Connector 5"/>
-          <p:cNvCxnSpPr/>
-          <p:nvPr/>
-        </p:nvCxnSpPr>
-        <p:spPr>
-          <a:xfrm>
-            <a:off x="5870448" y="1234440"/>
-            <a:ext cx="0" cy="4251960"/>
-          </a:xfrm>
-          <a:prstGeom prst="line">
-            <a:avLst/>
-          </a:prstGeom>
-          <a:ln w="25400">
-            <a:solidFill>
-              <a:srgbClr val="E6B820"/>
-            </a:solidFill>
-          </a:ln>
-        </p:spPr>
-        <p:style>
-          <a:lnRef idx="2">
-            <a:schemeClr val="accent1"/>
-          </a:lnRef>
-          <a:fillRef idx="0">
-            <a:schemeClr val="accent1"/>
-          </a:fillRef>
-          <a:effectRef idx="1">
-            <a:schemeClr val="accent1"/>
-          </a:effectRef>
-          <a:fontRef idx="minor">
-            <a:schemeClr val="tx1"/>
-          </a:fontRef>
-        </p:style>
-      </p:cxnSp>
-      <p:sp>
-        <p:nvSpPr>
-          <p:cNvPr id="7" name="TextBox 6"/>
-          <p:cNvSpPr txBox="1"/>
-          <p:nvPr/>
-        </p:nvSpPr>
-        <p:spPr>
-          <a:xfrm>
-            <a:off x="576072" y="1810512"/>
-            <a:ext cx="320040" cy="320040"/>
-          </a:xfrm>
-          <a:prstGeom prst="rect">
-            <a:avLst/>
-          </a:prstGeom>
-          <a:noFill/>
-        </p:spPr>
-        <p:txBody>
-          <a:bodyPr wrap="square" lIns="27432" tIns="27432" rIns="27432" bIns="27432" anchor="t"/>
-          <a:lstStyle/>
-          <a:p>
-            <a:pPr algn="l">
-              <a:lnSpc>
-                <a:spcPct val="100000"/>
-              </a:lnSpc>
-            </a:pPr>
-            <a:r>
-              <a:rPr sz="1800" b="1" i="0">
-                <a:solidFill>
-                  <a:srgbClr val="0B7238"/>
-                </a:solidFill>
-                <a:latin typeface="Arial"/>
-              </a:rPr>
-              <a:t>✓</a:t>
-            </a:r>
-          </a:p>
-        </p:txBody>
-      </p:sp>
-      <p:sp>
-        <p:nvSpPr>
-          <p:cNvPr id="8" name="TextBox 7"/>
-          <p:cNvSpPr txBox="1"/>
-          <p:nvPr/>
-        </p:nvSpPr>
-        <p:spPr>
-          <a:xfrm>
-            <a:off x="987552" y="1810512"/>
-            <a:ext cx="4526280" cy="566928"/>
-          </a:xfrm>
-          <a:prstGeom prst="rect">
-            <a:avLst/>
-          </a:prstGeom>
-          <a:noFill/>
-        </p:spPr>
-        <p:txBody>
-          <a:bodyPr wrap="square" lIns="27432" tIns="27432" rIns="27432" bIns="27432" anchor="t"/>
-          <a:lstStyle/>
-          <a:p>
-            <a:pPr algn="l">
-              <a:lnSpc>
-                <a:spcPct val="100000"/>
-              </a:lnSpc>
-            </a:pPr>
-            <a:r>
-              <a:rPr sz="1500" b="0" i="0">
-                <a:solidFill>
-                  <a:srgbClr val="182E26"/>
-                </a:solidFill>
-                <a:latin typeface="Arial"/>
-              </a:rPr>
-              <a:t>Verifica documentos, placa y SOAT dentro del campus.</a:t>
-            </a:r>
-          </a:p>
-        </p:txBody>
-      </p:sp>
-      <p:sp>
-        <p:nvSpPr>
-          <p:cNvPr id="9" name="TextBox 8"/>
-          <p:cNvSpPr txBox="1"/>
-          <p:nvPr/>
-        </p:nvSpPr>
-        <p:spPr>
-          <a:xfrm>
-            <a:off x="6199632" y="1810512"/>
-            <a:ext cx="320040" cy="320040"/>
-          </a:xfrm>
-          <a:prstGeom prst="rect">
-            <a:avLst/>
-          </a:prstGeom>
-          <a:noFill/>
-        </p:spPr>
-        <p:txBody>
-          <a:bodyPr wrap="square" lIns="27432" tIns="27432" rIns="27432" bIns="27432" anchor="t"/>
-          <a:lstStyle/>
-          <a:p>
-            <a:pPr algn="l">
-              <a:lnSpc>
-                <a:spcPct val="100000"/>
-              </a:lnSpc>
-            </a:pPr>
-            <a:r>
-              <a:rPr sz="2000" b="1" i="0">
-                <a:solidFill>
-                  <a:srgbClr val="B23A3A"/>
-                </a:solidFill>
-                <a:latin typeface="Arial"/>
-              </a:rPr>
-              <a:t>×</a:t>
-            </a:r>
-          </a:p>
-        </p:txBody>
-      </p:sp>
-      <p:sp>
-        <p:nvSpPr>
-          <p:cNvPr id="10" name="TextBox 9"/>
-          <p:cNvSpPr txBox="1"/>
-          <p:nvPr/>
-        </p:nvSpPr>
-        <p:spPr>
-          <a:xfrm>
-            <a:off x="6601968" y="1810512"/>
-            <a:ext cx="4251960" cy="566928"/>
-          </a:xfrm>
-          <a:prstGeom prst="rect">
-            <a:avLst/>
-          </a:prstGeom>
-          <a:noFill/>
-        </p:spPr>
-        <p:txBody>
-          <a:bodyPr wrap="square" lIns="27432" tIns="27432" rIns="27432" bIns="27432" anchor="t"/>
-          <a:lstStyle/>
-          <a:p>
-            <a:pPr algn="l">
-              <a:lnSpc>
-                <a:spcPct val="100000"/>
-              </a:lnSpc>
-            </a:pPr>
-            <a:r>
-              <a:rPr sz="1500" b="0" i="0">
-                <a:solidFill>
-                  <a:srgbClr val="182E26"/>
-                </a:solidFill>
-                <a:latin typeface="Arial"/>
-              </a:rPr>
-              <a:t>Legaliza el transporte público en motocicleta.</a:t>
-            </a:r>
-          </a:p>
-        </p:txBody>
-      </p:sp>
-      <p:cxnSp>
-        <p:nvCxnSpPr>
-          <p:cNvPr id="11" name="Connector 10"/>
-          <p:cNvCxnSpPr/>
-          <p:nvPr/>
-        </p:nvCxnSpPr>
-        <p:spPr>
-          <a:xfrm>
-            <a:off x="566928" y="2478024"/>
-            <a:ext cx="4919472" cy="0"/>
-          </a:xfrm>
-          <a:prstGeom prst="line">
-            <a:avLst/>
-          </a:prstGeom>
-          <a:ln w="12700">
-            <a:solidFill>
-              <a:srgbClr val="EEF5F0"/>
-            </a:solidFill>
-          </a:ln>
-        </p:spPr>
-        <p:style>
-          <a:lnRef idx="2">
-            <a:schemeClr val="accent1"/>
-          </a:lnRef>
-          <a:fillRef idx="0">
-            <a:schemeClr val="accent1"/>
-          </a:fillRef>
-          <a:effectRef idx="1">
-            <a:schemeClr val="accent1"/>
-          </a:effectRef>
-          <a:fontRef idx="minor">
-            <a:schemeClr val="tx1"/>
-          </a:fontRef>
-        </p:style>
-      </p:cxnSp>
-      <p:cxnSp>
-        <p:nvCxnSpPr>
-          <p:cNvPr id="12" name="Connector 11"/>
-          <p:cNvCxnSpPr/>
-          <p:nvPr/>
-        </p:nvCxnSpPr>
-        <p:spPr>
-          <a:xfrm>
-            <a:off x="6199632" y="2478024"/>
-            <a:ext cx="4617720" cy="0"/>
-          </a:xfrm>
-          <a:prstGeom prst="line">
-            <a:avLst/>
-          </a:prstGeom>
-          <a:ln w="12700">
-            <a:solidFill>
-              <a:srgbClr val="EEF5F0"/>
-            </a:solidFill>
-          </a:ln>
-        </p:spPr>
-        <p:style>
-          <a:lnRef idx="2">
-            <a:schemeClr val="accent1"/>
-          </a:lnRef>
-          <a:fillRef idx="0">
-            <a:schemeClr val="accent1"/>
-          </a:fillRef>
-          <a:effectRef idx="1">
-            <a:schemeClr val="accent1"/>
-          </a:effectRef>
-          <a:fontRef idx="minor">
-            <a:schemeClr val="tx1"/>
-          </a:fontRef>
-        </p:style>
-      </p:cxnSp>
-      <p:sp>
-        <p:nvSpPr>
-          <p:cNvPr id="13" name="TextBox 12"/>
-          <p:cNvSpPr txBox="1"/>
-          <p:nvPr/>
-        </p:nvSpPr>
-        <p:spPr>
-          <a:xfrm>
-            <a:off x="576072" y="2633472"/>
-            <a:ext cx="320040" cy="320040"/>
-          </a:xfrm>
-          <a:prstGeom prst="rect">
-            <a:avLst/>
-          </a:prstGeom>
-          <a:noFill/>
-        </p:spPr>
-        <p:txBody>
-          <a:bodyPr wrap="square" lIns="27432" tIns="27432" rIns="27432" bIns="27432" anchor="t"/>
-          <a:lstStyle/>
-          <a:p>
-            <a:pPr algn="l">
-              <a:lnSpc>
-                <a:spcPct val="100000"/>
-              </a:lnSpc>
-            </a:pPr>
-            <a:r>
-              <a:rPr sz="1800" b="1" i="0">
-                <a:solidFill>
-                  <a:srgbClr val="0B7238"/>
-                </a:solidFill>
-                <a:latin typeface="Arial"/>
-              </a:rPr>
-              <a:t>✓</a:t>
-            </a:r>
-          </a:p>
-        </p:txBody>
-      </p:sp>
-      <p:sp>
-        <p:nvSpPr>
-          <p:cNvPr id="14" name="TextBox 13"/>
-          <p:cNvSpPr txBox="1"/>
-          <p:nvPr/>
-        </p:nvSpPr>
-        <p:spPr>
-          <a:xfrm>
-            <a:off x="987552" y="2633472"/>
-            <a:ext cx="4526280" cy="566928"/>
-          </a:xfrm>
-          <a:prstGeom prst="rect">
-            <a:avLst/>
-          </a:prstGeom>
-          <a:noFill/>
-        </p:spPr>
-        <p:txBody>
-          <a:bodyPr wrap="square" lIns="27432" tIns="27432" rIns="27432" bIns="27432" anchor="t"/>
-          <a:lstStyle/>
-          <a:p>
-            <a:pPr algn="l">
-              <a:lnSpc>
-                <a:spcPct val="100000"/>
-              </a:lnSpc>
-            </a:pPr>
-            <a:r>
-              <a:rPr sz="1500" b="0" i="0">
-                <a:solidFill>
-                  <a:srgbClr val="182E26"/>
-                </a:solidFill>
-                <a:latin typeface="Arial"/>
-              </a:rPr>
-              <a:t>Registra la trazabilidad completa de cada viaje.</a:t>
-            </a:r>
-          </a:p>
-        </p:txBody>
-      </p:sp>
-      <p:sp>
-        <p:nvSpPr>
-          <p:cNvPr id="15" name="TextBox 14"/>
-          <p:cNvSpPr txBox="1"/>
-          <p:nvPr/>
-        </p:nvSpPr>
-        <p:spPr>
-          <a:xfrm>
-            <a:off x="6199632" y="2633472"/>
-            <a:ext cx="320040" cy="320040"/>
-          </a:xfrm>
-          <a:prstGeom prst="rect">
-            <a:avLst/>
-          </a:prstGeom>
-          <a:noFill/>
-        </p:spPr>
-        <p:txBody>
-          <a:bodyPr wrap="square" lIns="27432" tIns="27432" rIns="27432" bIns="27432" anchor="t"/>
-          <a:lstStyle/>
-          <a:p>
-            <a:pPr algn="l">
-              <a:lnSpc>
-                <a:spcPct val="100000"/>
-              </a:lnSpc>
-            </a:pPr>
-            <a:r>
-              <a:rPr sz="2000" b="1" i="0">
-                <a:solidFill>
-                  <a:srgbClr val="B23A3A"/>
-                </a:solidFill>
-                <a:latin typeface="Arial"/>
-              </a:rPr>
-              <a:t>×</a:t>
-            </a:r>
-          </a:p>
-        </p:txBody>
-      </p:sp>
-      <p:sp>
-        <p:nvSpPr>
-          <p:cNvPr id="16" name="TextBox 15"/>
-          <p:cNvSpPr txBox="1"/>
-          <p:nvPr/>
-        </p:nvSpPr>
-        <p:spPr>
-          <a:xfrm>
-            <a:off x="6601968" y="2633472"/>
-            <a:ext cx="4251960" cy="566928"/>
-          </a:xfrm>
-          <a:prstGeom prst="rect">
-            <a:avLst/>
-          </a:prstGeom>
-          <a:noFill/>
-        </p:spPr>
-        <p:txBody>
-          <a:bodyPr wrap="square" lIns="27432" tIns="27432" rIns="27432" bIns="27432" anchor="t"/>
-          <a:lstStyle/>
-          <a:p>
-            <a:pPr algn="l">
-              <a:lnSpc>
-                <a:spcPct val="100000"/>
-              </a:lnSpc>
-            </a:pPr>
-            <a:r>
-              <a:rPr sz="1500" b="0" i="0">
-                <a:solidFill>
-                  <a:srgbClr val="182E26"/>
-                </a:solidFill>
-                <a:latin typeface="Arial"/>
-              </a:rPr>
-              <a:t>Opera fuera del ámbito universitario.</a:t>
-            </a:r>
-          </a:p>
-        </p:txBody>
-      </p:sp>
-      <p:cxnSp>
-        <p:nvCxnSpPr>
-          <p:cNvPr id="17" name="Connector 16"/>
-          <p:cNvCxnSpPr/>
-          <p:nvPr/>
-        </p:nvCxnSpPr>
-        <p:spPr>
-          <a:xfrm>
-            <a:off x="566928" y="3300984"/>
-            <a:ext cx="4919472" cy="0"/>
-          </a:xfrm>
-          <a:prstGeom prst="line">
-            <a:avLst/>
-          </a:prstGeom>
-          <a:ln w="12700">
-            <a:solidFill>
-              <a:srgbClr val="EEF5F0"/>
-            </a:solidFill>
-          </a:ln>
-        </p:spPr>
-        <p:style>
-          <a:lnRef idx="2">
-            <a:schemeClr val="accent1"/>
-          </a:lnRef>
-          <a:fillRef idx="0">
-            <a:schemeClr val="accent1"/>
-          </a:fillRef>
-          <a:effectRef idx="1">
-            <a:schemeClr val="accent1"/>
-          </a:effectRef>
-          <a:fontRef idx="minor">
-            <a:schemeClr val="tx1"/>
-          </a:fontRef>
-        </p:style>
-      </p:cxnSp>
-      <p:cxnSp>
-        <p:nvCxnSpPr>
-          <p:cNvPr id="18" name="Connector 17"/>
-          <p:cNvCxnSpPr/>
-          <p:nvPr/>
-        </p:nvCxnSpPr>
-        <p:spPr>
-          <a:xfrm>
-            <a:off x="6199632" y="3300984"/>
-            <a:ext cx="4617720" cy="0"/>
-          </a:xfrm>
-          <a:prstGeom prst="line">
-            <a:avLst/>
-          </a:prstGeom>
-          <a:ln w="12700">
-            <a:solidFill>
-              <a:srgbClr val="EEF5F0"/>
-            </a:solidFill>
-          </a:ln>
-        </p:spPr>
-        <p:style>
-          <a:lnRef idx="2">
-            <a:schemeClr val="accent1"/>
-          </a:lnRef>
-          <a:fillRef idx="0">
-            <a:schemeClr val="accent1"/>
-          </a:fillRef>
-          <a:effectRef idx="1">
-            <a:schemeClr val="accent1"/>
-          </a:effectRef>
-          <a:fontRef idx="minor">
-            <a:schemeClr val="tx1"/>
-          </a:fontRef>
-        </p:style>
-      </p:cxnSp>
-      <p:sp>
-        <p:nvSpPr>
-          <p:cNvPr id="19" name="TextBox 18"/>
-          <p:cNvSpPr txBox="1"/>
-          <p:nvPr/>
-        </p:nvSpPr>
-        <p:spPr>
-          <a:xfrm>
-            <a:off x="576072" y="3456432"/>
-            <a:ext cx="320040" cy="320040"/>
-          </a:xfrm>
-          <a:prstGeom prst="rect">
-            <a:avLst/>
-          </a:prstGeom>
-          <a:noFill/>
-        </p:spPr>
-        <p:txBody>
-          <a:bodyPr wrap="square" lIns="27432" tIns="27432" rIns="27432" bIns="27432" anchor="t"/>
-          <a:lstStyle/>
-          <a:p>
-            <a:pPr algn="l">
-              <a:lnSpc>
-                <a:spcPct val="100000"/>
-              </a:lnSpc>
-            </a:pPr>
-            <a:r>
-              <a:rPr sz="1800" b="1" i="0">
-                <a:solidFill>
-                  <a:srgbClr val="0B7238"/>
-                </a:solidFill>
-                <a:latin typeface="Arial"/>
-              </a:rPr>
-              <a:t>✓</a:t>
-            </a:r>
-          </a:p>
-        </p:txBody>
-      </p:sp>
-      <p:sp>
-        <p:nvSpPr>
-          <p:cNvPr id="20" name="TextBox 19"/>
-          <p:cNvSpPr txBox="1"/>
-          <p:nvPr/>
-        </p:nvSpPr>
-        <p:spPr>
-          <a:xfrm>
-            <a:off x="987552" y="3456432"/>
-            <a:ext cx="4526280" cy="566928"/>
-          </a:xfrm>
-          <a:prstGeom prst="rect">
-            <a:avLst/>
-          </a:prstGeom>
-          <a:noFill/>
-        </p:spPr>
-        <p:txBody>
-          <a:bodyPr wrap="square" lIns="27432" tIns="27432" rIns="27432" bIns="27432" anchor="t"/>
-          <a:lstStyle/>
-          <a:p>
-            <a:pPr algn="l">
-              <a:lnSpc>
-                <a:spcPct val="100000"/>
-              </a:lnSpc>
-            </a:pPr>
-            <a:r>
-              <a:rPr sz="1500" b="0" i="0">
-                <a:solidFill>
-                  <a:srgbClr val="182E26"/>
-                </a:solidFill>
-                <a:latin typeface="Arial"/>
-              </a:rPr>
-              <a:t>Genera reputación mediante calificaciones.</a:t>
-            </a:r>
-          </a:p>
-        </p:txBody>
-      </p:sp>
-      <p:sp>
-        <p:nvSpPr>
-          <p:cNvPr id="21" name="TextBox 20"/>
-          <p:cNvSpPr txBox="1"/>
-          <p:nvPr/>
-        </p:nvSpPr>
-        <p:spPr>
-          <a:xfrm>
-            <a:off x="6199632" y="3456432"/>
-            <a:ext cx="320040" cy="320040"/>
-          </a:xfrm>
-          <a:prstGeom prst="rect">
-            <a:avLst/>
-          </a:prstGeom>
-          <a:noFill/>
-        </p:spPr>
-        <p:txBody>
-          <a:bodyPr wrap="square" lIns="27432" tIns="27432" rIns="27432" bIns="27432" anchor="t"/>
-          <a:lstStyle/>
-          <a:p>
-            <a:pPr algn="l">
-              <a:lnSpc>
-                <a:spcPct val="100000"/>
-              </a:lnSpc>
-            </a:pPr>
-            <a:r>
-              <a:rPr sz="2000" b="1" i="0">
-                <a:solidFill>
-                  <a:srgbClr val="B23A3A"/>
-                </a:solidFill>
-                <a:latin typeface="Arial"/>
-              </a:rPr>
-              <a:t>×</a:t>
-            </a:r>
-          </a:p>
-        </p:txBody>
-      </p:sp>
-      <p:sp>
-        <p:nvSpPr>
-          <p:cNvPr id="22" name="TextBox 21"/>
-          <p:cNvSpPr txBox="1"/>
-          <p:nvPr/>
-        </p:nvSpPr>
-        <p:spPr>
-          <a:xfrm>
-            <a:off x="6601968" y="3456432"/>
-            <a:ext cx="4251960" cy="566928"/>
-          </a:xfrm>
-          <a:prstGeom prst="rect">
-            <a:avLst/>
-          </a:prstGeom>
-          <a:noFill/>
-        </p:spPr>
-        <p:txBody>
-          <a:bodyPr wrap="square" lIns="27432" tIns="27432" rIns="27432" bIns="27432" anchor="t"/>
-          <a:lstStyle/>
-          <a:p>
-            <a:pPr algn="l">
-              <a:lnSpc>
-                <a:spcPct val="100000"/>
-              </a:lnSpc>
-            </a:pPr>
-            <a:r>
-              <a:rPr sz="1500" b="0" i="0">
-                <a:solidFill>
-                  <a:srgbClr val="182E26"/>
-                </a:solidFill>
-                <a:latin typeface="Arial"/>
-              </a:rPr>
-              <a:t>Sustituye a la autoridad de tránsito.</a:t>
-            </a:r>
-          </a:p>
-        </p:txBody>
-      </p:sp>
-      <p:cxnSp>
-        <p:nvCxnSpPr>
-          <p:cNvPr id="23" name="Connector 22"/>
-          <p:cNvCxnSpPr/>
-          <p:nvPr/>
-        </p:nvCxnSpPr>
-        <p:spPr>
-          <a:xfrm>
-            <a:off x="566928" y="4123944"/>
-            <a:ext cx="4919472" cy="0"/>
-          </a:xfrm>
-          <a:prstGeom prst="line">
-            <a:avLst/>
-          </a:prstGeom>
-          <a:ln w="12700">
-            <a:solidFill>
-              <a:srgbClr val="EEF5F0"/>
-            </a:solidFill>
-          </a:ln>
-        </p:spPr>
-        <p:style>
-          <a:lnRef idx="2">
-            <a:schemeClr val="accent1"/>
-          </a:lnRef>
-          <a:fillRef idx="0">
-            <a:schemeClr val="accent1"/>
-          </a:fillRef>
-          <a:effectRef idx="1">
-            <a:schemeClr val="accent1"/>
-          </a:effectRef>
-          <a:fontRef idx="minor">
-            <a:schemeClr val="tx1"/>
-          </a:fontRef>
-        </p:style>
-      </p:cxnSp>
-      <p:cxnSp>
-        <p:nvCxnSpPr>
-          <p:cNvPr id="24" name="Connector 23"/>
-          <p:cNvCxnSpPr/>
-          <p:nvPr/>
-        </p:nvCxnSpPr>
-        <p:spPr>
-          <a:xfrm>
-            <a:off x="6199632" y="4123944"/>
-            <a:ext cx="4617720" cy="0"/>
-          </a:xfrm>
-          <a:prstGeom prst="line">
-            <a:avLst/>
-          </a:prstGeom>
-          <a:ln w="12700">
-            <a:solidFill>
-              <a:srgbClr val="EEF5F0"/>
-            </a:solidFill>
-          </a:ln>
-        </p:spPr>
-        <p:style>
-          <a:lnRef idx="2">
-            <a:schemeClr val="accent1"/>
-          </a:lnRef>
-          <a:fillRef idx="0">
-            <a:schemeClr val="accent1"/>
-          </a:fillRef>
-          <a:effectRef idx="1">
-            <a:schemeClr val="accent1"/>
-          </a:effectRef>
-          <a:fontRef idx="minor">
-            <a:schemeClr val="tx1"/>
-          </a:fontRef>
-        </p:style>
-      </p:cxnSp>
-      <p:sp>
-        <p:nvSpPr>
-          <p:cNvPr id="25" name="TextBox 24"/>
-          <p:cNvSpPr txBox="1"/>
-          <p:nvPr/>
-        </p:nvSpPr>
-        <p:spPr>
-          <a:xfrm>
-            <a:off x="576072" y="4279392"/>
-            <a:ext cx="320040" cy="320040"/>
-          </a:xfrm>
-          <a:prstGeom prst="rect">
-            <a:avLst/>
-          </a:prstGeom>
-          <a:noFill/>
-        </p:spPr>
-        <p:txBody>
-          <a:bodyPr wrap="square" lIns="27432" tIns="27432" rIns="27432" bIns="27432" anchor="t"/>
-          <a:lstStyle/>
-          <a:p>
-            <a:pPr algn="l">
-              <a:lnSpc>
-                <a:spcPct val="100000"/>
-              </a:lnSpc>
-            </a:pPr>
-            <a:r>
-              <a:rPr sz="1800" b="1" i="0">
-                <a:solidFill>
-                  <a:srgbClr val="0B7238"/>
-                </a:solidFill>
-                <a:latin typeface="Arial"/>
-              </a:rPr>
-              <a:t>✓</a:t>
-            </a:r>
-          </a:p>
-        </p:txBody>
-      </p:sp>
-      <p:sp>
-        <p:nvSpPr>
-          <p:cNvPr id="26" name="TextBox 25"/>
-          <p:cNvSpPr txBox="1"/>
-          <p:nvPr/>
-        </p:nvSpPr>
-        <p:spPr>
-          <a:xfrm>
-            <a:off x="987552" y="4279392"/>
-            <a:ext cx="4526280" cy="566928"/>
-          </a:xfrm>
-          <a:prstGeom prst="rect">
-            <a:avLst/>
-          </a:prstGeom>
-          <a:noFill/>
-        </p:spPr>
-        <p:txBody>
-          <a:bodyPr wrap="square" lIns="27432" tIns="27432" rIns="27432" bIns="27432" anchor="t"/>
-          <a:lstStyle/>
-          <a:p>
-            <a:pPr algn="l">
-              <a:lnSpc>
-                <a:spcPct val="100000"/>
-              </a:lnSpc>
-            </a:pPr>
-            <a:r>
-              <a:rPr sz="1500" b="0" i="0">
-                <a:solidFill>
-                  <a:srgbClr val="182E26"/>
-                </a:solidFill>
-                <a:latin typeface="Arial"/>
-              </a:rPr>
-              <a:t>Registra la tarifa acordada y el estado del pago.</a:t>
-            </a:r>
-          </a:p>
-        </p:txBody>
-      </p:sp>
-      <p:sp>
-        <p:nvSpPr>
-          <p:cNvPr id="27" name="TextBox 26"/>
-          <p:cNvSpPr txBox="1"/>
-          <p:nvPr/>
-        </p:nvSpPr>
-        <p:spPr>
-          <a:xfrm>
-            <a:off x="6199632" y="4279392"/>
-            <a:ext cx="320040" cy="320040"/>
-          </a:xfrm>
-          <a:prstGeom prst="rect">
-            <a:avLst/>
-          </a:prstGeom>
-          <a:noFill/>
-        </p:spPr>
-        <p:txBody>
-          <a:bodyPr wrap="square" lIns="27432" tIns="27432" rIns="27432" bIns="27432" anchor="t"/>
-          <a:lstStyle/>
-          <a:p>
-            <a:pPr algn="l">
-              <a:lnSpc>
-                <a:spcPct val="100000"/>
-              </a:lnSpc>
-            </a:pPr>
-            <a:r>
-              <a:rPr sz="2000" b="1" i="0">
-                <a:solidFill>
-                  <a:srgbClr val="B23A3A"/>
-                </a:solidFill>
-                <a:latin typeface="Arial"/>
-              </a:rPr>
-              <a:t>×</a:t>
-            </a:r>
-          </a:p>
-        </p:txBody>
-      </p:sp>
-      <p:sp>
-        <p:nvSpPr>
-          <p:cNvPr id="28" name="TextBox 27"/>
-          <p:cNvSpPr txBox="1"/>
-          <p:nvPr/>
-        </p:nvSpPr>
-        <p:spPr>
-          <a:xfrm>
-            <a:off x="6601968" y="4279392"/>
-            <a:ext cx="4251960" cy="566928"/>
-          </a:xfrm>
-          <a:prstGeom prst="rect">
-            <a:avLst/>
-          </a:prstGeom>
-          <a:noFill/>
-        </p:spPr>
-        <p:txBody>
-          <a:bodyPr wrap="square" lIns="27432" tIns="27432" rIns="27432" bIns="27432" anchor="t"/>
-          <a:lstStyle/>
-          <a:p>
-            <a:pPr algn="l">
-              <a:lnSpc>
-                <a:spcPct val="100000"/>
-              </a:lnSpc>
-            </a:pPr>
-            <a:r>
-              <a:rPr sz="1500" b="0" i="0">
-                <a:solidFill>
-                  <a:srgbClr val="182E26"/>
-                </a:solidFill>
-                <a:latin typeface="Arial"/>
-              </a:rPr>
-              <a:t>Procesa pagos electrónicos reales.</a:t>
-            </a:r>
-          </a:p>
-        </p:txBody>
-      </p:sp>
-      <p:sp>
-        <p:nvSpPr>
-          <p:cNvPr id="29" name="TextBox 28"/>
-          <p:cNvSpPr txBox="1"/>
-          <p:nvPr/>
-        </p:nvSpPr>
-        <p:spPr>
-          <a:xfrm>
-            <a:off x="566928" y="5276088"/>
-            <a:ext cx="1691640" cy="246888"/>
-          </a:xfrm>
-          <a:prstGeom prst="rect">
-            <a:avLst/>
-          </a:prstGeom>
-          <a:noFill/>
-        </p:spPr>
-        <p:txBody>
-          <a:bodyPr wrap="square" lIns="27432" tIns="27432" rIns="27432" bIns="27432" anchor="t"/>
-          <a:lstStyle/>
-          <a:p>
-            <a:pPr algn="l">
-              <a:lnSpc>
-                <a:spcPct val="100000"/>
-              </a:lnSpc>
-            </a:pPr>
-            <a:r>
-              <a:rPr sz="1200" b="1" i="0">
-                <a:solidFill>
-                  <a:srgbClr val="0B7238"/>
-                </a:solidFill>
-                <a:latin typeface="Arial"/>
-              </a:rPr>
-              <a:t>BASE NORMATIVA</a:t>
-            </a:r>
-          </a:p>
-        </p:txBody>
-      </p:sp>
-      <p:sp>
-        <p:nvSpPr>
-          <p:cNvPr id="30" name="TextBox 29"/>
-          <p:cNvSpPr txBox="1"/>
-          <p:nvPr/>
-        </p:nvSpPr>
-        <p:spPr>
-          <a:xfrm>
-            <a:off x="2011680" y="5239512"/>
-            <a:ext cx="8869680" cy="621792"/>
-          </a:xfrm>
-          <a:prstGeom prst="rect">
-            <a:avLst/>
-          </a:prstGeom>
-          <a:noFill/>
-        </p:spPr>
-        <p:txBody>
-          <a:bodyPr wrap="square" lIns="27432" tIns="27432" rIns="27432" bIns="27432" anchor="t"/>
-          <a:lstStyle/>
-          <a:p>
-            <a:pPr algn="l">
-              <a:lnSpc>
-                <a:spcPct val="100000"/>
-              </a:lnSpc>
-            </a:pPr>
-            <a:r>
-              <a:rPr sz="1200" b="0" i="0">
-                <a:solidFill>
-                  <a:srgbClr val="5F6B65"/>
-                </a:solidFill>
-                <a:latin typeface="Arial"/>
-              </a:rPr>
-              <a:t>Ley 336 de 1996 y Decreto 1079 de 2015: marco nacional de transporte. Ley 30 de 1992: autonomía universitaria para regular condiciones dentro del campus.</a:t>
-            </a:r>
-          </a:p>
-        </p:txBody>
-      </p:sp>
-    </p:spTree>
-  </p:cSld>
-  <p:clrMapOvr>
-    <a:masterClrMapping/>
-  </p:clrMapOvr>
+  <mc:AlternateContent xmlns:mc="http://schemas.openxmlformats.org/markup-compatibility/2006">
+    <mc:Choice xmlns:p14="http://schemas.microsoft.com/office/powerpoint/2010/main" Requires="p14">
+      <p:transition spd="slow" p14:dur="800">
+        <p:circle/>
+      </p:transition>
+    </mc:Choice>
+    <mc:Fallback>
+      <p:transition spd="slow">
+        <p:circle/>
+      </p:transition>
+    </mc:Fallback>
+  </mc:AlternateContent>
 </p:sld>
 </file>
 
@@ -12673,7 +13318,7 @@
                 </a:solidFill>
                 <a:latin typeface="Arial"/>
               </a:rPr>
-              <a:t>Stack simple para construir, probar y evolucionar</a:t>
+              <a:t>La Universidad regula condiciones de seguridad, no legaliza el servicio</a:t>
             </a:r>
           </a:p>
         </p:txBody>
@@ -12707,7 +13352,7 @@
                 </a:solidFill>
                 <a:latin typeface="Arial"/>
               </a:rPr>
-              <a:t>8</a:t>
+              <a:t>7</a:t>
             </a:r>
           </a:p>
         </p:txBody>
@@ -12721,7 +13366,7 @@
         <p:spPr>
           <a:xfrm>
             <a:off x="566928" y="1298448"/>
-            <a:ext cx="1325880" cy="320040"/>
+            <a:ext cx="4800600" cy="320040"/>
           </a:xfrm>
           <a:prstGeom prst="rect">
             <a:avLst/>
@@ -12738,13 +13383,13 @@
               </a:lnSpc>
             </a:pPr>
             <a:r>
-              <a:rPr sz="1400" b="1" i="0">
+              <a:rPr sz="1800" b="1" i="0">
                 <a:solidFill>
                   <a:srgbClr val="0B7238"/>
                 </a:solidFill>
                 <a:latin typeface="Arial"/>
               </a:rPr>
-              <a:t>LENGUAJE</a:t>
+              <a:t>TUCANGO SÍ HACE</a:t>
             </a:r>
           </a:p>
         </p:txBody>
@@ -12757,8 +13402,8 @@
         </p:nvSpPr>
         <p:spPr>
           <a:xfrm>
-            <a:off x="1901952" y="1298448"/>
-            <a:ext cx="3749039" cy="320040"/>
+            <a:off x="6199632" y="1298448"/>
+            <a:ext cx="4663440" cy="320040"/>
           </a:xfrm>
           <a:prstGeom prst="rect">
             <a:avLst/>
@@ -12775,13 +13420,13 @@
               </a:lnSpc>
             </a:pPr>
             <a:r>
-              <a:rPr sz="1600" b="1" i="0">
-                <a:solidFill>
-                  <a:srgbClr val="182E26"/>
-                </a:solidFill>
-                <a:latin typeface="Arial"/>
-              </a:rPr>
-              <a:t>Java · Programación Orientada a Objetos</a:t>
+              <a:rPr sz="1800" b="1" i="0">
+                <a:solidFill>
+                  <a:srgbClr val="B23A3A"/>
+                </a:solidFill>
+                <a:latin typeface="Arial"/>
+              </a:rPr>
+              <a:t>TUCANGO NO HACE</a:t>
             </a:r>
           </a:p>
         </p:txBody>
@@ -12794,15 +13439,15 @@
         </p:nvCxnSpPr>
         <p:spPr>
           <a:xfrm>
-            <a:off x="566928" y="1746504"/>
-            <a:ext cx="5074920" cy="0"/>
+            <a:off x="5870448" y="1234440"/>
+            <a:ext cx="0" cy="4251960"/>
           </a:xfrm>
           <a:prstGeom prst="line">
             <a:avLst/>
           </a:prstGeom>
-          <a:ln w="12700">
+          <a:ln w="25400">
             <a:solidFill>
-              <a:srgbClr val="EEF5F0"/>
+              <a:srgbClr val="E6B820"/>
             </a:solidFill>
           </a:ln>
         </p:spPr>
@@ -12829,8 +13474,8 @@
         </p:nvSpPr>
         <p:spPr>
           <a:xfrm>
-            <a:off x="566928" y="1883664"/>
-            <a:ext cx="1325880" cy="320040"/>
+            <a:off x="576072" y="1810512"/>
+            <a:ext cx="320040" cy="320040"/>
           </a:xfrm>
           <a:prstGeom prst="rect">
             <a:avLst/>
@@ -12847,13 +13492,13 @@
               </a:lnSpc>
             </a:pPr>
             <a:r>
-              <a:rPr sz="1400" b="1" i="0">
+              <a:rPr sz="1800" b="1" i="0">
                 <a:solidFill>
                   <a:srgbClr val="0B7238"/>
                 </a:solidFill>
                 <a:latin typeface="Arial"/>
               </a:rPr>
-              <a:t>JDK</a:t>
+              <a:t>✓</a:t>
             </a:r>
           </a:p>
         </p:txBody>
@@ -12866,8 +13511,8 @@
         </p:nvSpPr>
         <p:spPr>
           <a:xfrm>
-            <a:off x="1901952" y="1883664"/>
-            <a:ext cx="3749039" cy="320040"/>
+            <a:off x="987552" y="1810512"/>
+            <a:ext cx="4526280" cy="566928"/>
           </a:xfrm>
           <a:prstGeom prst="rect">
             <a:avLst/>
@@ -12884,62 +13529,27 @@
               </a:lnSpc>
             </a:pPr>
             <a:r>
-              <a:rPr sz="1600" b="1" i="0">
+              <a:rPr sz="1500" b="0" i="0">
                 <a:solidFill>
                   <a:srgbClr val="182E26"/>
                 </a:solidFill>
                 <a:latin typeface="Arial"/>
               </a:rPr>
-              <a:t>21 · Microsoft OpenJDK</a:t>
-            </a:r>
-          </a:p>
-        </p:txBody>
-      </p:sp>
-      <p:cxnSp>
-        <p:nvCxnSpPr>
-          <p:cNvPr id="9" name="Connector 8"/>
-          <p:cNvCxnSpPr/>
-          <p:nvPr/>
-        </p:nvCxnSpPr>
-        <p:spPr>
-          <a:xfrm>
-            <a:off x="566928" y="2331720"/>
-            <a:ext cx="5074920" cy="0"/>
-          </a:xfrm>
-          <a:prstGeom prst="line">
-            <a:avLst/>
-          </a:prstGeom>
-          <a:ln w="12700">
-            <a:solidFill>
-              <a:srgbClr val="EEF5F0"/>
-            </a:solidFill>
-          </a:ln>
-        </p:spPr>
-        <p:style>
-          <a:lnRef idx="2">
-            <a:schemeClr val="accent1"/>
-          </a:lnRef>
-          <a:fillRef idx="0">
-            <a:schemeClr val="accent1"/>
-          </a:fillRef>
-          <a:effectRef idx="1">
-            <a:schemeClr val="accent1"/>
-          </a:effectRef>
-          <a:fontRef idx="minor">
-            <a:schemeClr val="tx1"/>
-          </a:fontRef>
-        </p:style>
-      </p:cxnSp>
-      <p:sp>
-        <p:nvSpPr>
-          <p:cNvPr id="10" name="TextBox 9"/>
+              <a:t>Verifica documentos, placa y SOAT dentro del campus.</a:t>
+            </a:r>
+          </a:p>
+        </p:txBody>
+      </p:sp>
+      <p:sp>
+        <p:nvSpPr>
+          <p:cNvPr id="9" name="TextBox 8"/>
           <p:cNvSpPr txBox="1"/>
           <p:nvPr/>
         </p:nvSpPr>
         <p:spPr>
           <a:xfrm>
-            <a:off x="566928" y="2468880"/>
-            <a:ext cx="1325880" cy="320040"/>
+            <a:off x="6199632" y="1810512"/>
+            <a:ext cx="320040" cy="320040"/>
           </a:xfrm>
           <a:prstGeom prst="rect">
             <a:avLst/>
@@ -12956,27 +13566,27 @@
               </a:lnSpc>
             </a:pPr>
             <a:r>
-              <a:rPr sz="1400" b="1" i="0">
-                <a:solidFill>
-                  <a:srgbClr val="0B7238"/>
-                </a:solidFill>
-                <a:latin typeface="Arial"/>
-              </a:rPr>
-              <a:t>IDE</a:t>
-            </a:r>
-          </a:p>
-        </p:txBody>
-      </p:sp>
-      <p:sp>
-        <p:nvSpPr>
-          <p:cNvPr id="11" name="TextBox 10"/>
+              <a:rPr sz="2000" b="1" i="0">
+                <a:solidFill>
+                  <a:srgbClr val="B23A3A"/>
+                </a:solidFill>
+                <a:latin typeface="Arial"/>
+              </a:rPr>
+              <a:t>×</a:t>
+            </a:r>
+          </a:p>
+        </p:txBody>
+      </p:sp>
+      <p:sp>
+        <p:nvSpPr>
+          <p:cNvPr id="10" name="TextBox 9"/>
           <p:cNvSpPr txBox="1"/>
           <p:nvPr/>
         </p:nvSpPr>
         <p:spPr>
           <a:xfrm>
-            <a:off x="1901952" y="2468880"/>
-            <a:ext cx="3749039" cy="320040"/>
+            <a:off x="6601968" y="1810512"/>
+            <a:ext cx="4251960" cy="566928"/>
           </a:xfrm>
           <a:prstGeom prst="rect">
             <a:avLst/>
@@ -12993,463 +13603,27 @@
               </a:lnSpc>
             </a:pPr>
             <a:r>
-              <a:rPr sz="1600" b="0" i="0">
+              <a:rPr sz="1500" b="0" i="0">
                 <a:solidFill>
                   <a:srgbClr val="182E26"/>
                 </a:solidFill>
                 <a:latin typeface="Arial"/>
               </a:rPr>
-              <a:t>Apache NetBeans</a:t>
+              <a:t>Legaliza el transporte público en motocicleta.</a:t>
             </a:r>
           </a:p>
         </p:txBody>
       </p:sp>
       <p:cxnSp>
         <p:nvCxnSpPr>
-          <p:cNvPr id="12" name="Connector 11"/>
+          <p:cNvPr id="11" name="Connector 10"/>
           <p:cNvCxnSpPr/>
           <p:nvPr/>
         </p:nvCxnSpPr>
         <p:spPr>
           <a:xfrm>
-            <a:off x="566928" y="2916936"/>
-            <a:ext cx="5074920" cy="0"/>
-          </a:xfrm>
-          <a:prstGeom prst="line">
-            <a:avLst/>
-          </a:prstGeom>
-          <a:ln w="12700">
-            <a:solidFill>
-              <a:srgbClr val="EEF5F0"/>
-            </a:solidFill>
-          </a:ln>
-        </p:spPr>
-        <p:style>
-          <a:lnRef idx="2">
-            <a:schemeClr val="accent1"/>
-          </a:lnRef>
-          <a:fillRef idx="0">
-            <a:schemeClr val="accent1"/>
-          </a:fillRef>
-          <a:effectRef idx="1">
-            <a:schemeClr val="accent1"/>
-          </a:effectRef>
-          <a:fontRef idx="minor">
-            <a:schemeClr val="tx1"/>
-          </a:fontRef>
-        </p:style>
-      </p:cxnSp>
-      <p:sp>
-        <p:nvSpPr>
-          <p:cNvPr id="13" name="TextBox 12"/>
-          <p:cNvSpPr txBox="1"/>
-          <p:nvPr/>
-        </p:nvSpPr>
-        <p:spPr>
-          <a:xfrm>
-            <a:off x="566928" y="3054096"/>
-            <a:ext cx="1325880" cy="320040"/>
-          </a:xfrm>
-          <a:prstGeom prst="rect">
-            <a:avLst/>
-          </a:prstGeom>
-          <a:noFill/>
-        </p:spPr>
-        <p:txBody>
-          <a:bodyPr wrap="square" lIns="27432" tIns="27432" rIns="27432" bIns="27432" anchor="t"/>
-          <a:lstStyle/>
-          <a:p>
-            <a:pPr algn="l">
-              <a:lnSpc>
-                <a:spcPct val="100000"/>
-              </a:lnSpc>
-            </a:pPr>
-            <a:r>
-              <a:rPr sz="1400" b="1" i="0">
-                <a:solidFill>
-                  <a:srgbClr val="0B7238"/>
-                </a:solidFill>
-                <a:latin typeface="Arial"/>
-              </a:rPr>
-              <a:t>BUILD</a:t>
-            </a:r>
-          </a:p>
-        </p:txBody>
-      </p:sp>
-      <p:sp>
-        <p:nvSpPr>
-          <p:cNvPr id="14" name="TextBox 13"/>
-          <p:cNvSpPr txBox="1"/>
-          <p:nvPr/>
-        </p:nvSpPr>
-        <p:spPr>
-          <a:xfrm>
-            <a:off x="1901952" y="3054096"/>
-            <a:ext cx="3749039" cy="320040"/>
-          </a:xfrm>
-          <a:prstGeom prst="rect">
-            <a:avLst/>
-          </a:prstGeom>
-          <a:noFill/>
-        </p:spPr>
-        <p:txBody>
-          <a:bodyPr wrap="square" lIns="27432" tIns="27432" rIns="27432" bIns="27432" anchor="t"/>
-          <a:lstStyle/>
-          <a:p>
-            <a:pPr algn="l">
-              <a:lnSpc>
-                <a:spcPct val="100000"/>
-              </a:lnSpc>
-            </a:pPr>
-            <a:r>
-              <a:rPr sz="1600" b="0" i="0">
-                <a:solidFill>
-                  <a:srgbClr val="182E26"/>
-                </a:solidFill>
-                <a:latin typeface="Arial"/>
-              </a:rPr>
-              <a:t>Apache Ant</a:t>
-            </a:r>
-          </a:p>
-        </p:txBody>
-      </p:sp>
-      <p:cxnSp>
-        <p:nvCxnSpPr>
-          <p:cNvPr id="15" name="Connector 14"/>
-          <p:cNvCxnSpPr/>
-          <p:nvPr/>
-        </p:nvCxnSpPr>
-        <p:spPr>
-          <a:xfrm>
-            <a:off x="566928" y="3502152"/>
-            <a:ext cx="5074920" cy="0"/>
-          </a:xfrm>
-          <a:prstGeom prst="line">
-            <a:avLst/>
-          </a:prstGeom>
-          <a:ln w="12700">
-            <a:solidFill>
-              <a:srgbClr val="EEF5F0"/>
-            </a:solidFill>
-          </a:ln>
-        </p:spPr>
-        <p:style>
-          <a:lnRef idx="2">
-            <a:schemeClr val="accent1"/>
-          </a:lnRef>
-          <a:fillRef idx="0">
-            <a:schemeClr val="accent1"/>
-          </a:fillRef>
-          <a:effectRef idx="1">
-            <a:schemeClr val="accent1"/>
-          </a:effectRef>
-          <a:fontRef idx="minor">
-            <a:schemeClr val="tx1"/>
-          </a:fontRef>
-        </p:style>
-      </p:cxnSp>
-      <p:sp>
-        <p:nvSpPr>
-          <p:cNvPr id="16" name="TextBox 15"/>
-          <p:cNvSpPr txBox="1"/>
-          <p:nvPr/>
-        </p:nvSpPr>
-        <p:spPr>
-          <a:xfrm>
-            <a:off x="566928" y="3639312"/>
-            <a:ext cx="1325880" cy="320040"/>
-          </a:xfrm>
-          <a:prstGeom prst="rect">
-            <a:avLst/>
-          </a:prstGeom>
-          <a:noFill/>
-        </p:spPr>
-        <p:txBody>
-          <a:bodyPr wrap="square" lIns="27432" tIns="27432" rIns="27432" bIns="27432" anchor="t"/>
-          <a:lstStyle/>
-          <a:p>
-            <a:pPr algn="l">
-              <a:lnSpc>
-                <a:spcPct val="100000"/>
-              </a:lnSpc>
-            </a:pPr>
-            <a:r>
-              <a:rPr sz="1400" b="1" i="0">
-                <a:solidFill>
-                  <a:srgbClr val="0B7238"/>
-                </a:solidFill>
-                <a:latin typeface="Arial"/>
-              </a:rPr>
-              <a:t>VERSIÓN</a:t>
-            </a:r>
-          </a:p>
-        </p:txBody>
-      </p:sp>
-      <p:sp>
-        <p:nvSpPr>
-          <p:cNvPr id="17" name="TextBox 16"/>
-          <p:cNvSpPr txBox="1"/>
-          <p:nvPr/>
-        </p:nvSpPr>
-        <p:spPr>
-          <a:xfrm>
-            <a:off x="1901952" y="3639312"/>
-            <a:ext cx="3749039" cy="320040"/>
-          </a:xfrm>
-          <a:prstGeom prst="rect">
-            <a:avLst/>
-          </a:prstGeom>
-          <a:noFill/>
-        </p:spPr>
-        <p:txBody>
-          <a:bodyPr wrap="square" lIns="27432" tIns="27432" rIns="27432" bIns="27432" anchor="t"/>
-          <a:lstStyle/>
-          <a:p>
-            <a:pPr algn="l">
-              <a:lnSpc>
-                <a:spcPct val="100000"/>
-              </a:lnSpc>
-            </a:pPr>
-            <a:r>
-              <a:rPr sz="1600" b="0" i="0">
-                <a:solidFill>
-                  <a:srgbClr val="182E26"/>
-                </a:solidFill>
-                <a:latin typeface="Arial"/>
-              </a:rPr>
-              <a:t>Git + GitHub</a:t>
-            </a:r>
-          </a:p>
-        </p:txBody>
-      </p:sp>
-      <p:cxnSp>
-        <p:nvCxnSpPr>
-          <p:cNvPr id="18" name="Connector 17"/>
-          <p:cNvCxnSpPr/>
-          <p:nvPr/>
-        </p:nvCxnSpPr>
-        <p:spPr>
-          <a:xfrm>
-            <a:off x="566928" y="4087368"/>
-            <a:ext cx="5074920" cy="0"/>
-          </a:xfrm>
-          <a:prstGeom prst="line">
-            <a:avLst/>
-          </a:prstGeom>
-          <a:ln w="12700">
-            <a:solidFill>
-              <a:srgbClr val="EEF5F0"/>
-            </a:solidFill>
-          </a:ln>
-        </p:spPr>
-        <p:style>
-          <a:lnRef idx="2">
-            <a:schemeClr val="accent1"/>
-          </a:lnRef>
-          <a:fillRef idx="0">
-            <a:schemeClr val="accent1"/>
-          </a:fillRef>
-          <a:effectRef idx="1">
-            <a:schemeClr val="accent1"/>
-          </a:effectRef>
-          <a:fontRef idx="minor">
-            <a:schemeClr val="tx1"/>
-          </a:fontRef>
-        </p:style>
-      </p:cxnSp>
-      <p:sp>
-        <p:nvSpPr>
-          <p:cNvPr id="19" name="TextBox 18"/>
-          <p:cNvSpPr txBox="1"/>
-          <p:nvPr/>
-        </p:nvSpPr>
-        <p:spPr>
-          <a:xfrm>
-            <a:off x="566928" y="4224528"/>
-            <a:ext cx="1325880" cy="320040"/>
-          </a:xfrm>
-          <a:prstGeom prst="rect">
-            <a:avLst/>
-          </a:prstGeom>
-          <a:noFill/>
-        </p:spPr>
-        <p:txBody>
-          <a:bodyPr wrap="square" lIns="27432" tIns="27432" rIns="27432" bIns="27432" anchor="t"/>
-          <a:lstStyle/>
-          <a:p>
-            <a:pPr algn="l">
-              <a:lnSpc>
-                <a:spcPct val="100000"/>
-              </a:lnSpc>
-            </a:pPr>
-            <a:r>
-              <a:rPr sz="1400" b="1" i="0">
-                <a:solidFill>
-                  <a:srgbClr val="0B7238"/>
-                </a:solidFill>
-                <a:latin typeface="Arial"/>
-              </a:rPr>
-              <a:t>MODELADO</a:t>
-            </a:r>
-          </a:p>
-        </p:txBody>
-      </p:sp>
-      <p:sp>
-        <p:nvSpPr>
-          <p:cNvPr id="20" name="TextBox 19"/>
-          <p:cNvSpPr txBox="1"/>
-          <p:nvPr/>
-        </p:nvSpPr>
-        <p:spPr>
-          <a:xfrm>
-            <a:off x="1901952" y="4224528"/>
-            <a:ext cx="3749039" cy="320040"/>
-          </a:xfrm>
-          <a:prstGeom prst="rect">
-            <a:avLst/>
-          </a:prstGeom>
-          <a:noFill/>
-        </p:spPr>
-        <p:txBody>
-          <a:bodyPr wrap="square" lIns="27432" tIns="27432" rIns="27432" bIns="27432" anchor="t"/>
-          <a:lstStyle/>
-          <a:p>
-            <a:pPr algn="l">
-              <a:lnSpc>
-                <a:spcPct val="100000"/>
-              </a:lnSpc>
-            </a:pPr>
-            <a:r>
-              <a:rPr sz="1600" b="0" i="0">
-                <a:solidFill>
-                  <a:srgbClr val="182E26"/>
-                </a:solidFill>
-                <a:latin typeface="Arial"/>
-              </a:rPr>
-              <a:t>UML · Mermaid</a:t>
-            </a:r>
-          </a:p>
-        </p:txBody>
-      </p:sp>
-      <p:cxnSp>
-        <p:nvCxnSpPr>
-          <p:cNvPr id="21" name="Connector 20"/>
-          <p:cNvCxnSpPr/>
-          <p:nvPr/>
-        </p:nvCxnSpPr>
-        <p:spPr>
-          <a:xfrm>
-            <a:off x="566928" y="4672584"/>
-            <a:ext cx="5074920" cy="0"/>
-          </a:xfrm>
-          <a:prstGeom prst="line">
-            <a:avLst/>
-          </a:prstGeom>
-          <a:ln w="12700">
-            <a:solidFill>
-              <a:srgbClr val="EEF5F0"/>
-            </a:solidFill>
-          </a:ln>
-        </p:spPr>
-        <p:style>
-          <a:lnRef idx="2">
-            <a:schemeClr val="accent1"/>
-          </a:lnRef>
-          <a:fillRef idx="0">
-            <a:schemeClr val="accent1"/>
-          </a:fillRef>
-          <a:effectRef idx="1">
-            <a:schemeClr val="accent1"/>
-          </a:effectRef>
-          <a:fontRef idx="minor">
-            <a:schemeClr val="tx1"/>
-          </a:fontRef>
-        </p:style>
-      </p:cxnSp>
-      <p:sp>
-        <p:nvSpPr>
-          <p:cNvPr id="22" name="TextBox 21"/>
-          <p:cNvSpPr txBox="1"/>
-          <p:nvPr/>
-        </p:nvSpPr>
-        <p:spPr>
-          <a:xfrm>
-            <a:off x="566928" y="4809744"/>
-            <a:ext cx="1325880" cy="320040"/>
-          </a:xfrm>
-          <a:prstGeom prst="rect">
-            <a:avLst/>
-          </a:prstGeom>
-          <a:noFill/>
-        </p:spPr>
-        <p:txBody>
-          <a:bodyPr wrap="square" lIns="27432" tIns="27432" rIns="27432" bIns="27432" anchor="t"/>
-          <a:lstStyle/>
-          <a:p>
-            <a:pPr algn="l">
-              <a:lnSpc>
-                <a:spcPct val="100000"/>
-              </a:lnSpc>
-            </a:pPr>
-            <a:r>
-              <a:rPr sz="1400" b="1" i="0">
-                <a:solidFill>
-                  <a:srgbClr val="0B7238"/>
-                </a:solidFill>
-                <a:latin typeface="Arial"/>
-              </a:rPr>
-              <a:t>TESTING</a:t>
-            </a:r>
-          </a:p>
-        </p:txBody>
-      </p:sp>
-      <p:sp>
-        <p:nvSpPr>
-          <p:cNvPr id="23" name="TextBox 22"/>
-          <p:cNvSpPr txBox="1"/>
-          <p:nvPr/>
-        </p:nvSpPr>
-        <p:spPr>
-          <a:xfrm>
-            <a:off x="1901952" y="4809744"/>
-            <a:ext cx="3749039" cy="320040"/>
-          </a:xfrm>
-          <a:prstGeom prst="rect">
-            <a:avLst/>
-          </a:prstGeom>
-          <a:noFill/>
-        </p:spPr>
-        <p:txBody>
-          <a:bodyPr wrap="square" lIns="27432" tIns="27432" rIns="27432" bIns="27432" anchor="t"/>
-          <a:lstStyle/>
-          <a:p>
-            <a:pPr algn="l">
-              <a:lnSpc>
-                <a:spcPct val="100000"/>
-              </a:lnSpc>
-            </a:pPr>
-            <a:r>
-              <a:rPr sz="1600" b="0" i="0">
-                <a:solidFill>
-                  <a:srgbClr val="182E26"/>
-                </a:solidFill>
-                <a:latin typeface="Arial"/>
-              </a:rPr>
-              <a:t>JUnit · planificado</a:t>
-            </a:r>
-          </a:p>
-        </p:txBody>
-      </p:sp>
-      <p:cxnSp>
-        <p:nvCxnSpPr>
-          <p:cNvPr id="24" name="Connector 23"/>
-          <p:cNvCxnSpPr/>
-          <p:nvPr/>
-        </p:nvCxnSpPr>
-        <p:spPr>
-          <a:xfrm>
-            <a:off x="566928" y="5257800"/>
-            <a:ext cx="5074920" cy="0"/>
+            <a:off x="566928" y="2478024"/>
+            <a:ext cx="4919472" cy="0"/>
           </a:xfrm>
           <a:prstGeom prst="line">
             <a:avLst/>
@@ -13477,21 +13651,21 @@
       </p:cxnSp>
       <p:cxnSp>
         <p:nvCxnSpPr>
-          <p:cNvPr id="25" name="Connector 24"/>
+          <p:cNvPr id="12" name="Connector 11"/>
           <p:cNvCxnSpPr/>
           <p:nvPr/>
         </p:nvCxnSpPr>
         <p:spPr>
           <a:xfrm>
-            <a:off x="5916168" y="1261872"/>
-            <a:ext cx="0" cy="4315968"/>
+            <a:off x="6199632" y="2478024"/>
+            <a:ext cx="4617720" cy="0"/>
           </a:xfrm>
           <a:prstGeom prst="line">
             <a:avLst/>
           </a:prstGeom>
-          <a:ln w="25400">
+          <a:ln w="12700">
             <a:solidFill>
-              <a:srgbClr val="E6B820"/>
+              <a:srgbClr val="EEF5F0"/>
             </a:solidFill>
           </a:ln>
         </p:spPr>
@@ -13512,14 +13686,14 @@
       </p:cxnSp>
       <p:sp>
         <p:nvSpPr>
-          <p:cNvPr id="26" name="TextBox 25"/>
+          <p:cNvPr id="13" name="TextBox 12"/>
           <p:cNvSpPr txBox="1"/>
           <p:nvPr/>
         </p:nvSpPr>
         <p:spPr>
           <a:xfrm>
-            <a:off x="6236208" y="1316736"/>
-            <a:ext cx="4297680" cy="301752"/>
+            <a:off x="576072" y="2633472"/>
+            <a:ext cx="320040" cy="320040"/>
           </a:xfrm>
           <a:prstGeom prst="rect">
             <a:avLst/>
@@ -13536,307 +13710,27 @@
               </a:lnSpc>
             </a:pPr>
             <a:r>
-              <a:rPr sz="1600" b="1" i="0">
+              <a:rPr sz="1800" b="1" i="0">
                 <a:solidFill>
                   <a:srgbClr val="0B7238"/>
                 </a:solidFill>
                 <a:latin typeface="Arial"/>
               </a:rPr>
-              <a:t>ARQUITECTURA EN CAPAS</a:t>
-            </a:r>
-          </a:p>
-        </p:txBody>
-      </p:sp>
-      <p:sp>
-        <p:nvSpPr>
-          <p:cNvPr id="27" name="Rectangle 26"/>
-          <p:cNvSpPr/>
-          <p:nvPr/>
-        </p:nvSpPr>
-        <p:spPr>
-          <a:xfrm>
-            <a:off x="6236208" y="1847088"/>
-            <a:ext cx="4315968" cy="621792"/>
-          </a:xfrm>
-          <a:prstGeom prst="rect">
-            <a:avLst/>
-          </a:prstGeom>
-          <a:solidFill>
-            <a:srgbClr val="FFFFFF"/>
-          </a:solidFill>
-          <a:ln w="16510">
-            <a:solidFill>
-              <a:srgbClr val="9AA59F"/>
-            </a:solidFill>
-          </a:ln>
-        </p:spPr>
-        <p:style>
-          <a:lnRef idx="1">
-            <a:schemeClr val="accent1"/>
-          </a:lnRef>
-          <a:fillRef idx="3">
-            <a:schemeClr val="accent1"/>
-          </a:fillRef>
-          <a:effectRef idx="2">
-            <a:schemeClr val="accent1"/>
-          </a:effectRef>
-          <a:fontRef idx="minor">
-            <a:schemeClr val="lt1"/>
-          </a:fontRef>
-        </p:style>
-        <p:txBody>
-          <a:bodyPr wrap="square" lIns="109728" tIns="73152" rIns="109728" bIns="73152" rtlCol="0" anchor="ctr"/>
-          <a:lstStyle/>
-          <a:p>
-            <a:pPr algn="l"/>
-            <a:r>
-              <a:rPr sz="1500" b="1">
-                <a:solidFill>
-                  <a:srgbClr val="0B7238"/>
-                </a:solidFill>
-                <a:latin typeface="Arial"/>
-              </a:rPr>
-              <a:t>VISTA</a:t>
-            </a:r>
-          </a:p>
-          <a:p>
-            <a:pPr algn="l">
-              <a:spcBef>
-                <a:spcPts val="300"/>
-              </a:spcBef>
-            </a:pPr>
-            <a:r>
-              <a:rPr sz="1400">
-                <a:solidFill>
-                  <a:srgbClr val="182E26"/>
-                </a:solidFill>
-                <a:latin typeface="Arial"/>
-              </a:rPr>
-              <a:t>Interfaz de consola / menú</a:t>
-            </a:r>
-          </a:p>
-        </p:txBody>
-      </p:sp>
-      <p:sp>
-        <p:nvSpPr>
-          <p:cNvPr id="28" name="Rectangle 27"/>
-          <p:cNvSpPr/>
-          <p:nvPr/>
-        </p:nvSpPr>
-        <p:spPr>
-          <a:xfrm>
-            <a:off x="6236208" y="2688336"/>
-            <a:ext cx="4315968" cy="621792"/>
-          </a:xfrm>
-          <a:prstGeom prst="rect">
-            <a:avLst/>
-          </a:prstGeom>
-          <a:solidFill>
-            <a:srgbClr val="FFFFFF"/>
-          </a:solidFill>
-          <a:ln w="16510">
-            <a:solidFill>
-              <a:srgbClr val="9AA59F"/>
-            </a:solidFill>
-          </a:ln>
-        </p:spPr>
-        <p:style>
-          <a:lnRef idx="1">
-            <a:schemeClr val="accent1"/>
-          </a:lnRef>
-          <a:fillRef idx="3">
-            <a:schemeClr val="accent1"/>
-          </a:fillRef>
-          <a:effectRef idx="2">
-            <a:schemeClr val="accent1"/>
-          </a:effectRef>
-          <a:fontRef idx="minor">
-            <a:schemeClr val="lt1"/>
-          </a:fontRef>
-        </p:style>
-        <p:txBody>
-          <a:bodyPr wrap="square" lIns="109728" tIns="73152" rIns="109728" bIns="73152" rtlCol="0" anchor="ctr"/>
-          <a:lstStyle/>
-          <a:p>
-            <a:pPr algn="l"/>
-            <a:r>
-              <a:rPr sz="1500" b="1">
-                <a:solidFill>
-                  <a:srgbClr val="0B7238"/>
-                </a:solidFill>
-                <a:latin typeface="Arial"/>
-              </a:rPr>
-              <a:t>SERVICIO</a:t>
-            </a:r>
-          </a:p>
-          <a:p>
-            <a:pPr algn="l">
-              <a:spcBef>
-                <a:spcPts val="300"/>
-              </a:spcBef>
-            </a:pPr>
-            <a:r>
-              <a:rPr sz="1400">
-                <a:solidFill>
-                  <a:srgbClr val="182E26"/>
-                </a:solidFill>
-                <a:latin typeface="Arial"/>
-              </a:rPr>
-              <a:t>Gestión de viajes y validaciones</a:t>
-            </a:r>
-          </a:p>
-        </p:txBody>
-      </p:sp>
-      <p:sp>
-        <p:nvSpPr>
-          <p:cNvPr id="29" name="Rectangle 28"/>
-          <p:cNvSpPr/>
-          <p:nvPr/>
-        </p:nvSpPr>
-        <p:spPr>
-          <a:xfrm>
-            <a:off x="6236208" y="3529584"/>
-            <a:ext cx="4315968" cy="621792"/>
-          </a:xfrm>
-          <a:prstGeom prst="rect">
-            <a:avLst/>
-          </a:prstGeom>
-          <a:solidFill>
-            <a:srgbClr val="FFFFFF"/>
-          </a:solidFill>
-          <a:ln w="16510">
-            <a:solidFill>
-              <a:srgbClr val="9AA59F"/>
-            </a:solidFill>
-          </a:ln>
-        </p:spPr>
-        <p:style>
-          <a:lnRef idx="1">
-            <a:schemeClr val="accent1"/>
-          </a:lnRef>
-          <a:fillRef idx="3">
-            <a:schemeClr val="accent1"/>
-          </a:fillRef>
-          <a:effectRef idx="2">
-            <a:schemeClr val="accent1"/>
-          </a:effectRef>
-          <a:fontRef idx="minor">
-            <a:schemeClr val="lt1"/>
-          </a:fontRef>
-        </p:style>
-        <p:txBody>
-          <a:bodyPr wrap="square" lIns="109728" tIns="73152" rIns="109728" bIns="73152" rtlCol="0" anchor="ctr"/>
-          <a:lstStyle/>
-          <a:p>
-            <a:pPr algn="l"/>
-            <a:r>
-              <a:rPr sz="1500" b="1">
-                <a:solidFill>
-                  <a:srgbClr val="0B7238"/>
-                </a:solidFill>
-                <a:latin typeface="Arial"/>
-              </a:rPr>
-              <a:t>PERSISTENCIA</a:t>
-            </a:r>
-          </a:p>
-          <a:p>
-            <a:pPr algn="l">
-              <a:spcBef>
-                <a:spcPts val="300"/>
-              </a:spcBef>
-            </a:pPr>
-            <a:r>
-              <a:rPr sz="1400">
-                <a:solidFill>
-                  <a:srgbClr val="182E26"/>
-                </a:solidFill>
-                <a:latin typeface="Arial"/>
-              </a:rPr>
-              <a:t>Archivos o base de datos</a:t>
-            </a:r>
-          </a:p>
-        </p:txBody>
-      </p:sp>
-      <p:sp>
-        <p:nvSpPr>
-          <p:cNvPr id="30" name="Rectangle 29"/>
-          <p:cNvSpPr/>
-          <p:nvPr/>
-        </p:nvSpPr>
-        <p:spPr>
-          <a:xfrm>
-            <a:off x="6236208" y="4370832"/>
-            <a:ext cx="4315968" cy="621792"/>
-          </a:xfrm>
-          <a:prstGeom prst="rect">
-            <a:avLst/>
-          </a:prstGeom>
-          <a:solidFill>
-            <a:srgbClr val="FFFFFF"/>
-          </a:solidFill>
-          <a:ln w="16510">
-            <a:solidFill>
-              <a:srgbClr val="0B7238"/>
-            </a:solidFill>
-          </a:ln>
-        </p:spPr>
-        <p:style>
-          <a:lnRef idx="1">
-            <a:schemeClr val="accent1"/>
-          </a:lnRef>
-          <a:fillRef idx="3">
-            <a:schemeClr val="accent1"/>
-          </a:fillRef>
-          <a:effectRef idx="2">
-            <a:schemeClr val="accent1"/>
-          </a:effectRef>
-          <a:fontRef idx="minor">
-            <a:schemeClr val="lt1"/>
-          </a:fontRef>
-        </p:style>
-        <p:txBody>
-          <a:bodyPr wrap="square" lIns="109728" tIns="73152" rIns="109728" bIns="73152" rtlCol="0" anchor="ctr"/>
-          <a:lstStyle/>
-          <a:p>
-            <a:pPr algn="l"/>
-            <a:r>
-              <a:rPr sz="1500" b="1">
-                <a:solidFill>
-                  <a:srgbClr val="0B7238"/>
-                </a:solidFill>
-                <a:latin typeface="Arial"/>
-              </a:rPr>
-              <a:t>MODELO</a:t>
-            </a:r>
-          </a:p>
-          <a:p>
-            <a:pPr algn="l">
-              <a:spcBef>
-                <a:spcPts val="300"/>
-              </a:spcBef>
-            </a:pPr>
-            <a:r>
-              <a:rPr sz="1400">
-                <a:solidFill>
-                  <a:srgbClr val="182E26"/>
-                </a:solidFill>
-                <a:latin typeface="Arial"/>
-              </a:rPr>
-              <a:t>Cinco entidades del dominio</a:t>
-            </a:r>
-          </a:p>
-        </p:txBody>
-      </p:sp>
-      <p:sp>
-        <p:nvSpPr>
-          <p:cNvPr id="31" name="TextBox 30"/>
+              <a:t>✓</a:t>
+            </a:r>
+          </a:p>
+        </p:txBody>
+      </p:sp>
+      <p:sp>
+        <p:nvSpPr>
+          <p:cNvPr id="14" name="TextBox 13"/>
           <p:cNvSpPr txBox="1"/>
           <p:nvPr/>
         </p:nvSpPr>
         <p:spPr>
           <a:xfrm>
-            <a:off x="6236208" y="5349240"/>
-            <a:ext cx="4315968" cy="438912"/>
+            <a:off x="987552" y="2633472"/>
+            <a:ext cx="4526280" cy="566928"/>
           </a:xfrm>
           <a:prstGeom prst="rect">
             <a:avLst/>
@@ -13853,13 +13747,597 @@
               </a:lnSpc>
             </a:pPr>
             <a:r>
-              <a:rPr sz="1400" b="0" i="0">
+              <a:rPr sz="1500" b="0" i="0">
+                <a:solidFill>
+                  <a:srgbClr val="182E26"/>
+                </a:solidFill>
+                <a:latin typeface="Arial"/>
+              </a:rPr>
+              <a:t>Registra la trazabilidad completa de cada viaje.</a:t>
+            </a:r>
+          </a:p>
+        </p:txBody>
+      </p:sp>
+      <p:sp>
+        <p:nvSpPr>
+          <p:cNvPr id="15" name="TextBox 14"/>
+          <p:cNvSpPr txBox="1"/>
+          <p:nvPr/>
+        </p:nvSpPr>
+        <p:spPr>
+          <a:xfrm>
+            <a:off x="6199632" y="2633472"/>
+            <a:ext cx="320040" cy="320040"/>
+          </a:xfrm>
+          <a:prstGeom prst="rect">
+            <a:avLst/>
+          </a:prstGeom>
+          <a:noFill/>
+        </p:spPr>
+        <p:txBody>
+          <a:bodyPr wrap="square" lIns="27432" tIns="27432" rIns="27432" bIns="27432" anchor="t"/>
+          <a:lstStyle/>
+          <a:p>
+            <a:pPr algn="l">
+              <a:lnSpc>
+                <a:spcPct val="100000"/>
+              </a:lnSpc>
+            </a:pPr>
+            <a:r>
+              <a:rPr sz="2000" b="1" i="0">
+                <a:solidFill>
+                  <a:srgbClr val="B23A3A"/>
+                </a:solidFill>
+                <a:latin typeface="Arial"/>
+              </a:rPr>
+              <a:t>×</a:t>
+            </a:r>
+          </a:p>
+        </p:txBody>
+      </p:sp>
+      <p:sp>
+        <p:nvSpPr>
+          <p:cNvPr id="16" name="TextBox 15"/>
+          <p:cNvSpPr txBox="1"/>
+          <p:nvPr/>
+        </p:nvSpPr>
+        <p:spPr>
+          <a:xfrm>
+            <a:off x="6601968" y="2633472"/>
+            <a:ext cx="4251960" cy="566928"/>
+          </a:xfrm>
+          <a:prstGeom prst="rect">
+            <a:avLst/>
+          </a:prstGeom>
+          <a:noFill/>
+        </p:spPr>
+        <p:txBody>
+          <a:bodyPr wrap="square" lIns="27432" tIns="27432" rIns="27432" bIns="27432" anchor="t"/>
+          <a:lstStyle/>
+          <a:p>
+            <a:pPr algn="l">
+              <a:lnSpc>
+                <a:spcPct val="100000"/>
+              </a:lnSpc>
+            </a:pPr>
+            <a:r>
+              <a:rPr sz="1500" b="0" i="0">
+                <a:solidFill>
+                  <a:srgbClr val="182E26"/>
+                </a:solidFill>
+                <a:latin typeface="Arial"/>
+              </a:rPr>
+              <a:t>Opera fuera del ámbito universitario.</a:t>
+            </a:r>
+          </a:p>
+        </p:txBody>
+      </p:sp>
+      <p:cxnSp>
+        <p:nvCxnSpPr>
+          <p:cNvPr id="17" name="Connector 16"/>
+          <p:cNvCxnSpPr/>
+          <p:nvPr/>
+        </p:nvCxnSpPr>
+        <p:spPr>
+          <a:xfrm>
+            <a:off x="566928" y="3300984"/>
+            <a:ext cx="4919472" cy="0"/>
+          </a:xfrm>
+          <a:prstGeom prst="line">
+            <a:avLst/>
+          </a:prstGeom>
+          <a:ln w="12700">
+            <a:solidFill>
+              <a:srgbClr val="EEF5F0"/>
+            </a:solidFill>
+          </a:ln>
+        </p:spPr>
+        <p:style>
+          <a:lnRef idx="2">
+            <a:schemeClr val="accent1"/>
+          </a:lnRef>
+          <a:fillRef idx="0">
+            <a:schemeClr val="accent1"/>
+          </a:fillRef>
+          <a:effectRef idx="1">
+            <a:schemeClr val="accent1"/>
+          </a:effectRef>
+          <a:fontRef idx="minor">
+            <a:schemeClr val="tx1"/>
+          </a:fontRef>
+        </p:style>
+      </p:cxnSp>
+      <p:cxnSp>
+        <p:nvCxnSpPr>
+          <p:cNvPr id="18" name="Connector 17"/>
+          <p:cNvCxnSpPr/>
+          <p:nvPr/>
+        </p:nvCxnSpPr>
+        <p:spPr>
+          <a:xfrm>
+            <a:off x="6199632" y="3300984"/>
+            <a:ext cx="4617720" cy="0"/>
+          </a:xfrm>
+          <a:prstGeom prst="line">
+            <a:avLst/>
+          </a:prstGeom>
+          <a:ln w="12700">
+            <a:solidFill>
+              <a:srgbClr val="EEF5F0"/>
+            </a:solidFill>
+          </a:ln>
+        </p:spPr>
+        <p:style>
+          <a:lnRef idx="2">
+            <a:schemeClr val="accent1"/>
+          </a:lnRef>
+          <a:fillRef idx="0">
+            <a:schemeClr val="accent1"/>
+          </a:fillRef>
+          <a:effectRef idx="1">
+            <a:schemeClr val="accent1"/>
+          </a:effectRef>
+          <a:fontRef idx="minor">
+            <a:schemeClr val="tx1"/>
+          </a:fontRef>
+        </p:style>
+      </p:cxnSp>
+      <p:sp>
+        <p:nvSpPr>
+          <p:cNvPr id="19" name="TextBox 18"/>
+          <p:cNvSpPr txBox="1"/>
+          <p:nvPr/>
+        </p:nvSpPr>
+        <p:spPr>
+          <a:xfrm>
+            <a:off x="576072" y="3456432"/>
+            <a:ext cx="320040" cy="320040"/>
+          </a:xfrm>
+          <a:prstGeom prst="rect">
+            <a:avLst/>
+          </a:prstGeom>
+          <a:noFill/>
+        </p:spPr>
+        <p:txBody>
+          <a:bodyPr wrap="square" lIns="27432" tIns="27432" rIns="27432" bIns="27432" anchor="t"/>
+          <a:lstStyle/>
+          <a:p>
+            <a:pPr algn="l">
+              <a:lnSpc>
+                <a:spcPct val="100000"/>
+              </a:lnSpc>
+            </a:pPr>
+            <a:r>
+              <a:rPr sz="1800" b="1" i="0">
+                <a:solidFill>
+                  <a:srgbClr val="0B7238"/>
+                </a:solidFill>
+                <a:latin typeface="Arial"/>
+              </a:rPr>
+              <a:t>✓</a:t>
+            </a:r>
+          </a:p>
+        </p:txBody>
+      </p:sp>
+      <p:sp>
+        <p:nvSpPr>
+          <p:cNvPr id="20" name="TextBox 19"/>
+          <p:cNvSpPr txBox="1"/>
+          <p:nvPr/>
+        </p:nvSpPr>
+        <p:spPr>
+          <a:xfrm>
+            <a:off x="987552" y="3456432"/>
+            <a:ext cx="4526280" cy="566928"/>
+          </a:xfrm>
+          <a:prstGeom prst="rect">
+            <a:avLst/>
+          </a:prstGeom>
+          <a:noFill/>
+        </p:spPr>
+        <p:txBody>
+          <a:bodyPr wrap="square" lIns="27432" tIns="27432" rIns="27432" bIns="27432" anchor="t"/>
+          <a:lstStyle/>
+          <a:p>
+            <a:pPr algn="l">
+              <a:lnSpc>
+                <a:spcPct val="100000"/>
+              </a:lnSpc>
+            </a:pPr>
+            <a:r>
+              <a:rPr sz="1500" b="0" i="0">
+                <a:solidFill>
+                  <a:srgbClr val="182E26"/>
+                </a:solidFill>
+                <a:latin typeface="Arial"/>
+              </a:rPr>
+              <a:t>Genera reputación mediante calificaciones.</a:t>
+            </a:r>
+          </a:p>
+        </p:txBody>
+      </p:sp>
+      <p:sp>
+        <p:nvSpPr>
+          <p:cNvPr id="21" name="TextBox 20"/>
+          <p:cNvSpPr txBox="1"/>
+          <p:nvPr/>
+        </p:nvSpPr>
+        <p:spPr>
+          <a:xfrm>
+            <a:off x="6199632" y="3456432"/>
+            <a:ext cx="320040" cy="320040"/>
+          </a:xfrm>
+          <a:prstGeom prst="rect">
+            <a:avLst/>
+          </a:prstGeom>
+          <a:noFill/>
+        </p:spPr>
+        <p:txBody>
+          <a:bodyPr wrap="square" lIns="27432" tIns="27432" rIns="27432" bIns="27432" anchor="t"/>
+          <a:lstStyle/>
+          <a:p>
+            <a:pPr algn="l">
+              <a:lnSpc>
+                <a:spcPct val="100000"/>
+              </a:lnSpc>
+            </a:pPr>
+            <a:r>
+              <a:rPr sz="2000" b="1" i="0">
+                <a:solidFill>
+                  <a:srgbClr val="B23A3A"/>
+                </a:solidFill>
+                <a:latin typeface="Arial"/>
+              </a:rPr>
+              <a:t>×</a:t>
+            </a:r>
+          </a:p>
+        </p:txBody>
+      </p:sp>
+      <p:sp>
+        <p:nvSpPr>
+          <p:cNvPr id="22" name="TextBox 21"/>
+          <p:cNvSpPr txBox="1"/>
+          <p:nvPr/>
+        </p:nvSpPr>
+        <p:spPr>
+          <a:xfrm>
+            <a:off x="6601968" y="3456432"/>
+            <a:ext cx="4251960" cy="566928"/>
+          </a:xfrm>
+          <a:prstGeom prst="rect">
+            <a:avLst/>
+          </a:prstGeom>
+          <a:noFill/>
+        </p:spPr>
+        <p:txBody>
+          <a:bodyPr wrap="square" lIns="27432" tIns="27432" rIns="27432" bIns="27432" anchor="t"/>
+          <a:lstStyle/>
+          <a:p>
+            <a:pPr algn="l">
+              <a:lnSpc>
+                <a:spcPct val="100000"/>
+              </a:lnSpc>
+            </a:pPr>
+            <a:r>
+              <a:rPr sz="1500" b="0" i="0">
+                <a:solidFill>
+                  <a:srgbClr val="182E26"/>
+                </a:solidFill>
+                <a:latin typeface="Arial"/>
+              </a:rPr>
+              <a:t>Sustituye a la autoridad de tránsito.</a:t>
+            </a:r>
+          </a:p>
+        </p:txBody>
+      </p:sp>
+      <p:cxnSp>
+        <p:nvCxnSpPr>
+          <p:cNvPr id="23" name="Connector 22"/>
+          <p:cNvCxnSpPr/>
+          <p:nvPr/>
+        </p:nvCxnSpPr>
+        <p:spPr>
+          <a:xfrm>
+            <a:off x="566928" y="4123944"/>
+            <a:ext cx="4919472" cy="0"/>
+          </a:xfrm>
+          <a:prstGeom prst="line">
+            <a:avLst/>
+          </a:prstGeom>
+          <a:ln w="12700">
+            <a:solidFill>
+              <a:srgbClr val="EEF5F0"/>
+            </a:solidFill>
+          </a:ln>
+        </p:spPr>
+        <p:style>
+          <a:lnRef idx="2">
+            <a:schemeClr val="accent1"/>
+          </a:lnRef>
+          <a:fillRef idx="0">
+            <a:schemeClr val="accent1"/>
+          </a:fillRef>
+          <a:effectRef idx="1">
+            <a:schemeClr val="accent1"/>
+          </a:effectRef>
+          <a:fontRef idx="minor">
+            <a:schemeClr val="tx1"/>
+          </a:fontRef>
+        </p:style>
+      </p:cxnSp>
+      <p:cxnSp>
+        <p:nvCxnSpPr>
+          <p:cNvPr id="24" name="Connector 23"/>
+          <p:cNvCxnSpPr/>
+          <p:nvPr/>
+        </p:nvCxnSpPr>
+        <p:spPr>
+          <a:xfrm>
+            <a:off x="6199632" y="4123944"/>
+            <a:ext cx="4617720" cy="0"/>
+          </a:xfrm>
+          <a:prstGeom prst="line">
+            <a:avLst/>
+          </a:prstGeom>
+          <a:ln w="12700">
+            <a:solidFill>
+              <a:srgbClr val="EEF5F0"/>
+            </a:solidFill>
+          </a:ln>
+        </p:spPr>
+        <p:style>
+          <a:lnRef idx="2">
+            <a:schemeClr val="accent1"/>
+          </a:lnRef>
+          <a:fillRef idx="0">
+            <a:schemeClr val="accent1"/>
+          </a:fillRef>
+          <a:effectRef idx="1">
+            <a:schemeClr val="accent1"/>
+          </a:effectRef>
+          <a:fontRef idx="minor">
+            <a:schemeClr val="tx1"/>
+          </a:fontRef>
+        </p:style>
+      </p:cxnSp>
+      <p:sp>
+        <p:nvSpPr>
+          <p:cNvPr id="25" name="TextBox 24"/>
+          <p:cNvSpPr txBox="1"/>
+          <p:nvPr/>
+        </p:nvSpPr>
+        <p:spPr>
+          <a:xfrm>
+            <a:off x="576072" y="4279392"/>
+            <a:ext cx="320040" cy="320040"/>
+          </a:xfrm>
+          <a:prstGeom prst="rect">
+            <a:avLst/>
+          </a:prstGeom>
+          <a:noFill/>
+        </p:spPr>
+        <p:txBody>
+          <a:bodyPr wrap="square" lIns="27432" tIns="27432" rIns="27432" bIns="27432" anchor="t"/>
+          <a:lstStyle/>
+          <a:p>
+            <a:pPr algn="l">
+              <a:lnSpc>
+                <a:spcPct val="100000"/>
+              </a:lnSpc>
+            </a:pPr>
+            <a:r>
+              <a:rPr sz="1800" b="1" i="0">
+                <a:solidFill>
+                  <a:srgbClr val="0B7238"/>
+                </a:solidFill>
+                <a:latin typeface="Arial"/>
+              </a:rPr>
+              <a:t>✓</a:t>
+            </a:r>
+          </a:p>
+        </p:txBody>
+      </p:sp>
+      <p:sp>
+        <p:nvSpPr>
+          <p:cNvPr id="26" name="TextBox 25"/>
+          <p:cNvSpPr txBox="1"/>
+          <p:nvPr/>
+        </p:nvSpPr>
+        <p:spPr>
+          <a:xfrm>
+            <a:off x="987552" y="4279392"/>
+            <a:ext cx="4526280" cy="566928"/>
+          </a:xfrm>
+          <a:prstGeom prst="rect">
+            <a:avLst/>
+          </a:prstGeom>
+          <a:noFill/>
+        </p:spPr>
+        <p:txBody>
+          <a:bodyPr wrap="square" lIns="27432" tIns="27432" rIns="27432" bIns="27432" anchor="t"/>
+          <a:lstStyle/>
+          <a:p>
+            <a:pPr algn="l">
+              <a:lnSpc>
+                <a:spcPct val="100000"/>
+              </a:lnSpc>
+            </a:pPr>
+            <a:r>
+              <a:rPr sz="1500" b="0" i="0">
+                <a:solidFill>
+                  <a:srgbClr val="182E26"/>
+                </a:solidFill>
+                <a:latin typeface="Arial"/>
+              </a:rPr>
+              <a:t>Registra la tarifa acordada y el estado del pago.</a:t>
+            </a:r>
+          </a:p>
+        </p:txBody>
+      </p:sp>
+      <p:sp>
+        <p:nvSpPr>
+          <p:cNvPr id="27" name="TextBox 26"/>
+          <p:cNvSpPr txBox="1"/>
+          <p:nvPr/>
+        </p:nvSpPr>
+        <p:spPr>
+          <a:xfrm>
+            <a:off x="6199632" y="4279392"/>
+            <a:ext cx="320040" cy="320040"/>
+          </a:xfrm>
+          <a:prstGeom prst="rect">
+            <a:avLst/>
+          </a:prstGeom>
+          <a:noFill/>
+        </p:spPr>
+        <p:txBody>
+          <a:bodyPr wrap="square" lIns="27432" tIns="27432" rIns="27432" bIns="27432" anchor="t"/>
+          <a:lstStyle/>
+          <a:p>
+            <a:pPr algn="l">
+              <a:lnSpc>
+                <a:spcPct val="100000"/>
+              </a:lnSpc>
+            </a:pPr>
+            <a:r>
+              <a:rPr sz="2000" b="1" i="0">
+                <a:solidFill>
+                  <a:srgbClr val="B23A3A"/>
+                </a:solidFill>
+                <a:latin typeface="Arial"/>
+              </a:rPr>
+              <a:t>×</a:t>
+            </a:r>
+          </a:p>
+        </p:txBody>
+      </p:sp>
+      <p:sp>
+        <p:nvSpPr>
+          <p:cNvPr id="28" name="TextBox 27"/>
+          <p:cNvSpPr txBox="1"/>
+          <p:nvPr/>
+        </p:nvSpPr>
+        <p:spPr>
+          <a:xfrm>
+            <a:off x="6601968" y="4279392"/>
+            <a:ext cx="4251960" cy="566928"/>
+          </a:xfrm>
+          <a:prstGeom prst="rect">
+            <a:avLst/>
+          </a:prstGeom>
+          <a:noFill/>
+        </p:spPr>
+        <p:txBody>
+          <a:bodyPr wrap="square" lIns="27432" tIns="27432" rIns="27432" bIns="27432" anchor="t"/>
+          <a:lstStyle/>
+          <a:p>
+            <a:pPr algn="l">
+              <a:lnSpc>
+                <a:spcPct val="100000"/>
+              </a:lnSpc>
+            </a:pPr>
+            <a:r>
+              <a:rPr sz="1500" b="0" i="0">
+                <a:solidFill>
+                  <a:srgbClr val="182E26"/>
+                </a:solidFill>
+                <a:latin typeface="Arial"/>
+              </a:rPr>
+              <a:t>Procesa pagos electrónicos reales.</a:t>
+            </a:r>
+          </a:p>
+        </p:txBody>
+      </p:sp>
+      <p:sp>
+        <p:nvSpPr>
+          <p:cNvPr id="29" name="TextBox 28"/>
+          <p:cNvSpPr txBox="1"/>
+          <p:nvPr/>
+        </p:nvSpPr>
+        <p:spPr>
+          <a:xfrm>
+            <a:off x="566928" y="5276088"/>
+            <a:ext cx="1691640" cy="246888"/>
+          </a:xfrm>
+          <a:prstGeom prst="rect">
+            <a:avLst/>
+          </a:prstGeom>
+          <a:noFill/>
+        </p:spPr>
+        <p:txBody>
+          <a:bodyPr wrap="square" lIns="27432" tIns="27432" rIns="27432" bIns="27432" anchor="t"/>
+          <a:lstStyle/>
+          <a:p>
+            <a:pPr algn="l">
+              <a:lnSpc>
+                <a:spcPct val="100000"/>
+              </a:lnSpc>
+            </a:pPr>
+            <a:r>
+              <a:rPr sz="1200" b="1" i="0">
+                <a:solidFill>
+                  <a:srgbClr val="0B7238"/>
+                </a:solidFill>
+                <a:latin typeface="Arial"/>
+              </a:rPr>
+              <a:t>BASE NORMATIVA</a:t>
+            </a:r>
+          </a:p>
+        </p:txBody>
+      </p:sp>
+      <p:sp>
+        <p:nvSpPr>
+          <p:cNvPr id="30" name="TextBox 29"/>
+          <p:cNvSpPr txBox="1"/>
+          <p:nvPr/>
+        </p:nvSpPr>
+        <p:spPr>
+          <a:xfrm>
+            <a:off x="2011680" y="5239512"/>
+            <a:ext cx="8869680" cy="621792"/>
+          </a:xfrm>
+          <a:prstGeom prst="rect">
+            <a:avLst/>
+          </a:prstGeom>
+          <a:noFill/>
+        </p:spPr>
+        <p:txBody>
+          <a:bodyPr wrap="square" lIns="27432" tIns="27432" rIns="27432" bIns="27432" anchor="t"/>
+          <a:lstStyle/>
+          <a:p>
+            <a:pPr algn="l">
+              <a:lnSpc>
+                <a:spcPct val="100000"/>
+              </a:lnSpc>
+            </a:pPr>
+            <a:r>
+              <a:rPr sz="1200" b="0" i="0">
                 <a:solidFill>
                   <a:srgbClr val="5F6B65"/>
                 </a:solidFill>
                 <a:latin typeface="Arial"/>
               </a:rPr>
-              <a:t>La estructura separa responsabilidades y permite crecer por etapas.</a:t>
+              <a:t>Ley 336 de 1996 y Decreto 1079 de 2015: marco nacional de transporte. Ley 30 de 1992: autonomía universitaria para regular condiciones dentro del campus.</a:t>
             </a:r>
           </a:p>
         </p:txBody>
@@ -13869,6 +14347,18 @@
   <p:clrMapOvr>
     <a:masterClrMapping/>
   </p:clrMapOvr>
+  <mc:AlternateContent xmlns:mc="http://schemas.openxmlformats.org/markup-compatibility/2006">
+    <mc:Choice xmlns:p14="http://schemas.microsoft.com/office/powerpoint/2010/main" Requires="p14">
+      <p:transition spd="slow">
+        <p14:flash/>
+      </p:transition>
+    </mc:Choice>
+    <mc:Fallback>
+      <p:transition spd="slow">
+        <p:fade/>
+      </p:transition>
+    </mc:Fallback>
+  </mc:AlternateContent>
 </p:sld>
 </file>
 
